--- a/chapter02/ASE_2_PSP_better_engineer.pptx
+++ b/chapter02/ASE_2_PSP_better_engineer.pptx
@@ -1,56 +1,56 @@
 
 <file path=ppt/presentation.xml><?xml version="1.0" encoding="utf-8"?>
-<p:presentation xmlns:a="http://schemas.openxmlformats.org/drawingml/2006/main" xmlns:r="http://schemas.openxmlformats.org/officeDocument/2006/relationships" xmlns:p="http://schemas.openxmlformats.org/presentationml/2006/main" saveSubsetFonts="1">
+<p:presentation xmlns:a="http://schemas.openxmlformats.org/drawingml/2006/main" xmlns:r="http://schemas.openxmlformats.org/officeDocument/2006/relationships" xmlns:p="http://schemas.openxmlformats.org/presentationml/2006/main">
   <p:sldMasterIdLst>
-    <p:sldMasterId id="2147483864" r:id="rId4"/>
+    <p:sldMasterId id="2147483648" r:id="rId1"/>
   </p:sldMasterIdLst>
   <p:notesMasterIdLst>
-    <p:notesMasterId r:id="rId48"/>
+    <p:notesMasterId r:id="rId7"/>
   </p:notesMasterIdLst>
   <p:sldIdLst>
-    <p:sldId id="256" r:id="rId5"/>
-    <p:sldId id="257" r:id="rId6"/>
-    <p:sldId id="277" r:id="rId7"/>
-    <p:sldId id="278" r:id="rId8"/>
-    <p:sldId id="265" r:id="rId9"/>
-    <p:sldId id="288" r:id="rId10"/>
-    <p:sldId id="294" r:id="rId11"/>
-    <p:sldId id="266" r:id="rId12"/>
-    <p:sldId id="267" r:id="rId13"/>
-    <p:sldId id="268" r:id="rId14"/>
-    <p:sldId id="269" r:id="rId15"/>
-    <p:sldId id="286" r:id="rId16"/>
-    <p:sldId id="287" r:id="rId17"/>
-    <p:sldId id="272" r:id="rId18"/>
-    <p:sldId id="273" r:id="rId19"/>
-    <p:sldId id="274" r:id="rId20"/>
-    <p:sldId id="270" r:id="rId21"/>
-    <p:sldId id="297" r:id="rId22"/>
-    <p:sldId id="298" r:id="rId23"/>
-    <p:sldId id="299" r:id="rId24"/>
-    <p:sldId id="279" r:id="rId25"/>
-    <p:sldId id="280" r:id="rId26"/>
-    <p:sldId id="284" r:id="rId27"/>
-    <p:sldId id="281" r:id="rId28"/>
-    <p:sldId id="271" r:id="rId29"/>
-    <p:sldId id="275" r:id="rId30"/>
-    <p:sldId id="282" r:id="rId31"/>
-    <p:sldId id="290" r:id="rId32"/>
-    <p:sldId id="295" r:id="rId33"/>
-    <p:sldId id="296" r:id="rId34"/>
-    <p:sldId id="301" r:id="rId35"/>
-    <p:sldId id="302" r:id="rId36"/>
-    <p:sldId id="303" r:id="rId37"/>
-    <p:sldId id="304" r:id="rId38"/>
-    <p:sldId id="305" r:id="rId39"/>
-    <p:sldId id="306" r:id="rId40"/>
-    <p:sldId id="307" r:id="rId41"/>
-    <p:sldId id="308" r:id="rId42"/>
-    <p:sldId id="309" r:id="rId43"/>
-    <p:sldId id="300" r:id="rId44"/>
-    <p:sldId id="283" r:id="rId45"/>
-    <p:sldId id="285" r:id="rId46"/>
-    <p:sldId id="291" r:id="rId47"/>
+    <p:sldId id="256" r:id="rId3"/>
+    <p:sldId id="257" r:id="rId4"/>
+    <p:sldId id="277" r:id="rId5"/>
+    <p:sldId id="278" r:id="rId6"/>
+    <p:sldId id="265" r:id="rId8"/>
+    <p:sldId id="288" r:id="rId9"/>
+    <p:sldId id="294" r:id="rId10"/>
+    <p:sldId id="266" r:id="rId11"/>
+    <p:sldId id="267" r:id="rId12"/>
+    <p:sldId id="268" r:id="rId13"/>
+    <p:sldId id="269" r:id="rId14"/>
+    <p:sldId id="286" r:id="rId15"/>
+    <p:sldId id="287" r:id="rId16"/>
+    <p:sldId id="272" r:id="rId17"/>
+    <p:sldId id="273" r:id="rId18"/>
+    <p:sldId id="274" r:id="rId19"/>
+    <p:sldId id="270" r:id="rId20"/>
+    <p:sldId id="297" r:id="rId21"/>
+    <p:sldId id="298" r:id="rId22"/>
+    <p:sldId id="299" r:id="rId23"/>
+    <p:sldId id="279" r:id="rId24"/>
+    <p:sldId id="280" r:id="rId25"/>
+    <p:sldId id="284" r:id="rId26"/>
+    <p:sldId id="281" r:id="rId27"/>
+    <p:sldId id="271" r:id="rId28"/>
+    <p:sldId id="275" r:id="rId29"/>
+    <p:sldId id="282" r:id="rId30"/>
+    <p:sldId id="290" r:id="rId31"/>
+    <p:sldId id="295" r:id="rId32"/>
+    <p:sldId id="296" r:id="rId33"/>
+    <p:sldId id="301" r:id="rId34"/>
+    <p:sldId id="302" r:id="rId35"/>
+    <p:sldId id="303" r:id="rId36"/>
+    <p:sldId id="304" r:id="rId37"/>
+    <p:sldId id="305" r:id="rId38"/>
+    <p:sldId id="306" r:id="rId39"/>
+    <p:sldId id="307" r:id="rId40"/>
+    <p:sldId id="308" r:id="rId41"/>
+    <p:sldId id="309" r:id="rId42"/>
+    <p:sldId id="300" r:id="rId43"/>
+    <p:sldId id="283" r:id="rId44"/>
+    <p:sldId id="285" r:id="rId45"/>
+    <p:sldId id="291" r:id="rId46"/>
   </p:sldIdLst>
   <p:sldSz cx="9144000" cy="6858000" type="screen4x3"/>
   <p:notesSz cx="6858000" cy="9144000"/>
@@ -69,7 +69,7 @@
         <a:solidFill>
           <a:schemeClr val="tx1"/>
         </a:solidFill>
-        <a:latin typeface="Arial" charset="0"/>
+        <a:latin typeface="Arial" panose="020B0604020202020204" pitchFamily="34" charset="0"/>
         <a:ea typeface="+mn-ea"/>
         <a:cs typeface="+mn-cs"/>
       </a:defRPr>
@@ -85,7 +85,7 @@
         <a:solidFill>
           <a:schemeClr val="tx1"/>
         </a:solidFill>
-        <a:latin typeface="Arial" charset="0"/>
+        <a:latin typeface="Arial" panose="020B0604020202020204" pitchFamily="34" charset="0"/>
         <a:ea typeface="+mn-ea"/>
         <a:cs typeface="+mn-cs"/>
       </a:defRPr>
@@ -101,7 +101,7 @@
         <a:solidFill>
           <a:schemeClr val="tx1"/>
         </a:solidFill>
-        <a:latin typeface="Arial" charset="0"/>
+        <a:latin typeface="Arial" panose="020B0604020202020204" pitchFamily="34" charset="0"/>
         <a:ea typeface="+mn-ea"/>
         <a:cs typeface="+mn-cs"/>
       </a:defRPr>
@@ -117,7 +117,7 @@
         <a:solidFill>
           <a:schemeClr val="tx1"/>
         </a:solidFill>
-        <a:latin typeface="Arial" charset="0"/>
+        <a:latin typeface="Arial" panose="020B0604020202020204" pitchFamily="34" charset="0"/>
         <a:ea typeface="+mn-ea"/>
         <a:cs typeface="+mn-cs"/>
       </a:defRPr>
@@ -133,7 +133,7 @@
         <a:solidFill>
           <a:schemeClr val="tx1"/>
         </a:solidFill>
-        <a:latin typeface="Arial" charset="0"/>
+        <a:latin typeface="Arial" panose="020B0604020202020204" pitchFamily="34" charset="0"/>
         <a:ea typeface="+mn-ea"/>
         <a:cs typeface="+mn-cs"/>
       </a:defRPr>
@@ -143,7 +143,7 @@
         <a:solidFill>
           <a:schemeClr val="tx1"/>
         </a:solidFill>
-        <a:latin typeface="Arial" charset="0"/>
+        <a:latin typeface="Arial" panose="020B0604020202020204" pitchFamily="34" charset="0"/>
         <a:ea typeface="+mn-ea"/>
         <a:cs typeface="+mn-cs"/>
       </a:defRPr>
@@ -153,7 +153,7 @@
         <a:solidFill>
           <a:schemeClr val="tx1"/>
         </a:solidFill>
-        <a:latin typeface="Arial" charset="0"/>
+        <a:latin typeface="Arial" panose="020B0604020202020204" pitchFamily="34" charset="0"/>
         <a:ea typeface="+mn-ea"/>
         <a:cs typeface="+mn-cs"/>
       </a:defRPr>
@@ -163,7 +163,7 @@
         <a:solidFill>
           <a:schemeClr val="tx1"/>
         </a:solidFill>
-        <a:latin typeface="Arial" charset="0"/>
+        <a:latin typeface="Arial" panose="020B0604020202020204" pitchFamily="34" charset="0"/>
         <a:ea typeface="+mn-ea"/>
         <a:cs typeface="+mn-cs"/>
       </a:defRPr>
@@ -173,7 +173,7 @@
         <a:solidFill>
           <a:schemeClr val="tx1"/>
         </a:solidFill>
-        <a:latin typeface="Arial" charset="0"/>
+        <a:latin typeface="Arial" panose="020B0604020202020204" pitchFamily="34" charset="0"/>
         <a:ea typeface="+mn-ea"/>
         <a:cs typeface="+mn-cs"/>
       </a:defRPr>
@@ -182,12 +182,12 @@
   <p:extLst>
     <p:ext uri="{EFAFB233-063F-42B5-8137-9DF3F51BA10A}">
       <p15:sldGuideLst xmlns:p15="http://schemas.microsoft.com/office/powerpoint/2012/main">
-        <p15:guide id="1" orient="horz" pos="2160">
+        <p15:guide id="1" orient="horz" pos="2160" userDrawn="1">
           <p15:clr>
             <a:srgbClr val="A4A3A4"/>
           </p15:clr>
         </p15:guide>
-        <p15:guide id="2" pos="2880">
+        <p15:guide id="2" pos="2880" userDrawn="1">
           <p15:clr>
             <a:srgbClr val="A4A3A4"/>
           </p15:clr>
@@ -280,8 +280,6 @@
           <a:p>
             <a:fld id="{E4B1B442-110D-40F1-A0D3-D0D26DD945CA}" type="datetimeFigureOut">
               <a:rPr lang="en-US" smtClean="0"/>
-              <a:pPr/>
-              <a:t>7/1/2017</a:t>
             </a:fld>
             <a:endParaRPr lang="en-US"/>
           </a:p>
@@ -350,6 +348,7 @@
               <a:rPr lang="en-US" smtClean="0"/>
               <a:t>Click to edit Master text styles</a:t>
             </a:r>
+            <a:endParaRPr lang="en-US" smtClean="0"/>
           </a:p>
           <a:p>
             <a:pPr lvl="1"/>
@@ -357,6 +356,7 @@
               <a:rPr lang="en-US" smtClean="0"/>
               <a:t>Second level</a:t>
             </a:r>
+            <a:endParaRPr lang="en-US" smtClean="0"/>
           </a:p>
           <a:p>
             <a:pPr lvl="2"/>
@@ -364,6 +364,7 @@
               <a:rPr lang="en-US" smtClean="0"/>
               <a:t>Third level</a:t>
             </a:r>
+            <a:endParaRPr lang="en-US" smtClean="0"/>
           </a:p>
           <a:p>
             <a:pPr lvl="3"/>
@@ -371,6 +372,7 @@
               <a:rPr lang="en-US" smtClean="0"/>
               <a:t>Fourth level</a:t>
             </a:r>
+            <a:endParaRPr lang="en-US" smtClean="0"/>
           </a:p>
           <a:p>
             <a:pPr lvl="4"/>
@@ -442,19 +444,12 @@
           <a:p>
             <a:fld id="{5DFBE8F3-E457-4E14-8249-6B01859045C3}" type="slidenum">
               <a:rPr lang="en-US" smtClean="0"/>
-              <a:pPr/>
-              <a:t>‹#›</a:t>
             </a:fld>
             <a:endParaRPr lang="en-US"/>
           </a:p>
         </p:txBody>
       </p:sp>
     </p:spTree>
-    <p:extLst>
-      <p:ext uri="{BB962C8B-B14F-4D97-AF65-F5344CB8AC3E}">
-        <p14:creationId xmlns:p14="http://schemas.microsoft.com/office/powerpoint/2010/main" val="645970237"/>
-      </p:ext>
-    </p:extLst>
   </p:cSld>
   <p:clrMap bg1="lt1" tx1="dk1" bg2="lt2" tx2="dk2" accent1="accent1" accent2="accent2" accent3="accent3" accent4="accent4" accent5="accent5" accent6="accent6" hlink="hlink" folHlink="folHlink"/>
   <p:notesStyle>
@@ -614,6 +609,7 @@
               <a:rPr lang="en-US" altLang="zh-CN" baseline="0" dirty="0" smtClean="0"/>
               <a:t> is why we want everyone to focus on individual skills,  the right set of skills,  which are the foundation of our team work. </a:t>
             </a:r>
+            <a:endParaRPr lang="en-US" altLang="zh-CN" baseline="0" dirty="0" smtClean="0"/>
           </a:p>
           <a:p>
             <a:endParaRPr lang="en-US" dirty="0"/>
@@ -637,19 +633,12 @@
           <a:p>
             <a:fld id="{5DFBE8F3-E457-4E14-8249-6B01859045C3}" type="slidenum">
               <a:rPr lang="en-US" smtClean="0"/>
-              <a:pPr/>
-              <a:t>4</a:t>
             </a:fld>
             <a:endParaRPr lang="en-US"/>
           </a:p>
         </p:txBody>
       </p:sp>
     </p:spTree>
-    <p:extLst>
-      <p:ext uri="{BB962C8B-B14F-4D97-AF65-F5344CB8AC3E}">
-        <p14:creationId xmlns:p14="http://schemas.microsoft.com/office/powerpoint/2010/main" val="165569790"/>
-      </p:ext>
-    </p:extLst>
   </p:cSld>
   <p:clrMapOvr>
     <a:masterClrMapping/>
@@ -747,19 +736,12 @@
           <a:p>
             <a:fld id="{5DFBE8F3-E457-4E14-8249-6B01859045C3}" type="slidenum">
               <a:rPr lang="en-US" smtClean="0"/>
-              <a:pPr/>
-              <a:t>23</a:t>
             </a:fld>
             <a:endParaRPr lang="en-US"/>
           </a:p>
         </p:txBody>
       </p:sp>
     </p:spTree>
-    <p:extLst>
-      <p:ext uri="{BB962C8B-B14F-4D97-AF65-F5344CB8AC3E}">
-        <p14:creationId xmlns:p14="http://schemas.microsoft.com/office/powerpoint/2010/main" val="71157731"/>
-      </p:ext>
-    </p:extLst>
   </p:cSld>
   <p:clrMapOvr>
     <a:masterClrMapping/>
@@ -825,6 +807,7 @@
               <a:rPr lang="en-US" altLang="zh-CN" baseline="0" dirty="0" smtClean="0"/>
               <a:t>&lt;Jack Welch&gt;</a:t>
             </a:r>
+            <a:endParaRPr lang="en-US" altLang="zh-CN" baseline="0" dirty="0" smtClean="0"/>
           </a:p>
           <a:p>
             <a:endParaRPr lang="en-US" dirty="0"/>
@@ -848,19 +831,12 @@
           <a:p>
             <a:fld id="{5DFBE8F3-E457-4E14-8249-6B01859045C3}" type="slidenum">
               <a:rPr lang="en-US" smtClean="0"/>
-              <a:pPr/>
-              <a:t>26</a:t>
             </a:fld>
             <a:endParaRPr lang="en-US"/>
           </a:p>
         </p:txBody>
       </p:sp>
     </p:spTree>
-    <p:extLst>
-      <p:ext uri="{BB962C8B-B14F-4D97-AF65-F5344CB8AC3E}">
-        <p14:creationId xmlns:p14="http://schemas.microsoft.com/office/powerpoint/2010/main" val="951088154"/>
-      </p:ext>
-    </p:extLst>
   </p:cSld>
   <p:clrMapOvr>
     <a:masterClrMapping/>
@@ -919,6 +895,7 @@
               <a:rPr lang="en-US" dirty="0" smtClean="0"/>
               <a:t>Work is carried out by each individual</a:t>
             </a:r>
+            <a:endParaRPr lang="en-US" dirty="0" smtClean="0"/>
           </a:p>
           <a:p>
             <a:pPr eaLnBrk="1" hangingPunct="1"/>
@@ -926,6 +903,7 @@
               <a:rPr lang="en-US" dirty="0" smtClean="0"/>
               <a:t>Skills as an “Individual Contributor” is important</a:t>
             </a:r>
+            <a:endParaRPr lang="en-US" dirty="0" smtClean="0"/>
           </a:p>
           <a:p>
             <a:endParaRPr lang="en-US" dirty="0"/>
@@ -949,19 +927,12 @@
           <a:p>
             <a:fld id="{5DFBE8F3-E457-4E14-8249-6B01859045C3}" type="slidenum">
               <a:rPr lang="en-US" smtClean="0"/>
-              <a:pPr/>
-              <a:t>5</a:t>
             </a:fld>
             <a:endParaRPr lang="en-US"/>
           </a:p>
         </p:txBody>
       </p:sp>
     </p:spTree>
-    <p:extLst>
-      <p:ext uri="{BB962C8B-B14F-4D97-AF65-F5344CB8AC3E}">
-        <p14:creationId xmlns:p14="http://schemas.microsoft.com/office/powerpoint/2010/main" val="2634694677"/>
-      </p:ext>
-    </p:extLst>
   </p:cSld>
   <p:clrMapOvr>
     <a:masterClrMapping/>
@@ -1029,13 +1000,13 @@
               <a:buSzTx/>
               <a:buFontTx/>
               <a:buNone/>
-              <a:tabLst/>
               <a:defRPr/>
             </a:pPr>
             <a:r>
               <a:rPr lang="en-US" dirty="0" smtClean="0"/>
               <a:t>http://www.sei.cmu.edu/library/abstracts/reports/05sr003.cfm</a:t>
             </a:r>
+            <a:endParaRPr lang="en-US" dirty="0" smtClean="0"/>
           </a:p>
           <a:p>
             <a:pPr marL="0" marR="0" indent="0" algn="l" defTabSz="914400" rtl="0" eaLnBrk="1" fontAlgn="auto" latinLnBrk="0" hangingPunct="1">
@@ -1052,7 +1023,6 @@
               <a:buSzTx/>
               <a:buFontTx/>
               <a:buNone/>
-              <a:tabLst/>
               <a:defRPr/>
             </a:pPr>
             <a:endParaRPr lang="en-US" dirty="0" smtClean="0"/>
@@ -1072,7 +1042,6 @@
               <a:buSzTx/>
               <a:buFontTx/>
               <a:buNone/>
-              <a:tabLst/>
               <a:defRPr/>
             </a:pPr>
             <a:r>
@@ -1111,19 +1080,12 @@
           <a:p>
             <a:fld id="{5DFBE8F3-E457-4E14-8249-6B01859045C3}" type="slidenum">
               <a:rPr lang="en-US" smtClean="0"/>
-              <a:pPr/>
-              <a:t>8</a:t>
             </a:fld>
             <a:endParaRPr lang="en-US"/>
           </a:p>
         </p:txBody>
       </p:sp>
     </p:spTree>
-    <p:extLst>
-      <p:ext uri="{BB962C8B-B14F-4D97-AF65-F5344CB8AC3E}">
-        <p14:creationId xmlns:p14="http://schemas.microsoft.com/office/powerpoint/2010/main" val="2048445535"/>
-      </p:ext>
-    </p:extLst>
   </p:cSld>
   <p:clrMapOvr>
     <a:masterClrMapping/>
@@ -1181,10 +1143,6 @@
               <a:rPr lang="en-US" b="1" dirty="0" smtClean="0"/>
               <a:t>PSP1, PSP1.1 (Introduces estimating and planning)</a:t>
             </a:r>
-            <a:r>
-              <a:rPr lang="en-US" dirty="0" smtClean="0"/>
-              <a:t/>
-            </a:r>
             <a:br>
               <a:rPr lang="en-US" dirty="0" smtClean="0"/>
             </a:br>
@@ -1216,19 +1174,12 @@
           <a:p>
             <a:fld id="{5DFBE8F3-E457-4E14-8249-6B01859045C3}" type="slidenum">
               <a:rPr lang="en-US" smtClean="0"/>
-              <a:pPr/>
-              <a:t>10</a:t>
             </a:fld>
             <a:endParaRPr lang="en-US"/>
           </a:p>
         </p:txBody>
       </p:sp>
     </p:spTree>
-    <p:extLst>
-      <p:ext uri="{BB962C8B-B14F-4D97-AF65-F5344CB8AC3E}">
-        <p14:creationId xmlns:p14="http://schemas.microsoft.com/office/powerpoint/2010/main" val="1193778809"/>
-      </p:ext>
-    </p:extLst>
   </p:cSld>
   <p:clrMapOvr>
     <a:masterClrMapping/>
@@ -1296,16 +1247,11 @@
               <a:buSzTx/>
               <a:buFontTx/>
               <a:buNone/>
-              <a:tabLst/>
               <a:defRPr/>
             </a:pPr>
             <a:r>
               <a:rPr lang="en-US" b="1" dirty="0" smtClean="0"/>
               <a:t>PSP2, PSP2.1 (Introduces quality management and design)</a:t>
-            </a:r>
-            <a:r>
-              <a:rPr lang="en-US" dirty="0" smtClean="0"/>
-              <a:t/>
             </a:r>
             <a:br>
               <a:rPr lang="en-US" dirty="0" smtClean="0"/>
@@ -1341,19 +1287,12 @@
           <a:p>
             <a:fld id="{5DFBE8F3-E457-4E14-8249-6B01859045C3}" type="slidenum">
               <a:rPr lang="en-US" smtClean="0"/>
-              <a:pPr/>
-              <a:t>11</a:t>
             </a:fld>
             <a:endParaRPr lang="en-US"/>
           </a:p>
         </p:txBody>
       </p:sp>
     </p:spTree>
-    <p:extLst>
-      <p:ext uri="{BB962C8B-B14F-4D97-AF65-F5344CB8AC3E}">
-        <p14:creationId xmlns:p14="http://schemas.microsoft.com/office/powerpoint/2010/main" val="2528502605"/>
-      </p:ext>
-    </p:extLst>
   </p:cSld>
   <p:clrMapOvr>
     <a:masterClrMapping/>
@@ -1411,132 +1350,154 @@
               <a:rPr lang="en-US" dirty="0" smtClean="0"/>
               <a:t>The key data collected in the PSP tool are time, defect, and size data – the time spent in each phase; when and where defects were injected, found, and fixed; and the size of the product parts. Software developers use many other measures that are derived from these three basic measures to understand and improve their performance. Derived measures include:</a:t>
             </a:r>
+            <a:endParaRPr lang="en-US" dirty="0" smtClean="0"/>
           </a:p>
           <a:p>
             <a:r>
               <a:rPr lang="en-US" dirty="0" smtClean="0"/>
               <a:t>estimation accuracy (size/time)</a:t>
             </a:r>
+            <a:endParaRPr lang="en-US" dirty="0" smtClean="0"/>
           </a:p>
           <a:p>
             <a:r>
               <a:rPr lang="en-US" dirty="0" smtClean="0"/>
               <a:t>prediction intervals (size/time)</a:t>
             </a:r>
+            <a:endParaRPr lang="en-US" dirty="0" smtClean="0"/>
           </a:p>
           <a:p>
             <a:r>
               <a:rPr lang="en-US" dirty="0" smtClean="0"/>
               <a:t>time in phase distribution</a:t>
             </a:r>
+            <a:endParaRPr lang="en-US" dirty="0" smtClean="0"/>
           </a:p>
           <a:p>
             <a:r>
               <a:rPr lang="en-US" dirty="0" smtClean="0"/>
               <a:t>defect injection distribution</a:t>
             </a:r>
+            <a:endParaRPr lang="en-US" dirty="0" smtClean="0"/>
           </a:p>
           <a:p>
             <a:r>
               <a:rPr lang="en-US" dirty="0" smtClean="0"/>
               <a:t>defect removal distribution</a:t>
             </a:r>
+            <a:endParaRPr lang="en-US" dirty="0" smtClean="0"/>
           </a:p>
           <a:p>
             <a:r>
               <a:rPr lang="en-US" dirty="0" smtClean="0"/>
               <a:t>productivity</a:t>
             </a:r>
+            <a:endParaRPr lang="en-US" dirty="0" smtClean="0"/>
           </a:p>
           <a:p>
             <a:r>
               <a:rPr lang="en-US" dirty="0" smtClean="0"/>
               <a:t>reuse percentage</a:t>
             </a:r>
+            <a:endParaRPr lang="en-US" dirty="0" smtClean="0"/>
           </a:p>
           <a:p>
             <a:r>
               <a:rPr lang="en-US" dirty="0" smtClean="0"/>
               <a:t>cost performance index</a:t>
             </a:r>
+            <a:endParaRPr lang="en-US" dirty="0" smtClean="0"/>
           </a:p>
           <a:p>
             <a:r>
               <a:rPr lang="en-US" dirty="0" smtClean="0"/>
               <a:t>planned value</a:t>
             </a:r>
+            <a:endParaRPr lang="en-US" dirty="0" smtClean="0"/>
           </a:p>
           <a:p>
             <a:r>
               <a:rPr lang="en-US" dirty="0" smtClean="0"/>
               <a:t>earned value</a:t>
             </a:r>
+            <a:endParaRPr lang="en-US" dirty="0" smtClean="0"/>
           </a:p>
           <a:p>
             <a:r>
               <a:rPr lang="en-US" dirty="0" smtClean="0"/>
               <a:t>predicted earned value</a:t>
             </a:r>
+            <a:endParaRPr lang="en-US" dirty="0" smtClean="0"/>
           </a:p>
           <a:p>
             <a:r>
               <a:rPr lang="en-US" dirty="0" smtClean="0"/>
               <a:t>defect density</a:t>
             </a:r>
+            <a:endParaRPr lang="en-US" dirty="0" smtClean="0"/>
           </a:p>
           <a:p>
             <a:r>
               <a:rPr lang="en-US" dirty="0" smtClean="0"/>
               <a:t>defect density by phase</a:t>
             </a:r>
+            <a:endParaRPr lang="en-US" dirty="0" smtClean="0"/>
           </a:p>
           <a:p>
             <a:r>
               <a:rPr lang="en-US" dirty="0" smtClean="0"/>
               <a:t>defect removal rate by phase</a:t>
             </a:r>
+            <a:endParaRPr lang="en-US" dirty="0" smtClean="0"/>
           </a:p>
           <a:p>
             <a:r>
               <a:rPr lang="en-US" dirty="0" smtClean="0"/>
               <a:t>defect removal leverage</a:t>
             </a:r>
+            <a:endParaRPr lang="en-US" dirty="0" smtClean="0"/>
           </a:p>
           <a:p>
             <a:r>
               <a:rPr lang="en-US" dirty="0" smtClean="0"/>
               <a:t>review rates</a:t>
             </a:r>
+            <a:endParaRPr lang="en-US" dirty="0" smtClean="0"/>
           </a:p>
           <a:p>
             <a:r>
               <a:rPr lang="en-US" dirty="0" smtClean="0"/>
               <a:t>process yield</a:t>
             </a:r>
+            <a:endParaRPr lang="en-US" dirty="0" smtClean="0"/>
           </a:p>
           <a:p>
             <a:r>
               <a:rPr lang="en-US" dirty="0" smtClean="0"/>
               <a:t>phase yield</a:t>
             </a:r>
+            <a:endParaRPr lang="en-US" dirty="0" smtClean="0"/>
           </a:p>
           <a:p>
             <a:r>
               <a:rPr lang="en-US" dirty="0" smtClean="0"/>
               <a:t>failure cost of quality (COQ)</a:t>
             </a:r>
+            <a:endParaRPr lang="en-US" dirty="0" smtClean="0"/>
           </a:p>
           <a:p>
             <a:r>
               <a:rPr lang="en-US" dirty="0" smtClean="0"/>
               <a:t>appraisal COQ</a:t>
             </a:r>
+            <a:endParaRPr lang="en-US" dirty="0" smtClean="0"/>
           </a:p>
           <a:p>
             <a:r>
               <a:rPr lang="en-US" dirty="0" smtClean="0"/>
               <a:t>appraisal/failure COQ ratio</a:t>
             </a:r>
+            <a:endParaRPr lang="en-US" dirty="0" smtClean="0"/>
           </a:p>
           <a:p>
             <a:endParaRPr lang="en-US" dirty="0"/>
@@ -1560,19 +1521,12 @@
           <a:p>
             <a:fld id="{5DFBE8F3-E457-4E14-8249-6B01859045C3}" type="slidenum">
               <a:rPr lang="en-US" smtClean="0"/>
-              <a:pPr/>
-              <a:t>16</a:t>
             </a:fld>
             <a:endParaRPr lang="en-US"/>
           </a:p>
         </p:txBody>
       </p:sp>
     </p:spTree>
-    <p:extLst>
-      <p:ext uri="{BB962C8B-B14F-4D97-AF65-F5344CB8AC3E}">
-        <p14:creationId xmlns:p14="http://schemas.microsoft.com/office/powerpoint/2010/main" val="1597704913"/>
-      </p:ext>
-    </p:extLst>
   </p:cSld>
   <p:clrMapOvr>
     <a:masterClrMapping/>
@@ -1634,6 +1588,7 @@
               <a:rPr lang="en-US" altLang="zh-CN" baseline="0" dirty="0" smtClean="0"/>
               <a:t> than 7 years in writing. </a:t>
             </a:r>
+            <a:endParaRPr lang="en-US" altLang="zh-CN" baseline="0" dirty="0" smtClean="0"/>
           </a:p>
           <a:p>
             <a:pPr marL="0" marR="0" lvl="1" indent="0" algn="l" defTabSz="914400" rtl="0" eaLnBrk="1" fontAlgn="auto" latinLnBrk="0" hangingPunct="1">
@@ -1650,7 +1605,6 @@
               <a:buSzTx/>
               <a:buFontTx/>
               <a:buNone/>
-              <a:tabLst/>
               <a:defRPr/>
             </a:pPr>
             <a:r>
@@ -1694,19 +1648,12 @@
           <a:p>
             <a:fld id="{5DFBE8F3-E457-4E14-8249-6B01859045C3}" type="slidenum">
               <a:rPr lang="en-US" smtClean="0"/>
-              <a:pPr/>
-              <a:t>17</a:t>
             </a:fld>
             <a:endParaRPr lang="en-US"/>
           </a:p>
         </p:txBody>
       </p:sp>
     </p:spTree>
-    <p:extLst>
-      <p:ext uri="{BB962C8B-B14F-4D97-AF65-F5344CB8AC3E}">
-        <p14:creationId xmlns:p14="http://schemas.microsoft.com/office/powerpoint/2010/main" val="2954737094"/>
-      </p:ext>
-    </p:extLst>
   </p:cSld>
   <p:clrMapOvr>
     <a:masterClrMapping/>
@@ -1768,6 +1715,7 @@
               <a:rPr lang="en-US" altLang="zh-CN" baseline="0" dirty="0" smtClean="0"/>
               <a:t> than 7 years in writing. </a:t>
             </a:r>
+            <a:endParaRPr lang="en-US" altLang="zh-CN" baseline="0" dirty="0" smtClean="0"/>
           </a:p>
           <a:p>
             <a:pPr marL="0" marR="0" lvl="1" indent="0" algn="l" defTabSz="914400" rtl="0" eaLnBrk="1" fontAlgn="auto" latinLnBrk="0" hangingPunct="1">
@@ -1784,7 +1732,6 @@
               <a:buSzTx/>
               <a:buFontTx/>
               <a:buNone/>
-              <a:tabLst/>
               <a:defRPr/>
             </a:pPr>
             <a:r>
@@ -1828,19 +1775,12 @@
           <a:p>
             <a:fld id="{5DFBE8F3-E457-4E14-8249-6B01859045C3}" type="slidenum">
               <a:rPr lang="en-US" smtClean="0"/>
-              <a:pPr/>
-              <a:t>21</a:t>
             </a:fld>
             <a:endParaRPr lang="en-US"/>
           </a:p>
         </p:txBody>
       </p:sp>
     </p:spTree>
-    <p:extLst>
-      <p:ext uri="{BB962C8B-B14F-4D97-AF65-F5344CB8AC3E}">
-        <p14:creationId xmlns:p14="http://schemas.microsoft.com/office/powerpoint/2010/main" val="3053327590"/>
-      </p:ext>
-    </p:extLst>
   </p:cSld>
   <p:clrMapOvr>
     <a:masterClrMapping/>
@@ -1902,6 +1842,7 @@
               <a:rPr lang="en-US" altLang="zh-CN" baseline="0" dirty="0" smtClean="0"/>
               <a:t> than 7 years in writing. </a:t>
             </a:r>
+            <a:endParaRPr lang="en-US" altLang="zh-CN" baseline="0" dirty="0" smtClean="0"/>
           </a:p>
           <a:p>
             <a:pPr marL="0" marR="0" lvl="1" indent="0" algn="l" defTabSz="914400" rtl="0" eaLnBrk="1" fontAlgn="auto" latinLnBrk="0" hangingPunct="1">
@@ -1918,7 +1859,6 @@
               <a:buSzTx/>
               <a:buFontTx/>
               <a:buNone/>
-              <a:tabLst/>
               <a:defRPr/>
             </a:pPr>
             <a:r>
@@ -1962,19 +1902,12 @@
           <a:p>
             <a:fld id="{5DFBE8F3-E457-4E14-8249-6B01859045C3}" type="slidenum">
               <a:rPr lang="en-US" smtClean="0"/>
-              <a:pPr/>
-              <a:t>22</a:t>
             </a:fld>
             <a:endParaRPr lang="en-US"/>
           </a:p>
         </p:txBody>
       </p:sp>
     </p:spTree>
-    <p:extLst>
-      <p:ext uri="{BB962C8B-B14F-4D97-AF65-F5344CB8AC3E}">
-        <p14:creationId xmlns:p14="http://schemas.microsoft.com/office/powerpoint/2010/main" val="1007651275"/>
-      </p:ext>
-    </p:extLst>
   </p:cSld>
   <p:clrMapOvr>
     <a:masterClrMapping/>
@@ -1983,7 +1916,7 @@
 </file>
 
 <file path=ppt/slideLayouts/slideLayout1.xml><?xml version="1.0" encoding="utf-8"?>
-<p:sldLayout xmlns:a="http://schemas.openxmlformats.org/drawingml/2006/main" xmlns:r="http://schemas.openxmlformats.org/officeDocument/2006/relationships" xmlns:p="http://schemas.openxmlformats.org/presentationml/2006/main" showMasterSp="0" type="title" preserve="1">
+<p:sldLayout xmlns:a="http://schemas.openxmlformats.org/drawingml/2006/main" xmlns:r="http://schemas.openxmlformats.org/officeDocument/2006/relationships" xmlns:p="http://schemas.openxmlformats.org/presentationml/2006/main" type="title" preserve="1" showMasterSp="0">
   <p:cSld name="Title Slide">
     <p:bg>
       <p:bgRef idx="1002">
@@ -2082,7 +2015,6 @@
             <a:lvl1pPr algn="l">
               <a:defRPr sz="4700" b="1"/>
             </a:lvl1pPr>
-            <a:extLst/>
           </a:lstStyle>
           <a:p>
             <a:r>
@@ -2200,7 +2132,6 @@
                 </a:solidFill>
               </a:defRPr>
             </a:lvl9pPr>
-            <a:extLst/>
           </a:lstStyle>
           <a:p>
             <a:r>
@@ -2231,10 +2162,6 @@
             </a:pPr>
             <a:fld id="{94D2DE61-01BA-4D63-AB76-0CD3EEDCC786}" type="datetimeFigureOut">
               <a:rPr lang="en-US" smtClean="0"/>
-              <a:pPr>
-                <a:defRPr/>
-              </a:pPr>
-              <a:t>7/1/2017</a:t>
             </a:fld>
             <a:endParaRPr lang="en-US"/>
           </a:p>
@@ -2282,10 +2209,6 @@
             </a:pPr>
             <a:fld id="{96C92FDE-E245-4054-B13C-B2368E1DA6ED}" type="slidenum">
               <a:rPr lang="en-US" smtClean="0"/>
-              <a:pPr>
-                <a:defRPr/>
-              </a:pPr>
-              <a:t>‹#›</a:t>
             </a:fld>
             <a:endParaRPr lang="en-US"/>
           </a:p>
@@ -2411,6 +2334,7 @@
               <a:rPr lang="en-US" smtClean="0"/>
               <a:t>Click to edit Master text styles</a:t>
             </a:r>
+            <a:endParaRPr lang="en-US" smtClean="0"/>
           </a:p>
           <a:p>
             <a:pPr lvl="1" eaLnBrk="1" latinLnBrk="0" hangingPunct="1"/>
@@ -2418,6 +2342,7 @@
               <a:rPr lang="en-US" smtClean="0"/>
               <a:t>Second level</a:t>
             </a:r>
+            <a:endParaRPr lang="en-US" smtClean="0"/>
           </a:p>
           <a:p>
             <a:pPr lvl="2" eaLnBrk="1" latinLnBrk="0" hangingPunct="1"/>
@@ -2425,6 +2350,7 @@
               <a:rPr lang="en-US" smtClean="0"/>
               <a:t>Third level</a:t>
             </a:r>
+            <a:endParaRPr lang="en-US" smtClean="0"/>
           </a:p>
           <a:p>
             <a:pPr lvl="3" eaLnBrk="1" latinLnBrk="0" hangingPunct="1"/>
@@ -2432,6 +2358,7 @@
               <a:rPr lang="en-US" smtClean="0"/>
               <a:t>Fourth level</a:t>
             </a:r>
+            <a:endParaRPr lang="en-US" smtClean="0"/>
           </a:p>
           <a:p>
             <a:pPr lvl="4" eaLnBrk="1" latinLnBrk="0" hangingPunct="1"/>
@@ -2463,10 +2390,6 @@
             </a:pPr>
             <a:fld id="{C881A71F-7706-4309-B98E-D5818D9C4619}" type="datetimeFigureOut">
               <a:rPr lang="en-US" smtClean="0"/>
-              <a:pPr>
-                <a:defRPr/>
-              </a:pPr>
-              <a:t>7/1/2017</a:t>
             </a:fld>
             <a:endParaRPr lang="en-US"/>
           </a:p>
@@ -2514,10 +2437,6 @@
             </a:pPr>
             <a:fld id="{A1F2A420-6221-4AAB-A5CF-E69F38521E1F}" type="slidenum">
               <a:rPr lang="en-US" smtClean="0"/>
-              <a:pPr>
-                <a:defRPr/>
-              </a:pPr>
-              <a:t>‹#›</a:t>
             </a:fld>
             <a:endParaRPr lang="en-US"/>
           </a:p>
@@ -2532,7 +2451,7 @@
 </file>
 
 <file path=ppt/slideLayouts/slideLayout11.xml><?xml version="1.0" encoding="utf-8"?>
-<p:sldLayout xmlns:a="http://schemas.openxmlformats.org/drawingml/2006/main" xmlns:r="http://schemas.openxmlformats.org/officeDocument/2006/relationships" xmlns:p="http://schemas.openxmlformats.org/presentationml/2006/main" showMasterSp="0" type="vertTitleAndTx" preserve="1">
+<p:sldLayout xmlns:a="http://schemas.openxmlformats.org/drawingml/2006/main" xmlns:r="http://schemas.openxmlformats.org/officeDocument/2006/relationships" xmlns:p="http://schemas.openxmlformats.org/presentationml/2006/main" type="vertTitleAndTx" preserve="1" showMasterSp="0">
   <p:cSld name="Vertical Title and Text">
     <p:spTree>
       <p:nvGrpSpPr>
@@ -2698,6 +2617,7 @@
               <a:rPr lang="en-US" smtClean="0"/>
               <a:t>Click to edit Master text styles</a:t>
             </a:r>
+            <a:endParaRPr lang="en-US" smtClean="0"/>
           </a:p>
           <a:p>
             <a:pPr lvl="1" eaLnBrk="1" latinLnBrk="0" hangingPunct="1"/>
@@ -2705,6 +2625,7 @@
               <a:rPr lang="en-US" smtClean="0"/>
               <a:t>Second level</a:t>
             </a:r>
+            <a:endParaRPr lang="en-US" smtClean="0"/>
           </a:p>
           <a:p>
             <a:pPr lvl="2" eaLnBrk="1" latinLnBrk="0" hangingPunct="1"/>
@@ -2712,6 +2633,7 @@
               <a:rPr lang="en-US" smtClean="0"/>
               <a:t>Third level</a:t>
             </a:r>
+            <a:endParaRPr lang="en-US" smtClean="0"/>
           </a:p>
           <a:p>
             <a:pPr lvl="3" eaLnBrk="1" latinLnBrk="0" hangingPunct="1"/>
@@ -2719,6 +2641,7 @@
               <a:rPr lang="en-US" smtClean="0"/>
               <a:t>Fourth level</a:t>
             </a:r>
+            <a:endParaRPr lang="en-US" smtClean="0"/>
           </a:p>
           <a:p>
             <a:pPr lvl="4" eaLnBrk="1" latinLnBrk="0" hangingPunct="1"/>
@@ -2750,10 +2673,6 @@
             </a:pPr>
             <a:fld id="{D273DBF7-E22B-4D4F-86C6-34AA5D685EBC}" type="datetimeFigureOut">
               <a:rPr lang="en-US" smtClean="0"/>
-              <a:pPr>
-                <a:defRPr/>
-              </a:pPr>
-              <a:t>7/1/2017</a:t>
             </a:fld>
             <a:endParaRPr lang="en-US"/>
           </a:p>
@@ -2806,10 +2725,6 @@
             </a:pPr>
             <a:fld id="{A8E88D30-ACB8-4D6F-92A3-FE6BCCC60051}" type="slidenum">
               <a:rPr lang="en-US" smtClean="0"/>
-              <a:pPr>
-                <a:defRPr/>
-              </a:pPr>
-              <a:t>‹#›</a:t>
             </a:fld>
             <a:endParaRPr lang="en-US"/>
           </a:p>
@@ -2888,6 +2803,7 @@
               <a:rPr lang="en-US" smtClean="0"/>
               <a:t>Click to edit Master text styles</a:t>
             </a:r>
+            <a:endParaRPr lang="en-US" smtClean="0"/>
           </a:p>
           <a:p>
             <a:pPr lvl="1" eaLnBrk="1" latinLnBrk="0" hangingPunct="1"/>
@@ -2895,6 +2811,7 @@
               <a:rPr lang="en-US" smtClean="0"/>
               <a:t>Second level</a:t>
             </a:r>
+            <a:endParaRPr lang="en-US" smtClean="0"/>
           </a:p>
           <a:p>
             <a:pPr lvl="2" eaLnBrk="1" latinLnBrk="0" hangingPunct="1"/>
@@ -2902,6 +2819,7 @@
               <a:rPr lang="en-US" smtClean="0"/>
               <a:t>Third level</a:t>
             </a:r>
+            <a:endParaRPr lang="en-US" smtClean="0"/>
           </a:p>
           <a:p>
             <a:pPr lvl="3" eaLnBrk="1" latinLnBrk="0" hangingPunct="1"/>
@@ -2909,6 +2827,7 @@
               <a:rPr lang="en-US" smtClean="0"/>
               <a:t>Fourth level</a:t>
             </a:r>
+            <a:endParaRPr lang="en-US" smtClean="0"/>
           </a:p>
           <a:p>
             <a:pPr lvl="4" eaLnBrk="1" latinLnBrk="0" hangingPunct="1"/>
@@ -2940,10 +2859,6 @@
             </a:pPr>
             <a:fld id="{D6CE455C-D3FD-456F-B85E-96E6744FDB20}" type="datetimeFigureOut">
               <a:rPr lang="en-US" smtClean="0"/>
-              <a:pPr>
-                <a:defRPr/>
-              </a:pPr>
-              <a:t>7/1/2017</a:t>
             </a:fld>
             <a:endParaRPr lang="en-US"/>
           </a:p>
@@ -2991,10 +2906,6 @@
             </a:pPr>
             <a:fld id="{999CE700-0801-4743-9474-BA29402439C4}" type="slidenum">
               <a:rPr lang="en-US" smtClean="0"/>
-              <a:pPr>
-                <a:defRPr/>
-              </a:pPr>
-              <a:t>‹#›</a:t>
             </a:fld>
             <a:endParaRPr lang="en-US"/>
           </a:p>
@@ -3009,7 +2920,7 @@
 </file>
 
 <file path=ppt/slideLayouts/slideLayout3.xml><?xml version="1.0" encoding="utf-8"?>
-<p:sldLayout xmlns:a="http://schemas.openxmlformats.org/drawingml/2006/main" xmlns:r="http://schemas.openxmlformats.org/officeDocument/2006/relationships" xmlns:p="http://schemas.openxmlformats.org/presentationml/2006/main" showMasterSp="0" type="secHead" preserve="1">
+<p:sldLayout xmlns:a="http://schemas.openxmlformats.org/drawingml/2006/main" xmlns:r="http://schemas.openxmlformats.org/officeDocument/2006/relationships" xmlns:p="http://schemas.openxmlformats.org/presentationml/2006/main" type="secHead" preserve="1" showMasterSp="0">
   <p:cSld name="Section Header">
     <p:bg>
       <p:bgRef idx="1002">
@@ -3160,7 +3071,6 @@
             <a:lvl1pPr algn="l">
               <a:defRPr sz="4700" b="1" cap="none" baseline="0"/>
             </a:lvl1pPr>
-            <a:extLst/>
           </a:lstStyle>
           <a:p>
             <a:r>
@@ -3278,7 +3188,6 @@
                 </a:solidFill>
               </a:defRPr>
             </a:lvl9pPr>
-            <a:extLst/>
           </a:lstStyle>
           <a:p>
             <a:pPr lvl="0" eaLnBrk="1" latinLnBrk="0" hangingPunct="1"/>
@@ -3286,6 +3195,7 @@
               <a:rPr kumimoji="0" lang="en-US" smtClean="0"/>
               <a:t>Click to edit Master text styles</a:t>
             </a:r>
+            <a:endParaRPr kumimoji="0" lang="en-US" smtClean="0"/>
           </a:p>
         </p:txBody>
       </p:sp>
@@ -3309,10 +3219,6 @@
             </a:pPr>
             <a:fld id="{2E396A7C-7724-49DB-BE50-5855776DA282}" type="datetimeFigureOut">
               <a:rPr lang="en-US" smtClean="0"/>
-              <a:pPr>
-                <a:defRPr/>
-              </a:pPr>
-              <a:t>7/1/2017</a:t>
             </a:fld>
             <a:endParaRPr lang="en-US"/>
           </a:p>
@@ -3360,10 +3266,6 @@
             </a:pPr>
             <a:fld id="{A73F0ABC-70BC-4F43-9687-9B309C26DB2A}" type="slidenum">
               <a:rPr lang="en-US" smtClean="0"/>
-              <a:pPr>
-                <a:defRPr/>
-              </a:pPr>
-              <a:t>‹#›</a:t>
             </a:fld>
             <a:endParaRPr lang="en-US"/>
           </a:p>
@@ -3463,7 +3365,6 @@
             <a:lvl9pPr>
               <a:defRPr sz="1800"/>
             </a:lvl9pPr>
-            <a:extLst/>
           </a:lstStyle>
           <a:p>
             <a:pPr lvl="0" eaLnBrk="1" latinLnBrk="0" hangingPunct="1"/>
@@ -3471,6 +3372,7 @@
               <a:rPr lang="en-US" smtClean="0"/>
               <a:t>Click to edit Master text styles</a:t>
             </a:r>
+            <a:endParaRPr lang="en-US" smtClean="0"/>
           </a:p>
           <a:p>
             <a:pPr lvl="1" eaLnBrk="1" latinLnBrk="0" hangingPunct="1"/>
@@ -3478,6 +3380,7 @@
               <a:rPr lang="en-US" smtClean="0"/>
               <a:t>Second level</a:t>
             </a:r>
+            <a:endParaRPr lang="en-US" smtClean="0"/>
           </a:p>
           <a:p>
             <a:pPr lvl="2" eaLnBrk="1" latinLnBrk="0" hangingPunct="1"/>
@@ -3485,6 +3388,7 @@
               <a:rPr lang="en-US" smtClean="0"/>
               <a:t>Third level</a:t>
             </a:r>
+            <a:endParaRPr lang="en-US" smtClean="0"/>
           </a:p>
           <a:p>
             <a:pPr lvl="3" eaLnBrk="1" latinLnBrk="0" hangingPunct="1"/>
@@ -3492,6 +3396,7 @@
               <a:rPr lang="en-US" smtClean="0"/>
               <a:t>Fourth level</a:t>
             </a:r>
+            <a:endParaRPr lang="en-US" smtClean="0"/>
           </a:p>
           <a:p>
             <a:pPr lvl="4" eaLnBrk="1" latinLnBrk="0" hangingPunct="1"/>
@@ -3549,7 +3454,6 @@
             <a:lvl9pPr>
               <a:defRPr sz="1800"/>
             </a:lvl9pPr>
-            <a:extLst/>
           </a:lstStyle>
           <a:p>
             <a:pPr lvl="0" eaLnBrk="1" latinLnBrk="0" hangingPunct="1"/>
@@ -3557,6 +3461,7 @@
               <a:rPr lang="en-US" smtClean="0"/>
               <a:t>Click to edit Master text styles</a:t>
             </a:r>
+            <a:endParaRPr lang="en-US" smtClean="0"/>
           </a:p>
           <a:p>
             <a:pPr lvl="1" eaLnBrk="1" latinLnBrk="0" hangingPunct="1"/>
@@ -3564,6 +3469,7 @@
               <a:rPr lang="en-US" smtClean="0"/>
               <a:t>Second level</a:t>
             </a:r>
+            <a:endParaRPr lang="en-US" smtClean="0"/>
           </a:p>
           <a:p>
             <a:pPr lvl="2" eaLnBrk="1" latinLnBrk="0" hangingPunct="1"/>
@@ -3571,6 +3477,7 @@
               <a:rPr lang="en-US" smtClean="0"/>
               <a:t>Third level</a:t>
             </a:r>
+            <a:endParaRPr lang="en-US" smtClean="0"/>
           </a:p>
           <a:p>
             <a:pPr lvl="3" eaLnBrk="1" latinLnBrk="0" hangingPunct="1"/>
@@ -3578,6 +3485,7 @@
               <a:rPr lang="en-US" smtClean="0"/>
               <a:t>Fourth level</a:t>
             </a:r>
+            <a:endParaRPr lang="en-US" smtClean="0"/>
           </a:p>
           <a:p>
             <a:pPr lvl="4" eaLnBrk="1" latinLnBrk="0" hangingPunct="1"/>
@@ -3609,10 +3517,6 @@
             </a:pPr>
             <a:fld id="{69C10974-708E-4997-950B-416EBCB591A0}" type="datetimeFigureOut">
               <a:rPr lang="en-US" smtClean="0"/>
-              <a:pPr>
-                <a:defRPr/>
-              </a:pPr>
-              <a:t>7/1/2017</a:t>
             </a:fld>
             <a:endParaRPr lang="en-US"/>
           </a:p>
@@ -3660,10 +3564,6 @@
             </a:pPr>
             <a:fld id="{30B18713-D1F9-440C-98D7-11A0982A0701}" type="slidenum">
               <a:rPr lang="en-US" smtClean="0"/>
-              <a:pPr>
-                <a:defRPr/>
-              </a:pPr>
-              <a:t>‹#›</a:t>
             </a:fld>
             <a:endParaRPr lang="en-US"/>
           </a:p>
@@ -3711,7 +3611,6 @@
             <a:lvl1pPr>
               <a:defRPr/>
             </a:lvl1pPr>
-            <a:extLst/>
           </a:lstStyle>
           <a:p>
             <a:r>
@@ -3777,7 +3676,6 @@
               <a:buNone/>
               <a:defRPr sz="1600" b="1"/>
             </a:lvl9pPr>
-            <a:extLst/>
           </a:lstStyle>
           <a:p>
             <a:pPr lvl="0" eaLnBrk="1" latinLnBrk="0" hangingPunct="1"/>
@@ -3785,6 +3683,7 @@
               <a:rPr kumimoji="0" lang="en-US" smtClean="0"/>
               <a:t>Click to edit Master text styles</a:t>
             </a:r>
+            <a:endParaRPr kumimoji="0" lang="en-US" smtClean="0"/>
           </a:p>
         </p:txBody>
       </p:sp>
@@ -3834,7 +3733,6 @@
             <a:lvl9pPr>
               <a:defRPr sz="1600"/>
             </a:lvl9pPr>
-            <a:extLst/>
           </a:lstStyle>
           <a:p>
             <a:pPr lvl="0" eaLnBrk="1" latinLnBrk="0" hangingPunct="1"/>
@@ -3842,6 +3740,7 @@
               <a:rPr lang="en-US" smtClean="0"/>
               <a:t>Click to edit Master text styles</a:t>
             </a:r>
+            <a:endParaRPr lang="en-US" smtClean="0"/>
           </a:p>
           <a:p>
             <a:pPr lvl="1" eaLnBrk="1" latinLnBrk="0" hangingPunct="1"/>
@@ -3849,6 +3748,7 @@
               <a:rPr lang="en-US" smtClean="0"/>
               <a:t>Second level</a:t>
             </a:r>
+            <a:endParaRPr lang="en-US" smtClean="0"/>
           </a:p>
           <a:p>
             <a:pPr lvl="2" eaLnBrk="1" latinLnBrk="0" hangingPunct="1"/>
@@ -3856,6 +3756,7 @@
               <a:rPr lang="en-US" smtClean="0"/>
               <a:t>Third level</a:t>
             </a:r>
+            <a:endParaRPr lang="en-US" smtClean="0"/>
           </a:p>
           <a:p>
             <a:pPr lvl="3" eaLnBrk="1" latinLnBrk="0" hangingPunct="1"/>
@@ -3863,6 +3764,7 @@
               <a:rPr lang="en-US" smtClean="0"/>
               <a:t>Fourth level</a:t>
             </a:r>
+            <a:endParaRPr lang="en-US" smtClean="0"/>
           </a:p>
           <a:p>
             <a:pPr lvl="4" eaLnBrk="1" latinLnBrk="0" hangingPunct="1"/>
@@ -3929,7 +3831,6 @@
               <a:buNone/>
               <a:defRPr sz="1600" b="1"/>
             </a:lvl9pPr>
-            <a:extLst/>
           </a:lstStyle>
           <a:p>
             <a:pPr lvl="0" eaLnBrk="1" latinLnBrk="0" hangingPunct="1"/>
@@ -3937,6 +3838,7 @@
               <a:rPr kumimoji="0" lang="en-US" smtClean="0"/>
               <a:t>Click to edit Master text styles</a:t>
             </a:r>
+            <a:endParaRPr kumimoji="0" lang="en-US" smtClean="0"/>
           </a:p>
         </p:txBody>
       </p:sp>
@@ -3986,7 +3888,6 @@
             <a:lvl9pPr>
               <a:defRPr sz="1600"/>
             </a:lvl9pPr>
-            <a:extLst/>
           </a:lstStyle>
           <a:p>
             <a:pPr lvl="0" eaLnBrk="1" latinLnBrk="0" hangingPunct="1"/>
@@ -3994,6 +3895,7 @@
               <a:rPr lang="en-US" smtClean="0"/>
               <a:t>Click to edit Master text styles</a:t>
             </a:r>
+            <a:endParaRPr lang="en-US" smtClean="0"/>
           </a:p>
           <a:p>
             <a:pPr lvl="1" eaLnBrk="1" latinLnBrk="0" hangingPunct="1"/>
@@ -4001,6 +3903,7 @@
               <a:rPr lang="en-US" smtClean="0"/>
               <a:t>Second level</a:t>
             </a:r>
+            <a:endParaRPr lang="en-US" smtClean="0"/>
           </a:p>
           <a:p>
             <a:pPr lvl="2" eaLnBrk="1" latinLnBrk="0" hangingPunct="1"/>
@@ -4008,6 +3911,7 @@
               <a:rPr lang="en-US" smtClean="0"/>
               <a:t>Third level</a:t>
             </a:r>
+            <a:endParaRPr lang="en-US" smtClean="0"/>
           </a:p>
           <a:p>
             <a:pPr lvl="3" eaLnBrk="1" latinLnBrk="0" hangingPunct="1"/>
@@ -4015,6 +3919,7 @@
               <a:rPr lang="en-US" smtClean="0"/>
               <a:t>Fourth level</a:t>
             </a:r>
+            <a:endParaRPr lang="en-US" smtClean="0"/>
           </a:p>
           <a:p>
             <a:pPr lvl="4" eaLnBrk="1" latinLnBrk="0" hangingPunct="1"/>
@@ -4046,10 +3951,6 @@
             </a:pPr>
             <a:fld id="{F816DDEF-5D7B-4ED2-8F62-B3F1C44D6EC5}" type="datetimeFigureOut">
               <a:rPr lang="en-US" smtClean="0"/>
-              <a:pPr>
-                <a:defRPr/>
-              </a:pPr>
-              <a:t>7/1/2017</a:t>
             </a:fld>
             <a:endParaRPr lang="en-US"/>
           </a:p>
@@ -4097,10 +3998,6 @@
             </a:pPr>
             <a:fld id="{189D69AC-A5BC-4B9B-A0CF-168768D6EE1C}" type="slidenum">
               <a:rPr lang="en-US" smtClean="0"/>
-              <a:pPr>
-                <a:defRPr/>
-              </a:pPr>
-              <a:t>‹#›</a:t>
             </a:fld>
             <a:endParaRPr lang="en-US"/>
           </a:p>
@@ -4174,10 +4071,6 @@
             </a:pPr>
             <a:fld id="{FA20EB90-C4D3-4B6B-82CE-1D435DA3ACC1}" type="datetimeFigureOut">
               <a:rPr lang="en-US" smtClean="0"/>
-              <a:pPr>
-                <a:defRPr/>
-              </a:pPr>
-              <a:t>7/1/2017</a:t>
             </a:fld>
             <a:endParaRPr lang="en-US"/>
           </a:p>
@@ -4225,10 +4118,6 @@
             </a:pPr>
             <a:fld id="{5996EA18-ADFC-4118-B2BD-9E16AC42B17C}" type="slidenum">
               <a:rPr lang="en-US" smtClean="0"/>
-              <a:pPr>
-                <a:defRPr/>
-              </a:pPr>
-              <a:t>‹#›</a:t>
             </a:fld>
             <a:endParaRPr lang="en-US"/>
           </a:p>
@@ -4243,7 +4132,7 @@
 </file>
 
 <file path=ppt/slideLayouts/slideLayout7.xml><?xml version="1.0" encoding="utf-8"?>
-<p:sldLayout xmlns:a="http://schemas.openxmlformats.org/drawingml/2006/main" xmlns:r="http://schemas.openxmlformats.org/officeDocument/2006/relationships" xmlns:p="http://schemas.openxmlformats.org/presentationml/2006/main" showMasterSp="0" type="blank" preserve="1">
+<p:sldLayout xmlns:a="http://schemas.openxmlformats.org/drawingml/2006/main" xmlns:r="http://schemas.openxmlformats.org/officeDocument/2006/relationships" xmlns:p="http://schemas.openxmlformats.org/presentationml/2006/main" type="blank" preserve="1" showMasterSp="0">
   <p:cSld name="Blank">
     <p:spTree>
       <p:nvGrpSpPr>
@@ -4279,10 +4168,6 @@
             </a:pPr>
             <a:fld id="{ADB8F2E0-4A51-4E31-9C27-9BC27CEF43F6}" type="datetimeFigureOut">
               <a:rPr lang="en-US" smtClean="0"/>
-              <a:pPr>
-                <a:defRPr/>
-              </a:pPr>
-              <a:t>7/1/2017</a:t>
             </a:fld>
             <a:endParaRPr lang="en-US"/>
           </a:p>
@@ -4330,10 +4215,6 @@
             </a:pPr>
             <a:fld id="{47E8C9AC-B7D4-4681-89F5-BB9F7F0C5160}" type="slidenum">
               <a:rPr lang="en-US" smtClean="0"/>
-              <a:pPr>
-                <a:defRPr/>
-              </a:pPr>
-              <a:t>‹#›</a:t>
             </a:fld>
             <a:endParaRPr lang="en-US"/>
           </a:p>
@@ -4389,7 +4270,6 @@
             <a:lvl1pPr algn="l">
               <a:defRPr sz="2000" b="0"/>
             </a:lvl1pPr>
-            <a:extLst/>
           </a:lstStyle>
           <a:p>
             <a:r>
@@ -4446,7 +4326,6 @@
             <a:lvl9pPr>
               <a:defRPr sz="2000"/>
             </a:lvl9pPr>
-            <a:extLst/>
           </a:lstStyle>
           <a:p>
             <a:pPr lvl="0" eaLnBrk="1" latinLnBrk="0" hangingPunct="1"/>
@@ -4454,6 +4333,7 @@
               <a:rPr lang="en-US" smtClean="0"/>
               <a:t>Click to edit Master text styles</a:t>
             </a:r>
+            <a:endParaRPr lang="en-US" smtClean="0"/>
           </a:p>
           <a:p>
             <a:pPr lvl="1" eaLnBrk="1" latinLnBrk="0" hangingPunct="1"/>
@@ -4461,6 +4341,7 @@
               <a:rPr lang="en-US" smtClean="0"/>
               <a:t>Second level</a:t>
             </a:r>
+            <a:endParaRPr lang="en-US" smtClean="0"/>
           </a:p>
           <a:p>
             <a:pPr lvl="2" eaLnBrk="1" latinLnBrk="0" hangingPunct="1"/>
@@ -4468,6 +4349,7 @@
               <a:rPr lang="en-US" smtClean="0"/>
               <a:t>Third level</a:t>
             </a:r>
+            <a:endParaRPr lang="en-US" smtClean="0"/>
           </a:p>
           <a:p>
             <a:pPr lvl="3" eaLnBrk="1" latinLnBrk="0" hangingPunct="1"/>
@@ -4475,6 +4357,7 @@
               <a:rPr lang="en-US" smtClean="0"/>
               <a:t>Fourth level</a:t>
             </a:r>
+            <a:endParaRPr lang="en-US" smtClean="0"/>
           </a:p>
           <a:p>
             <a:pPr lvl="4" eaLnBrk="1" latinLnBrk="0" hangingPunct="1"/>
@@ -4541,7 +4424,6 @@
               <a:buNone/>
               <a:defRPr sz="900"/>
             </a:lvl9pPr>
-            <a:extLst/>
           </a:lstStyle>
           <a:p>
             <a:pPr lvl="0" eaLnBrk="1" latinLnBrk="0" hangingPunct="1"/>
@@ -4549,6 +4431,7 @@
               <a:rPr kumimoji="0" lang="en-US" smtClean="0"/>
               <a:t>Click to edit Master text styles</a:t>
             </a:r>
+            <a:endParaRPr kumimoji="0" lang="en-US" smtClean="0"/>
           </a:p>
         </p:txBody>
       </p:sp>
@@ -4572,10 +4455,6 @@
             </a:pPr>
             <a:fld id="{0EBCA414-E586-4DAC-83A0-743F3572C47D}" type="datetimeFigureOut">
               <a:rPr lang="en-US" smtClean="0"/>
-              <a:pPr>
-                <a:defRPr/>
-              </a:pPr>
-              <a:t>7/1/2017</a:t>
             </a:fld>
             <a:endParaRPr lang="en-US"/>
           </a:p>
@@ -4623,10 +4502,6 @@
             </a:pPr>
             <a:fld id="{7790AC7A-5470-4EA1-BFDA-3B3E51621204}" type="slidenum">
               <a:rPr lang="en-US" smtClean="0"/>
-              <a:pPr>
-                <a:defRPr/>
-              </a:pPr>
-              <a:t>‹#›</a:t>
             </a:fld>
             <a:endParaRPr lang="en-US"/>
           </a:p>
@@ -4776,7 +4651,6 @@
             <a:lvl1pPr algn="l">
               <a:defRPr sz="2000" b="0"/>
             </a:lvl1pPr>
-            <a:extLst/>
           </a:lstStyle>
           <a:p>
             <a:r>
@@ -4847,7 +4721,6 @@
               <a:buNone/>
               <a:defRPr sz="2000"/>
             </a:lvl9pPr>
-            <a:extLst/>
           </a:lstStyle>
           <a:p>
             <a:r>
@@ -4913,7 +4786,6 @@
               <a:buNone/>
               <a:defRPr sz="900"/>
             </a:lvl9pPr>
-            <a:extLst/>
           </a:lstStyle>
           <a:p>
             <a:pPr lvl="0" eaLnBrk="1" latinLnBrk="0" hangingPunct="1"/>
@@ -4921,6 +4793,7 @@
               <a:rPr kumimoji="0" lang="en-US" smtClean="0"/>
               <a:t>Click to edit Master text styles</a:t>
             </a:r>
+            <a:endParaRPr kumimoji="0" lang="en-US" smtClean="0"/>
           </a:p>
         </p:txBody>
       </p:sp>
@@ -4949,10 +4822,6 @@
             </a:pPr>
             <a:fld id="{D465C755-FB34-4CB9-BCAD-6B3CFD8A9FE6}" type="datetimeFigureOut">
               <a:rPr lang="en-US" smtClean="0"/>
-              <a:pPr>
-                <a:defRPr/>
-              </a:pPr>
-              <a:t>7/1/2017</a:t>
             </a:fld>
             <a:endParaRPr lang="en-US"/>
           </a:p>
@@ -5110,10 +4979,6 @@
             </a:pPr>
             <a:fld id="{00193ABF-DE85-45CF-A5F6-94D6F1803079}" type="slidenum">
               <a:rPr lang="en-US" smtClean="0"/>
-              <a:pPr>
-                <a:defRPr/>
-              </a:pPr>
-              <a:t>‹#›</a:t>
             </a:fld>
             <a:endParaRPr lang="en-US"/>
           </a:p>
@@ -5318,6 +5183,7 @@
               <a:rPr kumimoji="0" lang="en-US" smtClean="0"/>
               <a:t>Click to edit Master text styles</a:t>
             </a:r>
+            <a:endParaRPr kumimoji="0" lang="en-US" smtClean="0"/>
           </a:p>
           <a:p>
             <a:pPr lvl="1" eaLnBrk="1" latinLnBrk="0" hangingPunct="1"/>
@@ -5325,6 +5191,7 @@
               <a:rPr kumimoji="0" lang="en-US" smtClean="0"/>
               <a:t>Second level</a:t>
             </a:r>
+            <a:endParaRPr kumimoji="0" lang="en-US" smtClean="0"/>
           </a:p>
           <a:p>
             <a:pPr lvl="2" eaLnBrk="1" latinLnBrk="0" hangingPunct="1"/>
@@ -5332,6 +5199,7 @@
               <a:rPr kumimoji="0" lang="en-US" smtClean="0"/>
               <a:t>Third level</a:t>
             </a:r>
+            <a:endParaRPr kumimoji="0" lang="en-US" smtClean="0"/>
           </a:p>
           <a:p>
             <a:pPr lvl="3" eaLnBrk="1" latinLnBrk="0" hangingPunct="1"/>
@@ -5339,6 +5207,7 @@
               <a:rPr kumimoji="0" lang="en-US" smtClean="0"/>
               <a:t>Fourth level</a:t>
             </a:r>
+            <a:endParaRPr kumimoji="0" lang="en-US" smtClean="0"/>
           </a:p>
           <a:p>
             <a:pPr lvl="4" eaLnBrk="1" latinLnBrk="0" hangingPunct="1"/>
@@ -5381,7 +5250,6 @@
                 </a:solidFill>
               </a:defRPr>
             </a:lvl1pPr>
-            <a:extLst/>
           </a:lstStyle>
           <a:p>
             <a:pPr>
@@ -5389,10 +5257,6 @@
             </a:pPr>
             <a:fld id="{24CB9ADE-4CFE-4421-8307-57D5B54CCE51}" type="datetimeFigureOut">
               <a:rPr lang="en-US" smtClean="0"/>
-              <a:pPr>
-                <a:defRPr/>
-              </a:pPr>
-              <a:t>7/1/2017</a:t>
             </a:fld>
             <a:endParaRPr lang="en-US"/>
           </a:p>
@@ -5429,7 +5293,6 @@
                 </a:solidFill>
               </a:defRPr>
             </a:lvl1pPr>
-            <a:extLst/>
           </a:lstStyle>
           <a:p>
             <a:pPr>
@@ -5470,7 +5333,6 @@
                 </a:solidFill>
               </a:defRPr>
             </a:lvl1pPr>
-            <a:extLst/>
           </a:lstStyle>
           <a:p>
             <a:pPr>
@@ -5478,10 +5340,6 @@
             </a:pPr>
             <a:fld id="{F2FAA213-5236-4A65-A6DF-FF05540A5036}" type="slidenum">
               <a:rPr lang="en-US" smtClean="0"/>
-              <a:pPr>
-                <a:defRPr/>
-              </a:pPr>
-              <a:t>‹#›</a:t>
             </a:fld>
             <a:endParaRPr lang="en-US"/>
           </a:p>
@@ -5491,17 +5349,17 @@
   </p:cSld>
   <p:clrMap bg1="lt1" tx1="dk1" bg2="lt2" tx2="dk2" accent1="accent1" accent2="accent2" accent3="accent3" accent4="accent4" accent5="accent5" accent6="accent6" hlink="hlink" folHlink="folHlink"/>
   <p:sldLayoutIdLst>
-    <p:sldLayoutId id="2147483865" r:id="rId1"/>
-    <p:sldLayoutId id="2147483866" r:id="rId2"/>
-    <p:sldLayoutId id="2147483867" r:id="rId3"/>
-    <p:sldLayoutId id="2147483868" r:id="rId4"/>
-    <p:sldLayoutId id="2147483869" r:id="rId5"/>
-    <p:sldLayoutId id="2147483870" r:id="rId6"/>
-    <p:sldLayoutId id="2147483871" r:id="rId7"/>
-    <p:sldLayoutId id="2147483872" r:id="rId8"/>
-    <p:sldLayoutId id="2147483873" r:id="rId9"/>
-    <p:sldLayoutId id="2147483874" r:id="rId10"/>
-    <p:sldLayoutId id="2147483875" r:id="rId11"/>
+    <p:sldLayoutId id="2147483649" r:id="rId1"/>
+    <p:sldLayoutId id="2147483650" r:id="rId2"/>
+    <p:sldLayoutId id="2147483651" r:id="rId3"/>
+    <p:sldLayoutId id="2147483652" r:id="rId4"/>
+    <p:sldLayoutId id="2147483653" r:id="rId5"/>
+    <p:sldLayoutId id="2147483654" r:id="rId6"/>
+    <p:sldLayoutId id="2147483655" r:id="rId7"/>
+    <p:sldLayoutId id="2147483656" r:id="rId8"/>
+    <p:sldLayoutId id="2147483657" r:id="rId9"/>
+    <p:sldLayoutId id="2147483658" r:id="rId10"/>
+    <p:sldLayoutId id="2147483659" r:id="rId11"/>
   </p:sldLayoutIdLst>
   <p:txStyles>
     <p:titleStyle>
@@ -5522,10 +5380,9 @@
           <a:cs typeface="+mj-cs"/>
         </a:defRPr>
       </a:lvl1pPr>
-      <a:extLst/>
     </p:titleStyle>
     <p:bodyStyle>
-      <a:lvl1pPr marL="438912" indent="-320040" algn="l" rtl="0" eaLnBrk="1" latinLnBrk="0" hangingPunct="1">
+      <a:lvl1pPr marL="438785" indent="-320040" algn="l" rtl="0" eaLnBrk="1" latinLnBrk="0" hangingPunct="1">
         <a:spcBef>
           <a:spcPts val="0"/>
         </a:spcBef>
@@ -5533,7 +5390,7 @@
           <a:schemeClr val="accent1"/>
         </a:buClr>
         <a:buSzPct val="80000"/>
-        <a:buFont typeface="Wingdings 2"/>
+        <a:buFont typeface="Wingdings 2" panose="05020102010507070707"/>
         <a:buChar char=""/>
         <a:defRPr kumimoji="0" sz="3200" kern="1200">
           <a:solidFill>
@@ -5552,7 +5409,7 @@
           <a:schemeClr val="accent2"/>
         </a:buClr>
         <a:buSzPct val="90000"/>
-        <a:buFont typeface="Wingdings"/>
+        <a:buFont typeface="Wingdings" panose="05000000000000000000"/>
         <a:buChar char=""/>
         <a:defRPr kumimoji="0" sz="2800" kern="1200">
           <a:solidFill>
@@ -5563,14 +5420,14 @@
           <a:cs typeface="+mn-cs"/>
         </a:defRPr>
       </a:lvl2pPr>
-      <a:lvl3pPr marL="996696" indent="-228600" algn="l" rtl="0" eaLnBrk="1" latinLnBrk="0" hangingPunct="1">
+      <a:lvl3pPr marL="996950" indent="-228600" algn="l" rtl="0" eaLnBrk="1" latinLnBrk="0" hangingPunct="1">
         <a:spcBef>
           <a:spcPct val="20000"/>
         </a:spcBef>
         <a:buClr>
           <a:schemeClr val="accent3"/>
         </a:buClr>
-        <a:buFont typeface="Arial"/>
+        <a:buFont typeface="Arial" panose="020B0604020202020204"/>
         <a:buChar char="▪"/>
         <a:defRPr kumimoji="0" sz="2400" kern="1200">
           <a:solidFill>
@@ -5581,14 +5438,14 @@
           <a:cs typeface="+mn-cs"/>
         </a:defRPr>
       </a:lvl3pPr>
-      <a:lvl4pPr marL="1216152" indent="-182880" algn="l" rtl="0" eaLnBrk="1" latinLnBrk="0" hangingPunct="1">
+      <a:lvl4pPr marL="1216025" indent="-182880" algn="l" rtl="0" eaLnBrk="1" latinLnBrk="0" hangingPunct="1">
         <a:spcBef>
           <a:spcPct val="20000"/>
         </a:spcBef>
         <a:buClr>
           <a:schemeClr val="accent4"/>
         </a:buClr>
-        <a:buFont typeface="Arial"/>
+        <a:buFont typeface="Arial" panose="020B0604020202020204"/>
         <a:buChar char="▪"/>
         <a:defRPr kumimoji="0" sz="2000" kern="1200">
           <a:solidFill>
@@ -5599,14 +5456,14 @@
           <a:cs typeface="+mn-cs"/>
         </a:defRPr>
       </a:lvl4pPr>
-      <a:lvl5pPr marL="1426464" indent="-182880" algn="l" rtl="0" eaLnBrk="1" latinLnBrk="0" hangingPunct="1">
+      <a:lvl5pPr marL="1426210" indent="-182880" algn="l" rtl="0" eaLnBrk="1" latinLnBrk="0" hangingPunct="1">
         <a:spcBef>
           <a:spcPct val="20000"/>
         </a:spcBef>
         <a:buClr>
           <a:schemeClr val="accent5"/>
         </a:buClr>
-        <a:buFont typeface="Wingdings 3"/>
+        <a:buFont typeface="Wingdings 3" panose="05040102010807070707"/>
         <a:buChar char=""/>
         <a:defRPr kumimoji="0" lang="en-US" sz="2000" kern="1200" smtClean="0">
           <a:solidFill>
@@ -5617,7 +5474,7 @@
           <a:cs typeface="+mn-cs"/>
         </a:defRPr>
       </a:lvl5pPr>
-      <a:lvl6pPr marL="1627632" indent="-182880" algn="l" rtl="0" eaLnBrk="1" latinLnBrk="0" hangingPunct="1">
+      <a:lvl6pPr marL="1627505" indent="-182880" algn="l" rtl="0" eaLnBrk="1" latinLnBrk="0" hangingPunct="1">
         <a:spcBef>
           <a:spcPct val="20000"/>
         </a:spcBef>
@@ -5625,7 +5482,7 @@
           <a:schemeClr val="accent6"/>
         </a:buClr>
         <a:buSzPct val="100000"/>
-        <a:buFont typeface="Wingdings 2"/>
+        <a:buFont typeface="Wingdings 2" panose="05020102010507070707"/>
         <a:buChar char=""/>
         <a:defRPr kumimoji="0" sz="2000" kern="1200">
           <a:solidFill>
@@ -5644,7 +5501,7 @@
           <a:schemeClr val="accent1"/>
         </a:buClr>
         <a:buSzPct val="100000"/>
-        <a:buFont typeface="Wingdings 2"/>
+        <a:buFont typeface="Wingdings 2" panose="05020102010507070707"/>
         <a:buChar char=""/>
         <a:defRPr kumimoji="0" sz="1800" kern="1200">
           <a:solidFill>
@@ -5655,14 +5512,14 @@
           <a:cs typeface="+mn-cs"/>
         </a:defRPr>
       </a:lvl7pPr>
-      <a:lvl8pPr marL="2029968" indent="-182880" algn="l" rtl="0" eaLnBrk="1" latinLnBrk="0" hangingPunct="1">
+      <a:lvl8pPr marL="2030095" indent="-182880" algn="l" rtl="0" eaLnBrk="1" latinLnBrk="0" hangingPunct="1">
         <a:spcBef>
           <a:spcPct val="20000"/>
         </a:spcBef>
         <a:buClr>
           <a:schemeClr val="accent2"/>
         </a:buClr>
-        <a:buFont typeface="Wingdings 2" pitchFamily="18" charset="2"/>
+        <a:buFont typeface="Wingdings 2" panose="05020102010507070707" pitchFamily="18" charset="2"/>
         <a:buChar char=""/>
         <a:defRPr kumimoji="0" sz="1800" kern="1200">
           <a:solidFill>
@@ -5673,14 +5530,14 @@
           <a:cs typeface="+mn-cs"/>
         </a:defRPr>
       </a:lvl8pPr>
-      <a:lvl9pPr marL="2231136" indent="-182880" algn="l" rtl="0" eaLnBrk="1" latinLnBrk="0" hangingPunct="1">
+      <a:lvl9pPr marL="2231390" indent="-182880" algn="l" rtl="0" eaLnBrk="1" latinLnBrk="0" hangingPunct="1">
         <a:spcBef>
           <a:spcPct val="20000"/>
         </a:spcBef>
         <a:buClr>
           <a:schemeClr val="accent3"/>
         </a:buClr>
-        <a:buFont typeface="Wingdings 2" pitchFamily="18" charset="2"/>
+        <a:buFont typeface="Wingdings 2" panose="05020102010507070707" pitchFamily="18" charset="2"/>
         <a:buChar char=""/>
         <a:defRPr kumimoji="0" sz="1800" kern="1200" baseline="0">
           <a:solidFill>
@@ -5691,7 +5548,6 @@
           <a:cs typeface="+mn-cs"/>
         </a:defRPr>
       </a:lvl9pPr>
-      <a:extLst/>
     </p:bodyStyle>
     <p:otherStyle>
       <a:lvl1pPr marL="0" algn="l" rtl="0" eaLnBrk="1" latinLnBrk="0" hangingPunct="1">
@@ -5784,7 +5640,6 @@
           <a:cs typeface="+mn-cs"/>
         </a:defRPr>
       </a:lvl9pPr>
-      <a:extLst/>
     </p:otherStyle>
   </p:txStyles>
 </p:sldMaster>
@@ -5975,6 +5830,7 @@
               <a:rPr lang="en-US" b="1" dirty="0" smtClean="0"/>
               <a:t>PSP1, PSP1.1 (Introduces estimating and planning)</a:t>
             </a:r>
+            <a:endParaRPr lang="en-US" b="1" dirty="0" smtClean="0"/>
           </a:p>
           <a:p>
             <a:pPr lvl="1"/>
@@ -5990,6 +5846,7 @@
               <a:rPr lang="en-US" dirty="0" smtClean="0"/>
               <a:t> how large a new program will be and prepares a test report (PSP1). </a:t>
             </a:r>
+            <a:endParaRPr lang="en-US" dirty="0" smtClean="0"/>
           </a:p>
           <a:p>
             <a:pPr lvl="1"/>
@@ -6005,6 +5862,7 @@
               <a:rPr lang="en-US" dirty="0" smtClean="0"/>
               <a:t>Each new project will record the actual time spent. </a:t>
             </a:r>
+            <a:endParaRPr lang="en-US" dirty="0" smtClean="0"/>
           </a:p>
           <a:p>
             <a:pPr lvl="1"/>
@@ -6012,6 +5870,7 @@
               <a:rPr lang="en-US" dirty="0" smtClean="0"/>
               <a:t>This information is used for task and schedule planning and estimation (PSP1.1).</a:t>
             </a:r>
+            <a:endParaRPr lang="en-US" dirty="0" smtClean="0"/>
           </a:p>
           <a:p>
             <a:r>
@@ -6022,6 +5881,11 @@
               </a:rPr>
               <a:t>Did you have estimation before Coding? </a:t>
             </a:r>
+            <a:endParaRPr lang="en-US" dirty="0" smtClean="0">
+              <a:solidFill>
+                <a:srgbClr val="FF0000"/>
+              </a:solidFill>
+            </a:endParaRPr>
           </a:p>
           <a:p>
             <a:r>
@@ -6133,6 +5997,7 @@
               <a:rPr lang="en-US" dirty="0" smtClean="0"/>
               <a:t>PSP2 adds two new phases: </a:t>
             </a:r>
+            <a:endParaRPr lang="en-US" dirty="0" smtClean="0"/>
           </a:p>
           <a:p>
             <a:pPr lvl="1"/>
@@ -6160,6 +6025,7 @@
               <a:rPr lang="en-US" dirty="0" smtClean="0"/>
               <a:t>eview. </a:t>
             </a:r>
+            <a:endParaRPr lang="en-US" dirty="0" smtClean="0"/>
           </a:p>
           <a:p>
             <a:pPr lvl="1"/>
@@ -6167,6 +6033,7 @@
               <a:rPr lang="en-US" dirty="0" smtClean="0"/>
               <a:t>Defect Prevention and removal are the focus at the PSP2. </a:t>
             </a:r>
+            <a:endParaRPr lang="en-US" dirty="0" smtClean="0"/>
           </a:p>
           <a:p>
             <a:pPr lvl="1"/>
@@ -6174,12 +6041,14 @@
               <a:rPr lang="en-US" dirty="0" smtClean="0"/>
               <a:t>Engineers construct and use checklists for design and code reviews. </a:t>
             </a:r>
+            <a:endParaRPr lang="en-US" dirty="0" smtClean="0"/>
           </a:p>
           <a:p>
             <a:r>
               <a:rPr lang="en-US" dirty="0" smtClean="0"/>
               <a:t>PSP2.1 introduces design specification and analysis techniques</a:t>
             </a:r>
+            <a:endParaRPr lang="en-US" dirty="0" smtClean="0"/>
           </a:p>
           <a:p>
             <a:r>
@@ -6190,6 +6059,11 @@
               </a:rPr>
               <a:t>Did you do Self-review of your design?</a:t>
             </a:r>
+            <a:endParaRPr lang="en-US" dirty="0" smtClean="0">
+              <a:solidFill>
+                <a:srgbClr val="FF0000"/>
+              </a:solidFill>
+            </a:endParaRPr>
           </a:p>
           <a:p>
             <a:r>
@@ -6312,18 +6186,25 @@
               </a:rPr>
               <a:t>0</a:t>
             </a:r>
+            <a:endParaRPr lang="en-US" sz="2800" b="1" dirty="0" smtClean="0">
+              <a:solidFill>
+                <a:srgbClr val="FF0000"/>
+              </a:solidFill>
+            </a:endParaRPr>
           </a:p>
           <a:p>
             <a:r>
               <a:rPr lang="en-US" sz="2800" dirty="0" smtClean="0"/>
               <a:t>Planning</a:t>
             </a:r>
+            <a:endParaRPr lang="en-US" sz="2800" dirty="0" smtClean="0"/>
           </a:p>
           <a:p>
             <a:r>
               <a:rPr lang="en-US" sz="2800" dirty="0" smtClean="0"/>
               <a:t>Development</a:t>
             </a:r>
+            <a:endParaRPr lang="en-US" sz="2800" dirty="0" smtClean="0"/>
           </a:p>
           <a:p>
             <a:pPr lvl="1"/>
@@ -6331,6 +6212,7 @@
               <a:rPr lang="en-US" sz="2400" dirty="0" smtClean="0"/>
               <a:t>Design</a:t>
             </a:r>
+            <a:endParaRPr lang="en-US" sz="2400" dirty="0" smtClean="0"/>
           </a:p>
           <a:p>
             <a:pPr lvl="1"/>
@@ -6338,6 +6220,7 @@
               <a:rPr lang="en-US" sz="2400" dirty="0" smtClean="0"/>
               <a:t>Coding</a:t>
             </a:r>
+            <a:endParaRPr lang="en-US" sz="2400" dirty="0" smtClean="0"/>
           </a:p>
           <a:p>
             <a:pPr lvl="1"/>
@@ -6345,21 +6228,21 @@
               <a:rPr lang="en-US" sz="2400" dirty="0" smtClean="0"/>
               <a:t>Test</a:t>
             </a:r>
+            <a:endParaRPr lang="en-US" sz="2400" dirty="0" smtClean="0"/>
           </a:p>
           <a:p>
             <a:r>
               <a:rPr lang="en-US" sz="2800" dirty="0" smtClean="0"/>
               <a:t>Postmortem</a:t>
             </a:r>
+            <a:endParaRPr lang="en-US" sz="2800" dirty="0" smtClean="0"/>
           </a:p>
         </p:txBody>
       </p:sp>
       <p:sp>
         <p:nvSpPr>
           <p:cNvPr id="4" name="Content Placeholder 2"/>
-          <p:cNvSpPr txBox="1">
-            <a:spLocks/>
-          </p:cNvSpPr>
+          <p:cNvSpPr txBox="1"/>
           <p:nvPr/>
         </p:nvSpPr>
         <p:spPr>
@@ -6385,7 +6268,7 @@
               <a:spcBef>
                 <a:spcPct val="20000"/>
               </a:spcBef>
-              <a:buFont typeface="Arial" pitchFamily="34" charset="0"/>
+              <a:buFont typeface="Arial" panose="020B0604020202020204" pitchFamily="34" charset="0"/>
               <a:buChar char="•"/>
               <a:defRPr sz="3200" kern="1200">
                 <a:solidFill>
@@ -6400,7 +6283,7 @@
               <a:spcBef>
                 <a:spcPct val="20000"/>
               </a:spcBef>
-              <a:buFont typeface="Arial" pitchFamily="34" charset="0"/>
+              <a:buFont typeface="Arial" panose="020B0604020202020204" pitchFamily="34" charset="0"/>
               <a:buChar char="–"/>
               <a:defRPr sz="2800" kern="1200">
                 <a:solidFill>
@@ -6415,7 +6298,7 @@
               <a:spcBef>
                 <a:spcPct val="20000"/>
               </a:spcBef>
-              <a:buFont typeface="Arial" pitchFamily="34" charset="0"/>
+              <a:buFont typeface="Arial" panose="020B0604020202020204" pitchFamily="34" charset="0"/>
               <a:buChar char="•"/>
               <a:defRPr sz="2400" kern="1200">
                 <a:solidFill>
@@ -6430,7 +6313,7 @@
               <a:spcBef>
                 <a:spcPct val="20000"/>
               </a:spcBef>
-              <a:buFont typeface="Arial" pitchFamily="34" charset="0"/>
+              <a:buFont typeface="Arial" panose="020B0604020202020204" pitchFamily="34" charset="0"/>
               <a:buChar char="–"/>
               <a:defRPr sz="2000" kern="1200">
                 <a:solidFill>
@@ -6445,7 +6328,7 @@
               <a:spcBef>
                 <a:spcPct val="20000"/>
               </a:spcBef>
-              <a:buFont typeface="Arial" pitchFamily="34" charset="0"/>
+              <a:buFont typeface="Arial" panose="020B0604020202020204" pitchFamily="34" charset="0"/>
               <a:buChar char="»"/>
               <a:defRPr sz="2000" kern="1200">
                 <a:solidFill>
@@ -6460,7 +6343,7 @@
               <a:spcBef>
                 <a:spcPct val="20000"/>
               </a:spcBef>
-              <a:buFont typeface="Arial" pitchFamily="34" charset="0"/>
+              <a:buFont typeface="Arial" panose="020B0604020202020204" pitchFamily="34" charset="0"/>
               <a:buChar char="•"/>
               <a:defRPr sz="2000" kern="1200">
                 <a:solidFill>
@@ -6475,7 +6358,7 @@
               <a:spcBef>
                 <a:spcPct val="20000"/>
               </a:spcBef>
-              <a:buFont typeface="Arial" pitchFamily="34" charset="0"/>
+              <a:buFont typeface="Arial" panose="020B0604020202020204" pitchFamily="34" charset="0"/>
               <a:buChar char="•"/>
               <a:defRPr sz="2000" kern="1200">
                 <a:solidFill>
@@ -6490,7 +6373,7 @@
               <a:spcBef>
                 <a:spcPct val="20000"/>
               </a:spcBef>
-              <a:buFont typeface="Arial" pitchFamily="34" charset="0"/>
+              <a:buFont typeface="Arial" panose="020B0604020202020204" pitchFamily="34" charset="0"/>
               <a:buChar char="•"/>
               <a:defRPr sz="2000" kern="1200">
                 <a:solidFill>
@@ -6505,7 +6388,7 @@
               <a:spcBef>
                 <a:spcPct val="20000"/>
               </a:spcBef>
-              <a:buFont typeface="Arial" pitchFamily="34" charset="0"/>
+              <a:buFont typeface="Arial" panose="020B0604020202020204" pitchFamily="34" charset="0"/>
               <a:buChar char="•"/>
               <a:defRPr sz="2000" kern="1200">
                 <a:solidFill>
@@ -6530,18 +6413,25 @@
               </a:rPr>
               <a:t>0.1</a:t>
             </a:r>
+            <a:endParaRPr lang="en-US" sz="2000" b="1" dirty="0" smtClean="0">
+              <a:solidFill>
+                <a:srgbClr val="FF0000"/>
+              </a:solidFill>
+            </a:endParaRPr>
           </a:p>
           <a:p>
             <a:r>
               <a:rPr lang="en-US" sz="2000" dirty="0" smtClean="0"/>
               <a:t>Planning</a:t>
             </a:r>
+            <a:endParaRPr lang="en-US" sz="2000" dirty="0" smtClean="0"/>
           </a:p>
           <a:p>
             <a:r>
               <a:rPr lang="en-US" sz="2000" dirty="0" smtClean="0"/>
               <a:t>Development</a:t>
             </a:r>
+            <a:endParaRPr lang="en-US" sz="2000" dirty="0" smtClean="0"/>
           </a:p>
           <a:p>
             <a:pPr lvl="1"/>
@@ -6553,6 +6443,11 @@
               </a:rPr>
               <a:t>Coding Standard</a:t>
             </a:r>
+            <a:endParaRPr lang="en-US" sz="1800" b="1" dirty="0" smtClean="0">
+              <a:solidFill>
+                <a:srgbClr val="FF0000"/>
+              </a:solidFill>
+            </a:endParaRPr>
           </a:p>
           <a:p>
             <a:pPr lvl="1"/>
@@ -6560,6 +6455,7 @@
               <a:rPr lang="en-US" sz="1800" dirty="0" smtClean="0"/>
               <a:t>Design</a:t>
             </a:r>
+            <a:endParaRPr lang="en-US" sz="1800" dirty="0" smtClean="0"/>
           </a:p>
           <a:p>
             <a:pPr lvl="1"/>
@@ -6567,6 +6463,7 @@
               <a:rPr lang="en-US" sz="1800" dirty="0" smtClean="0"/>
               <a:t>Coding</a:t>
             </a:r>
+            <a:endParaRPr lang="en-US" sz="1800" dirty="0" smtClean="0"/>
           </a:p>
           <a:p>
             <a:pPr lvl="1"/>
@@ -6574,6 +6471,7 @@
               <a:rPr lang="en-US" sz="1800" dirty="0" smtClean="0"/>
               <a:t>Test</a:t>
             </a:r>
+            <a:endParaRPr lang="en-US" sz="1800" dirty="0" smtClean="0"/>
           </a:p>
           <a:p>
             <a:r>
@@ -6584,12 +6482,18 @@
               </a:rPr>
               <a:t>Size Measurement</a:t>
             </a:r>
+            <a:endParaRPr lang="en-US" sz="2000" b="1" dirty="0" smtClean="0">
+              <a:solidFill>
+                <a:srgbClr val="FF0000"/>
+              </a:solidFill>
+            </a:endParaRPr>
           </a:p>
           <a:p>
             <a:r>
               <a:rPr lang="en-US" sz="2000" dirty="0" smtClean="0"/>
               <a:t>Postmortem</a:t>
             </a:r>
+            <a:endParaRPr lang="en-US" sz="2000" dirty="0" smtClean="0"/>
           </a:p>
           <a:p>
             <a:r>
@@ -6600,15 +6504,18 @@
               </a:rPr>
               <a:t>Process Improvement Plan</a:t>
             </a:r>
+            <a:endParaRPr lang="en-US" sz="2000" b="1" dirty="0" smtClean="0">
+              <a:solidFill>
+                <a:srgbClr val="FF0000"/>
+              </a:solidFill>
+            </a:endParaRPr>
           </a:p>
         </p:txBody>
       </p:sp>
       <p:sp>
         <p:nvSpPr>
           <p:cNvPr id="5" name="Content Placeholder 2"/>
-          <p:cNvSpPr txBox="1">
-            <a:spLocks/>
-          </p:cNvSpPr>
+          <p:cNvSpPr txBox="1"/>
           <p:nvPr/>
         </p:nvSpPr>
         <p:spPr>
@@ -6629,7 +6536,7 @@
               <a:spcBef>
                 <a:spcPct val="20000"/>
               </a:spcBef>
-              <a:buFont typeface="Arial" pitchFamily="34" charset="0"/>
+              <a:buFont typeface="Arial" panose="020B0604020202020204" pitchFamily="34" charset="0"/>
               <a:buChar char="•"/>
               <a:defRPr sz="3200" kern="1200">
                 <a:solidFill>
@@ -6644,7 +6551,7 @@
               <a:spcBef>
                 <a:spcPct val="20000"/>
               </a:spcBef>
-              <a:buFont typeface="Arial" pitchFamily="34" charset="0"/>
+              <a:buFont typeface="Arial" panose="020B0604020202020204" pitchFamily="34" charset="0"/>
               <a:buChar char="–"/>
               <a:defRPr sz="2800" kern="1200">
                 <a:solidFill>
@@ -6659,7 +6566,7 @@
               <a:spcBef>
                 <a:spcPct val="20000"/>
               </a:spcBef>
-              <a:buFont typeface="Arial" pitchFamily="34" charset="0"/>
+              <a:buFont typeface="Arial" panose="020B0604020202020204" pitchFamily="34" charset="0"/>
               <a:buChar char="•"/>
               <a:defRPr sz="2400" kern="1200">
                 <a:solidFill>
@@ -6674,7 +6581,7 @@
               <a:spcBef>
                 <a:spcPct val="20000"/>
               </a:spcBef>
-              <a:buFont typeface="Arial" pitchFamily="34" charset="0"/>
+              <a:buFont typeface="Arial" panose="020B0604020202020204" pitchFamily="34" charset="0"/>
               <a:buChar char="–"/>
               <a:defRPr sz="2000" kern="1200">
                 <a:solidFill>
@@ -6689,7 +6596,7 @@
               <a:spcBef>
                 <a:spcPct val="20000"/>
               </a:spcBef>
-              <a:buFont typeface="Arial" pitchFamily="34" charset="0"/>
+              <a:buFont typeface="Arial" panose="020B0604020202020204" pitchFamily="34" charset="0"/>
               <a:buChar char="»"/>
               <a:defRPr sz="2000" kern="1200">
                 <a:solidFill>
@@ -6704,7 +6611,7 @@
               <a:spcBef>
                 <a:spcPct val="20000"/>
               </a:spcBef>
-              <a:buFont typeface="Arial" pitchFamily="34" charset="0"/>
+              <a:buFont typeface="Arial" panose="020B0604020202020204" pitchFamily="34" charset="0"/>
               <a:buChar char="•"/>
               <a:defRPr sz="2000" kern="1200">
                 <a:solidFill>
@@ -6719,7 +6626,7 @@
               <a:spcBef>
                 <a:spcPct val="20000"/>
               </a:spcBef>
-              <a:buFont typeface="Arial" pitchFamily="34" charset="0"/>
+              <a:buFont typeface="Arial" panose="020B0604020202020204" pitchFamily="34" charset="0"/>
               <a:buChar char="•"/>
               <a:defRPr sz="2000" kern="1200">
                 <a:solidFill>
@@ -6734,7 +6641,7 @@
               <a:spcBef>
                 <a:spcPct val="20000"/>
               </a:spcBef>
-              <a:buFont typeface="Arial" pitchFamily="34" charset="0"/>
+              <a:buFont typeface="Arial" panose="020B0604020202020204" pitchFamily="34" charset="0"/>
               <a:buChar char="•"/>
               <a:defRPr sz="2000" kern="1200">
                 <a:solidFill>
@@ -6749,7 +6656,7 @@
               <a:spcBef>
                 <a:spcPct val="20000"/>
               </a:spcBef>
-              <a:buFont typeface="Arial" pitchFamily="34" charset="0"/>
+              <a:buFont typeface="Arial" panose="020B0604020202020204" pitchFamily="34" charset="0"/>
               <a:buChar char="•"/>
               <a:defRPr sz="2000" kern="1200">
                 <a:solidFill>
@@ -6769,9 +6676,7 @@
       <p:sp>
         <p:nvSpPr>
           <p:cNvPr id="6" name="Content Placeholder 2"/>
-          <p:cNvSpPr txBox="1">
-            <a:spLocks/>
-          </p:cNvSpPr>
+          <p:cNvSpPr txBox="1"/>
           <p:nvPr/>
         </p:nvSpPr>
         <p:spPr>
@@ -6797,7 +6702,7 @@
               <a:spcBef>
                 <a:spcPct val="20000"/>
               </a:spcBef>
-              <a:buFont typeface="Arial" pitchFamily="34" charset="0"/>
+              <a:buFont typeface="Arial" panose="020B0604020202020204" pitchFamily="34" charset="0"/>
               <a:buChar char="•"/>
               <a:defRPr sz="3200" kern="1200">
                 <a:solidFill>
@@ -6812,7 +6717,7 @@
               <a:spcBef>
                 <a:spcPct val="20000"/>
               </a:spcBef>
-              <a:buFont typeface="Arial" pitchFamily="34" charset="0"/>
+              <a:buFont typeface="Arial" panose="020B0604020202020204" pitchFamily="34" charset="0"/>
               <a:buChar char="–"/>
               <a:defRPr sz="2800" kern="1200">
                 <a:solidFill>
@@ -6827,7 +6732,7 @@
               <a:spcBef>
                 <a:spcPct val="20000"/>
               </a:spcBef>
-              <a:buFont typeface="Arial" pitchFamily="34" charset="0"/>
+              <a:buFont typeface="Arial" panose="020B0604020202020204" pitchFamily="34" charset="0"/>
               <a:buChar char="•"/>
               <a:defRPr sz="2400" kern="1200">
                 <a:solidFill>
@@ -6842,7 +6747,7 @@
               <a:spcBef>
                 <a:spcPct val="20000"/>
               </a:spcBef>
-              <a:buFont typeface="Arial" pitchFamily="34" charset="0"/>
+              <a:buFont typeface="Arial" panose="020B0604020202020204" pitchFamily="34" charset="0"/>
               <a:buChar char="–"/>
               <a:defRPr sz="2000" kern="1200">
                 <a:solidFill>
@@ -6857,7 +6762,7 @@
               <a:spcBef>
                 <a:spcPct val="20000"/>
               </a:spcBef>
-              <a:buFont typeface="Arial" pitchFamily="34" charset="0"/>
+              <a:buFont typeface="Arial" panose="020B0604020202020204" pitchFamily="34" charset="0"/>
               <a:buChar char="»"/>
               <a:defRPr sz="2000" kern="1200">
                 <a:solidFill>
@@ -6872,7 +6777,7 @@
               <a:spcBef>
                 <a:spcPct val="20000"/>
               </a:spcBef>
-              <a:buFont typeface="Arial" pitchFamily="34" charset="0"/>
+              <a:buFont typeface="Arial" panose="020B0604020202020204" pitchFamily="34" charset="0"/>
               <a:buChar char="•"/>
               <a:defRPr sz="2000" kern="1200">
                 <a:solidFill>
@@ -6887,7 +6792,7 @@
               <a:spcBef>
                 <a:spcPct val="20000"/>
               </a:spcBef>
-              <a:buFont typeface="Arial" pitchFamily="34" charset="0"/>
+              <a:buFont typeface="Arial" panose="020B0604020202020204" pitchFamily="34" charset="0"/>
               <a:buChar char="•"/>
               <a:defRPr sz="2000" kern="1200">
                 <a:solidFill>
@@ -6902,7 +6807,7 @@
               <a:spcBef>
                 <a:spcPct val="20000"/>
               </a:spcBef>
-              <a:buFont typeface="Arial" pitchFamily="34" charset="0"/>
+              <a:buFont typeface="Arial" panose="020B0604020202020204" pitchFamily="34" charset="0"/>
               <a:buChar char="•"/>
               <a:defRPr sz="2000" kern="1200">
                 <a:solidFill>
@@ -6917,7 +6822,7 @@
               <a:spcBef>
                 <a:spcPct val="20000"/>
               </a:spcBef>
-              <a:buFont typeface="Arial" pitchFamily="34" charset="0"/>
+              <a:buFont typeface="Arial" panose="020B0604020202020204" pitchFamily="34" charset="0"/>
               <a:buChar char="•"/>
               <a:defRPr sz="2000" kern="1200">
                 <a:solidFill>
@@ -6942,12 +6847,18 @@
               </a:rPr>
               <a:t>1</a:t>
             </a:r>
+            <a:endParaRPr lang="en-US" b="1" dirty="0" smtClean="0">
+              <a:solidFill>
+                <a:srgbClr val="FF0000"/>
+              </a:solidFill>
+            </a:endParaRPr>
           </a:p>
           <a:p>
             <a:r>
               <a:rPr lang="en-US" dirty="0" smtClean="0"/>
               <a:t>Planning</a:t>
             </a:r>
+            <a:endParaRPr lang="en-US" dirty="0" smtClean="0"/>
           </a:p>
           <a:p>
             <a:pPr lvl="1"/>
@@ -6963,12 +6874,14 @@
               <a:rPr lang="en-US" dirty="0" smtClean="0"/>
               <a:t> </a:t>
             </a:r>
+            <a:endParaRPr lang="en-US" dirty="0" smtClean="0"/>
           </a:p>
           <a:p>
             <a:r>
               <a:rPr lang="en-US" dirty="0" smtClean="0"/>
               <a:t>Development</a:t>
             </a:r>
+            <a:endParaRPr lang="en-US" dirty="0" smtClean="0"/>
           </a:p>
           <a:p>
             <a:pPr lvl="1"/>
@@ -6976,6 +6889,7 @@
               <a:rPr lang="en-US" dirty="0" smtClean="0"/>
               <a:t>Coding Standard</a:t>
             </a:r>
+            <a:endParaRPr lang="en-US" dirty="0" smtClean="0"/>
           </a:p>
           <a:p>
             <a:pPr lvl="1"/>
@@ -6983,6 +6897,7 @@
               <a:rPr lang="en-US" dirty="0" smtClean="0"/>
               <a:t>Design</a:t>
             </a:r>
+            <a:endParaRPr lang="en-US" dirty="0" smtClean="0"/>
           </a:p>
           <a:p>
             <a:pPr lvl="1"/>
@@ -6990,6 +6905,7 @@
               <a:rPr lang="en-US" dirty="0" smtClean="0"/>
               <a:t>Coding</a:t>
             </a:r>
+            <a:endParaRPr lang="en-US" dirty="0" smtClean="0"/>
           </a:p>
           <a:p>
             <a:pPr lvl="1"/>
@@ -6997,6 +6913,7 @@
               <a:rPr lang="en-US" dirty="0" smtClean="0"/>
               <a:t>Test</a:t>
             </a:r>
+            <a:endParaRPr lang="en-US" dirty="0" smtClean="0"/>
           </a:p>
           <a:p>
             <a:r>
@@ -7007,33 +6924,36 @@
               </a:rPr>
               <a:t>Test Report</a:t>
             </a:r>
+            <a:endParaRPr lang="en-US" b="1" dirty="0" smtClean="0">
+              <a:solidFill>
+                <a:srgbClr val="FF0000"/>
+              </a:solidFill>
+            </a:endParaRPr>
           </a:p>
           <a:p>
             <a:r>
               <a:rPr lang="en-US" dirty="0" smtClean="0"/>
               <a:t>Size Measurement</a:t>
             </a:r>
+            <a:endParaRPr lang="en-US" dirty="0" smtClean="0"/>
           </a:p>
           <a:p>
             <a:r>
               <a:rPr lang="en-US" dirty="0" smtClean="0"/>
               <a:t>Postmortem</a:t>
             </a:r>
+            <a:endParaRPr lang="en-US" dirty="0" smtClean="0"/>
           </a:p>
           <a:p>
             <a:r>
               <a:rPr lang="en-US" dirty="0" smtClean="0"/>
               <a:t>Process Improvement Plan</a:t>
             </a:r>
+            <a:endParaRPr lang="en-US" dirty="0" smtClean="0"/>
           </a:p>
         </p:txBody>
       </p:sp>
     </p:spTree>
-    <p:extLst>
-      <p:ext uri="{BB962C8B-B14F-4D97-AF65-F5344CB8AC3E}">
-        <p14:creationId xmlns:p14="http://schemas.microsoft.com/office/powerpoint/2010/main" val="3264438971"/>
-      </p:ext>
-    </p:extLst>
   </p:cSld>
   <p:clrMapOvr>
     <a:masterClrMapping/>
@@ -7476,7 +7396,7 @@
       </p:par>
     </p:tnLst>
     <p:bldLst>
-      <p:bldP spid="3" grpId="0" build="p" animBg="1"/>
+      <p:bldP spid="3" grpId="0" animBg="1" build="p"/>
       <p:bldP spid="4" grpId="0" animBg="1"/>
       <p:bldP spid="6" grpId="0" animBg="1"/>
     </p:bldLst>
@@ -7557,7 +7477,7 @@
               <a:spcBef>
                 <a:spcPct val="20000"/>
               </a:spcBef>
-              <a:buFont typeface="Arial" pitchFamily="34" charset="0"/>
+              <a:buFont typeface="Arial" panose="020B0604020202020204" pitchFamily="34" charset="0"/>
               <a:buChar char="•"/>
               <a:defRPr sz="3200" kern="1200">
                 <a:solidFill>
@@ -7572,7 +7492,7 @@
               <a:spcBef>
                 <a:spcPct val="20000"/>
               </a:spcBef>
-              <a:buFont typeface="Arial" pitchFamily="34" charset="0"/>
+              <a:buFont typeface="Arial" panose="020B0604020202020204" pitchFamily="34" charset="0"/>
               <a:buChar char="–"/>
               <a:defRPr sz="2800" kern="1200">
                 <a:solidFill>
@@ -7587,7 +7507,7 @@
               <a:spcBef>
                 <a:spcPct val="20000"/>
               </a:spcBef>
-              <a:buFont typeface="Arial" pitchFamily="34" charset="0"/>
+              <a:buFont typeface="Arial" panose="020B0604020202020204" pitchFamily="34" charset="0"/>
               <a:buChar char="•"/>
               <a:defRPr sz="2400" kern="1200">
                 <a:solidFill>
@@ -7602,7 +7522,7 @@
               <a:spcBef>
                 <a:spcPct val="20000"/>
               </a:spcBef>
-              <a:buFont typeface="Arial" pitchFamily="34" charset="0"/>
+              <a:buFont typeface="Arial" panose="020B0604020202020204" pitchFamily="34" charset="0"/>
               <a:buChar char="–"/>
               <a:defRPr sz="2000" kern="1200">
                 <a:solidFill>
@@ -7617,7 +7537,7 @@
               <a:spcBef>
                 <a:spcPct val="20000"/>
               </a:spcBef>
-              <a:buFont typeface="Arial" pitchFamily="34" charset="0"/>
+              <a:buFont typeface="Arial" panose="020B0604020202020204" pitchFamily="34" charset="0"/>
               <a:buChar char="»"/>
               <a:defRPr sz="2000" kern="1200">
                 <a:solidFill>
@@ -7632,7 +7552,7 @@
               <a:spcBef>
                 <a:spcPct val="20000"/>
               </a:spcBef>
-              <a:buFont typeface="Arial" pitchFamily="34" charset="0"/>
+              <a:buFont typeface="Arial" panose="020B0604020202020204" pitchFamily="34" charset="0"/>
               <a:buChar char="•"/>
               <a:defRPr sz="2000" kern="1200">
                 <a:solidFill>
@@ -7647,7 +7567,7 @@
               <a:spcBef>
                 <a:spcPct val="20000"/>
               </a:spcBef>
-              <a:buFont typeface="Arial" pitchFamily="34" charset="0"/>
+              <a:buFont typeface="Arial" panose="020B0604020202020204" pitchFamily="34" charset="0"/>
               <a:buChar char="•"/>
               <a:defRPr sz="2000" kern="1200">
                 <a:solidFill>
@@ -7662,7 +7582,7 @@
               <a:spcBef>
                 <a:spcPct val="20000"/>
               </a:spcBef>
-              <a:buFont typeface="Arial" pitchFamily="34" charset="0"/>
+              <a:buFont typeface="Arial" panose="020B0604020202020204" pitchFamily="34" charset="0"/>
               <a:buChar char="•"/>
               <a:defRPr sz="2000" kern="1200">
                 <a:solidFill>
@@ -7677,7 +7597,7 @@
               <a:spcBef>
                 <a:spcPct val="20000"/>
               </a:spcBef>
-              <a:buFont typeface="Arial" pitchFamily="34" charset="0"/>
+              <a:buFont typeface="Arial" panose="020B0604020202020204" pitchFamily="34" charset="0"/>
               <a:buChar char="•"/>
               <a:defRPr sz="2000" kern="1200">
                 <a:solidFill>
@@ -7702,12 +7622,18 @@
               </a:rPr>
               <a:t>1.1</a:t>
             </a:r>
+            <a:endParaRPr lang="en-US" b="1" dirty="0" smtClean="0">
+              <a:solidFill>
+                <a:srgbClr val="FF0000"/>
+              </a:solidFill>
+            </a:endParaRPr>
           </a:p>
           <a:p>
             <a:r>
               <a:rPr lang="en-US" dirty="0" smtClean="0"/>
               <a:t>Planning</a:t>
             </a:r>
+            <a:endParaRPr lang="en-US" dirty="0" smtClean="0"/>
           </a:p>
           <a:p>
             <a:pPr lvl="1"/>
@@ -7723,12 +7649,14 @@
               <a:rPr lang="en-US" dirty="0" smtClean="0"/>
               <a:t> </a:t>
             </a:r>
+            <a:endParaRPr lang="en-US" dirty="0" smtClean="0"/>
           </a:p>
           <a:p>
             <a:r>
               <a:rPr lang="en-US" dirty="0" smtClean="0"/>
               <a:t>Development</a:t>
             </a:r>
+            <a:endParaRPr lang="en-US" dirty="0" smtClean="0"/>
           </a:p>
           <a:p>
             <a:pPr lvl="1"/>
@@ -7736,6 +7664,7 @@
               <a:rPr lang="en-US" dirty="0" smtClean="0"/>
               <a:t>Coding Standard</a:t>
             </a:r>
+            <a:endParaRPr lang="en-US" dirty="0" smtClean="0"/>
           </a:p>
           <a:p>
             <a:pPr lvl="1"/>
@@ -7743,6 +7672,7 @@
               <a:rPr lang="en-US" dirty="0" smtClean="0"/>
               <a:t>Design</a:t>
             </a:r>
+            <a:endParaRPr lang="en-US" dirty="0" smtClean="0"/>
           </a:p>
           <a:p>
             <a:pPr lvl="1"/>
@@ -7750,6 +7680,7 @@
               <a:rPr lang="en-US" dirty="0" smtClean="0"/>
               <a:t>Coding</a:t>
             </a:r>
+            <a:endParaRPr lang="en-US" dirty="0" smtClean="0"/>
           </a:p>
           <a:p>
             <a:pPr lvl="1"/>
@@ -7757,6 +7688,7 @@
               <a:rPr lang="en-US" dirty="0" smtClean="0"/>
               <a:t>Test</a:t>
             </a:r>
+            <a:endParaRPr lang="en-US" dirty="0" smtClean="0"/>
           </a:p>
           <a:p>
             <a:r>
@@ -7767,39 +7699,46 @@
               </a:rPr>
               <a:t>Record Time Spent</a:t>
             </a:r>
+            <a:endParaRPr lang="en-US" b="1" dirty="0" smtClean="0">
+              <a:solidFill>
+                <a:srgbClr val="FF0000"/>
+              </a:solidFill>
+            </a:endParaRPr>
           </a:p>
           <a:p>
             <a:r>
               <a:rPr lang="en-US" dirty="0" smtClean="0"/>
               <a:t>Test Report</a:t>
             </a:r>
+            <a:endParaRPr lang="en-US" dirty="0" smtClean="0"/>
           </a:p>
           <a:p>
             <a:r>
               <a:rPr lang="en-US" dirty="0" smtClean="0"/>
               <a:t>Size Measurement</a:t>
             </a:r>
+            <a:endParaRPr lang="en-US" dirty="0" smtClean="0"/>
           </a:p>
           <a:p>
             <a:r>
               <a:rPr lang="en-US" dirty="0" smtClean="0"/>
               <a:t>Postmortem</a:t>
             </a:r>
+            <a:endParaRPr lang="en-US" dirty="0" smtClean="0"/>
           </a:p>
           <a:p>
             <a:r>
               <a:rPr lang="en-US" dirty="0" smtClean="0"/>
               <a:t>Process Improvement Plan</a:t>
             </a:r>
+            <a:endParaRPr lang="en-US" dirty="0" smtClean="0"/>
           </a:p>
         </p:txBody>
       </p:sp>
       <p:sp>
         <p:nvSpPr>
           <p:cNvPr id="5" name="Content Placeholder 2"/>
-          <p:cNvSpPr txBox="1">
-            <a:spLocks/>
-          </p:cNvSpPr>
+          <p:cNvSpPr txBox="1"/>
           <p:nvPr/>
         </p:nvSpPr>
         <p:spPr>
@@ -7820,7 +7759,7 @@
               <a:spcBef>
                 <a:spcPct val="20000"/>
               </a:spcBef>
-              <a:buFont typeface="Arial" pitchFamily="34" charset="0"/>
+              <a:buFont typeface="Arial" panose="020B0604020202020204" pitchFamily="34" charset="0"/>
               <a:buChar char="•"/>
               <a:defRPr sz="3200" kern="1200">
                 <a:solidFill>
@@ -7835,7 +7774,7 @@
               <a:spcBef>
                 <a:spcPct val="20000"/>
               </a:spcBef>
-              <a:buFont typeface="Arial" pitchFamily="34" charset="0"/>
+              <a:buFont typeface="Arial" panose="020B0604020202020204" pitchFamily="34" charset="0"/>
               <a:buChar char="–"/>
               <a:defRPr sz="2800" kern="1200">
                 <a:solidFill>
@@ -7850,7 +7789,7 @@
               <a:spcBef>
                 <a:spcPct val="20000"/>
               </a:spcBef>
-              <a:buFont typeface="Arial" pitchFamily="34" charset="0"/>
+              <a:buFont typeface="Arial" panose="020B0604020202020204" pitchFamily="34" charset="0"/>
               <a:buChar char="•"/>
               <a:defRPr sz="2400" kern="1200">
                 <a:solidFill>
@@ -7865,7 +7804,7 @@
               <a:spcBef>
                 <a:spcPct val="20000"/>
               </a:spcBef>
-              <a:buFont typeface="Arial" pitchFamily="34" charset="0"/>
+              <a:buFont typeface="Arial" panose="020B0604020202020204" pitchFamily="34" charset="0"/>
               <a:buChar char="–"/>
               <a:defRPr sz="2000" kern="1200">
                 <a:solidFill>
@@ -7880,7 +7819,7 @@
               <a:spcBef>
                 <a:spcPct val="20000"/>
               </a:spcBef>
-              <a:buFont typeface="Arial" pitchFamily="34" charset="0"/>
+              <a:buFont typeface="Arial" panose="020B0604020202020204" pitchFamily="34" charset="0"/>
               <a:buChar char="»"/>
               <a:defRPr sz="2000" kern="1200">
                 <a:solidFill>
@@ -7895,7 +7834,7 @@
               <a:spcBef>
                 <a:spcPct val="20000"/>
               </a:spcBef>
-              <a:buFont typeface="Arial" pitchFamily="34" charset="0"/>
+              <a:buFont typeface="Arial" panose="020B0604020202020204" pitchFamily="34" charset="0"/>
               <a:buChar char="•"/>
               <a:defRPr sz="2000" kern="1200">
                 <a:solidFill>
@@ -7910,7 +7849,7 @@
               <a:spcBef>
                 <a:spcPct val="20000"/>
               </a:spcBef>
-              <a:buFont typeface="Arial" pitchFamily="34" charset="0"/>
+              <a:buFont typeface="Arial" panose="020B0604020202020204" pitchFamily="34" charset="0"/>
               <a:buChar char="•"/>
               <a:defRPr sz="2000" kern="1200">
                 <a:solidFill>
@@ -7925,7 +7864,7 @@
               <a:spcBef>
                 <a:spcPct val="20000"/>
               </a:spcBef>
-              <a:buFont typeface="Arial" pitchFamily="34" charset="0"/>
+              <a:buFont typeface="Arial" panose="020B0604020202020204" pitchFamily="34" charset="0"/>
               <a:buChar char="•"/>
               <a:defRPr sz="2000" kern="1200">
                 <a:solidFill>
@@ -7940,7 +7879,7 @@
               <a:spcBef>
                 <a:spcPct val="20000"/>
               </a:spcBef>
-              <a:buFont typeface="Arial" pitchFamily="34" charset="0"/>
+              <a:buFont typeface="Arial" panose="020B0604020202020204" pitchFamily="34" charset="0"/>
               <a:buChar char="•"/>
               <a:defRPr sz="2000" kern="1200">
                 <a:solidFill>
@@ -7960,9 +7899,7 @@
       <p:sp>
         <p:nvSpPr>
           <p:cNvPr id="10" name="Content Placeholder 2"/>
-          <p:cNvSpPr txBox="1">
-            <a:spLocks/>
-          </p:cNvSpPr>
+          <p:cNvSpPr txBox="1"/>
           <p:nvPr/>
         </p:nvSpPr>
         <p:spPr>
@@ -7992,7 +7929,7 @@
                 <a:schemeClr val="accent1"/>
               </a:buClr>
               <a:buSzPct val="85000"/>
-              <a:buFont typeface="Arial" pitchFamily="34" charset="0"/>
+              <a:buFont typeface="Arial" panose="020B0604020202020204" pitchFamily="34" charset="0"/>
               <a:buChar char="•"/>
               <a:defRPr sz="3200" kern="1200">
                 <a:solidFill>
@@ -8011,7 +7948,7 @@
                 <a:schemeClr val="accent1"/>
               </a:buClr>
               <a:buSzPct val="85000"/>
-              <a:buFont typeface="Arial" pitchFamily="34" charset="0"/>
+              <a:buFont typeface="Arial" panose="020B0604020202020204" pitchFamily="34" charset="0"/>
               <a:buChar char="–"/>
               <a:defRPr sz="2800" kern="1200">
                 <a:solidFill>
@@ -8030,7 +7967,7 @@
                 <a:schemeClr val="accent1"/>
               </a:buClr>
               <a:buSzPct val="90000"/>
-              <a:buFont typeface="Arial" pitchFamily="34" charset="0"/>
+              <a:buFont typeface="Arial" panose="020B0604020202020204" pitchFamily="34" charset="0"/>
               <a:buChar char="•"/>
               <a:defRPr sz="2400" kern="1200">
                 <a:solidFill>
@@ -8048,7 +7985,7 @@
               <a:buClr>
                 <a:schemeClr val="accent1"/>
               </a:buClr>
-              <a:buFont typeface="Arial" pitchFamily="34" charset="0"/>
+              <a:buFont typeface="Arial" panose="020B0604020202020204" pitchFamily="34" charset="0"/>
               <a:buChar char="–"/>
               <a:defRPr sz="2000" kern="1200">
                 <a:solidFill>
@@ -8067,7 +8004,7 @@
                 <a:schemeClr val="accent1"/>
               </a:buClr>
               <a:buSzPct val="100000"/>
-              <a:buFont typeface="Arial" pitchFamily="34" charset="0"/>
+              <a:buFont typeface="Arial" panose="020B0604020202020204" pitchFamily="34" charset="0"/>
               <a:buChar char="»"/>
               <a:defRPr sz="2000" kern="1200" baseline="0">
                 <a:solidFill>
@@ -8085,7 +8022,7 @@
               <a:buClr>
                 <a:schemeClr val="accent1"/>
               </a:buClr>
-              <a:buFont typeface="Arial" pitchFamily="34" charset="0"/>
+              <a:buFont typeface="Arial" panose="020B0604020202020204" pitchFamily="34" charset="0"/>
               <a:buChar char="•"/>
               <a:defRPr sz="2000" kern="1200">
                 <a:solidFill>
@@ -8103,7 +8040,7 @@
               <a:buClr>
                 <a:schemeClr val="accent1"/>
               </a:buClr>
-              <a:buFont typeface="Arial" pitchFamily="34" charset="0"/>
+              <a:buFont typeface="Arial" panose="020B0604020202020204" pitchFamily="34" charset="0"/>
               <a:buChar char="•"/>
               <a:defRPr sz="2000" kern="1200">
                 <a:solidFill>
@@ -8121,7 +8058,7 @@
               <a:buClr>
                 <a:schemeClr val="accent1"/>
               </a:buClr>
-              <a:buFont typeface="Arial" pitchFamily="34" charset="0"/>
+              <a:buFont typeface="Arial" panose="020B0604020202020204" pitchFamily="34" charset="0"/>
               <a:buChar char="•"/>
               <a:defRPr sz="2000" kern="1200">
                 <a:solidFill>
@@ -8139,7 +8076,7 @@
               <a:buClr>
                 <a:schemeClr val="accent1"/>
               </a:buClr>
-              <a:buFont typeface="Arial" pitchFamily="34" charset="0"/>
+              <a:buFont typeface="Arial" panose="020B0604020202020204" pitchFamily="34" charset="0"/>
               <a:buChar char="•"/>
               <a:defRPr sz="2000" kern="1200">
                 <a:solidFill>
@@ -8164,12 +8101,18 @@
               </a:rPr>
               <a:t>2</a:t>
             </a:r>
+            <a:endParaRPr lang="en-US" b="1" dirty="0" smtClean="0">
+              <a:solidFill>
+                <a:srgbClr val="FF0000"/>
+              </a:solidFill>
+            </a:endParaRPr>
           </a:p>
           <a:p>
             <a:r>
               <a:rPr lang="en-US" dirty="0" smtClean="0"/>
               <a:t>Planning</a:t>
             </a:r>
+            <a:endParaRPr lang="en-US" dirty="0" smtClean="0"/>
           </a:p>
           <a:p>
             <a:pPr lvl="1"/>
@@ -8177,12 +8120,14 @@
               <a:rPr lang="en-US" dirty="0" smtClean="0"/>
               <a:t>Estimate </a:t>
             </a:r>
+            <a:endParaRPr lang="en-US" dirty="0" smtClean="0"/>
           </a:p>
           <a:p>
             <a:r>
               <a:rPr lang="en-US" dirty="0" smtClean="0"/>
               <a:t>Development</a:t>
             </a:r>
+            <a:endParaRPr lang="en-US" dirty="0" smtClean="0"/>
           </a:p>
           <a:p>
             <a:pPr lvl="1"/>
@@ -8194,6 +8139,11 @@
               </a:rPr>
               <a:t>Design Review</a:t>
             </a:r>
+            <a:endParaRPr lang="en-US" b="1" dirty="0" smtClean="0">
+              <a:solidFill>
+                <a:srgbClr val="FF0000"/>
+              </a:solidFill>
+            </a:endParaRPr>
           </a:p>
           <a:p>
             <a:pPr lvl="1"/>
@@ -8201,6 +8151,7 @@
               <a:rPr lang="en-US" dirty="0" smtClean="0"/>
               <a:t>Coding Standard</a:t>
             </a:r>
+            <a:endParaRPr lang="en-US" dirty="0" smtClean="0"/>
           </a:p>
           <a:p>
             <a:pPr lvl="1"/>
@@ -8208,6 +8159,7 @@
               <a:rPr lang="en-US" dirty="0" smtClean="0"/>
               <a:t>Design</a:t>
             </a:r>
+            <a:endParaRPr lang="en-US" dirty="0" smtClean="0"/>
           </a:p>
           <a:p>
             <a:pPr lvl="1"/>
@@ -8215,6 +8167,7 @@
               <a:rPr lang="en-US" dirty="0" smtClean="0"/>
               <a:t>Coding</a:t>
             </a:r>
+            <a:endParaRPr lang="en-US" dirty="0" smtClean="0"/>
           </a:p>
           <a:p>
             <a:pPr lvl="1"/>
@@ -8226,6 +8179,11 @@
               </a:rPr>
               <a:t>Code Review</a:t>
             </a:r>
+            <a:endParaRPr lang="en-US" b="1" dirty="0" smtClean="0">
+              <a:solidFill>
+                <a:srgbClr val="FF0000"/>
+              </a:solidFill>
+            </a:endParaRPr>
           </a:p>
           <a:p>
             <a:pPr lvl="1"/>
@@ -8233,45 +8191,49 @@
               <a:rPr lang="en-US" dirty="0" smtClean="0"/>
               <a:t>Test</a:t>
             </a:r>
+            <a:endParaRPr lang="en-US" dirty="0" smtClean="0"/>
           </a:p>
           <a:p>
             <a:r>
               <a:rPr lang="en-US" dirty="0" smtClean="0"/>
               <a:t>Record Time Spent</a:t>
             </a:r>
+            <a:endParaRPr lang="en-US" dirty="0" smtClean="0"/>
           </a:p>
           <a:p>
             <a:r>
               <a:rPr lang="en-US" dirty="0" smtClean="0"/>
               <a:t>Test Report</a:t>
             </a:r>
+            <a:endParaRPr lang="en-US" dirty="0" smtClean="0"/>
           </a:p>
           <a:p>
             <a:r>
               <a:rPr lang="en-US" dirty="0" smtClean="0"/>
               <a:t>Size Measurement</a:t>
             </a:r>
+            <a:endParaRPr lang="en-US" dirty="0" smtClean="0"/>
           </a:p>
           <a:p>
             <a:r>
               <a:rPr lang="en-US" dirty="0" smtClean="0"/>
               <a:t>Postmortem</a:t>
             </a:r>
+            <a:endParaRPr lang="en-US" dirty="0" smtClean="0"/>
           </a:p>
           <a:p>
             <a:r>
               <a:rPr lang="en-US" dirty="0" smtClean="0"/>
               <a:t>Process Improvement Plan</a:t>
             </a:r>
+            <a:endParaRPr lang="en-US" dirty="0" smtClean="0"/>
           </a:p>
         </p:txBody>
       </p:sp>
       <p:sp>
         <p:nvSpPr>
           <p:cNvPr id="11" name="Content Placeholder 2"/>
-          <p:cNvSpPr txBox="1">
-            <a:spLocks/>
-          </p:cNvSpPr>
+          <p:cNvSpPr txBox="1"/>
           <p:nvPr/>
         </p:nvSpPr>
         <p:spPr>
@@ -8301,7 +8263,7 @@
                 <a:schemeClr val="accent1"/>
               </a:buClr>
               <a:buSzPct val="85000"/>
-              <a:buFont typeface="Arial" pitchFamily="34" charset="0"/>
+              <a:buFont typeface="Arial" panose="020B0604020202020204" pitchFamily="34" charset="0"/>
               <a:buChar char="•"/>
               <a:defRPr sz="3200" kern="1200">
                 <a:solidFill>
@@ -8320,7 +8282,7 @@
                 <a:schemeClr val="accent1"/>
               </a:buClr>
               <a:buSzPct val="85000"/>
-              <a:buFont typeface="Arial" pitchFamily="34" charset="0"/>
+              <a:buFont typeface="Arial" panose="020B0604020202020204" pitchFamily="34" charset="0"/>
               <a:buChar char="–"/>
               <a:defRPr sz="2800" kern="1200">
                 <a:solidFill>
@@ -8339,7 +8301,7 @@
                 <a:schemeClr val="accent1"/>
               </a:buClr>
               <a:buSzPct val="90000"/>
-              <a:buFont typeface="Arial" pitchFamily="34" charset="0"/>
+              <a:buFont typeface="Arial" panose="020B0604020202020204" pitchFamily="34" charset="0"/>
               <a:buChar char="•"/>
               <a:defRPr sz="2400" kern="1200">
                 <a:solidFill>
@@ -8357,7 +8319,7 @@
               <a:buClr>
                 <a:schemeClr val="accent1"/>
               </a:buClr>
-              <a:buFont typeface="Arial" pitchFamily="34" charset="0"/>
+              <a:buFont typeface="Arial" panose="020B0604020202020204" pitchFamily="34" charset="0"/>
               <a:buChar char="–"/>
               <a:defRPr sz="2000" kern="1200">
                 <a:solidFill>
@@ -8376,7 +8338,7 @@
                 <a:schemeClr val="accent1"/>
               </a:buClr>
               <a:buSzPct val="100000"/>
-              <a:buFont typeface="Arial" pitchFamily="34" charset="0"/>
+              <a:buFont typeface="Arial" panose="020B0604020202020204" pitchFamily="34" charset="0"/>
               <a:buChar char="»"/>
               <a:defRPr sz="2000" kern="1200" baseline="0">
                 <a:solidFill>
@@ -8394,7 +8356,7 @@
               <a:buClr>
                 <a:schemeClr val="accent1"/>
               </a:buClr>
-              <a:buFont typeface="Arial" pitchFamily="34" charset="0"/>
+              <a:buFont typeface="Arial" panose="020B0604020202020204" pitchFamily="34" charset="0"/>
               <a:buChar char="•"/>
               <a:defRPr sz="2000" kern="1200">
                 <a:solidFill>
@@ -8412,7 +8374,7 @@
               <a:buClr>
                 <a:schemeClr val="accent1"/>
               </a:buClr>
-              <a:buFont typeface="Arial" pitchFamily="34" charset="0"/>
+              <a:buFont typeface="Arial" panose="020B0604020202020204" pitchFamily="34" charset="0"/>
               <a:buChar char="•"/>
               <a:defRPr sz="2000" kern="1200">
                 <a:solidFill>
@@ -8430,7 +8392,7 @@
               <a:buClr>
                 <a:schemeClr val="accent1"/>
               </a:buClr>
-              <a:buFont typeface="Arial" pitchFamily="34" charset="0"/>
+              <a:buFont typeface="Arial" panose="020B0604020202020204" pitchFamily="34" charset="0"/>
               <a:buChar char="•"/>
               <a:defRPr sz="2000" kern="1200">
                 <a:solidFill>
@@ -8448,7 +8410,7 @@
               <a:buClr>
                 <a:schemeClr val="accent1"/>
               </a:buClr>
-              <a:buFont typeface="Arial" pitchFamily="34" charset="0"/>
+              <a:buFont typeface="Arial" panose="020B0604020202020204" pitchFamily="34" charset="0"/>
               <a:buChar char="•"/>
               <a:defRPr sz="2000" kern="1200">
                 <a:solidFill>
@@ -8473,12 +8435,18 @@
               </a:rPr>
               <a:t>2.1</a:t>
             </a:r>
+            <a:endParaRPr lang="en-US" b="1" dirty="0" smtClean="0">
+              <a:solidFill>
+                <a:srgbClr val="FF0000"/>
+              </a:solidFill>
+            </a:endParaRPr>
           </a:p>
           <a:p>
             <a:r>
               <a:rPr lang="en-US" dirty="0" smtClean="0"/>
               <a:t>Planning</a:t>
             </a:r>
+            <a:endParaRPr lang="en-US" dirty="0" smtClean="0"/>
           </a:p>
           <a:p>
             <a:pPr lvl="1"/>
@@ -8486,12 +8454,14 @@
               <a:rPr lang="en-US" dirty="0" smtClean="0"/>
               <a:t>Estimate </a:t>
             </a:r>
+            <a:endParaRPr lang="en-US" dirty="0" smtClean="0"/>
           </a:p>
           <a:p>
             <a:r>
               <a:rPr lang="en-US" dirty="0" smtClean="0"/>
               <a:t>Development</a:t>
             </a:r>
+            <a:endParaRPr lang="en-US" dirty="0" smtClean="0"/>
           </a:p>
           <a:p>
             <a:pPr lvl="1"/>
@@ -8503,6 +8473,11 @@
               </a:rPr>
               <a:t>Analysis </a:t>
             </a:r>
+            <a:endParaRPr lang="en-US" b="1" dirty="0" smtClean="0">
+              <a:solidFill>
+                <a:srgbClr val="FF0000"/>
+              </a:solidFill>
+            </a:endParaRPr>
           </a:p>
           <a:p>
             <a:pPr lvl="1"/>
@@ -8514,6 +8489,11 @@
               </a:rPr>
               <a:t>Design Spec</a:t>
             </a:r>
+            <a:endParaRPr lang="en-US" b="1" dirty="0" smtClean="0">
+              <a:solidFill>
+                <a:srgbClr val="FF0000"/>
+              </a:solidFill>
+            </a:endParaRPr>
           </a:p>
           <a:p>
             <a:pPr lvl="1"/>
@@ -8521,6 +8501,7 @@
               <a:rPr lang="en-US" dirty="0" smtClean="0"/>
               <a:t>Design Review</a:t>
             </a:r>
+            <a:endParaRPr lang="en-US" dirty="0" smtClean="0"/>
           </a:p>
           <a:p>
             <a:pPr lvl="1"/>
@@ -8528,6 +8509,7 @@
               <a:rPr lang="en-US" dirty="0" smtClean="0"/>
               <a:t>Coding Standard</a:t>
             </a:r>
+            <a:endParaRPr lang="en-US" dirty="0" smtClean="0"/>
           </a:p>
           <a:p>
             <a:pPr lvl="1"/>
@@ -8535,6 +8517,7 @@
               <a:rPr lang="en-US" dirty="0" smtClean="0"/>
               <a:t>Design</a:t>
             </a:r>
+            <a:endParaRPr lang="en-US" dirty="0" smtClean="0"/>
           </a:p>
           <a:p>
             <a:pPr lvl="1"/>
@@ -8542,6 +8525,7 @@
               <a:rPr lang="en-US" dirty="0" smtClean="0"/>
               <a:t>Coding</a:t>
             </a:r>
+            <a:endParaRPr lang="en-US" dirty="0" smtClean="0"/>
           </a:p>
           <a:p>
             <a:pPr lvl="1"/>
@@ -8549,6 +8533,7 @@
               <a:rPr lang="en-US" dirty="0" smtClean="0"/>
               <a:t>Code Review</a:t>
             </a:r>
+            <a:endParaRPr lang="en-US" dirty="0" smtClean="0"/>
           </a:p>
           <a:p>
             <a:pPr lvl="1"/>
@@ -8556,45 +8541,46 @@
               <a:rPr lang="en-US" dirty="0" smtClean="0"/>
               <a:t>Test</a:t>
             </a:r>
+            <a:endParaRPr lang="en-US" dirty="0" smtClean="0"/>
           </a:p>
           <a:p>
             <a:r>
               <a:rPr lang="en-US" dirty="0" smtClean="0"/>
               <a:t>Record Time Spent</a:t>
             </a:r>
+            <a:endParaRPr lang="en-US" dirty="0" smtClean="0"/>
           </a:p>
           <a:p>
             <a:r>
               <a:rPr lang="en-US" dirty="0" smtClean="0"/>
               <a:t>Test Report</a:t>
             </a:r>
+            <a:endParaRPr lang="en-US" dirty="0" smtClean="0"/>
           </a:p>
           <a:p>
             <a:r>
               <a:rPr lang="en-US" dirty="0" smtClean="0"/>
               <a:t>Size Measurement</a:t>
             </a:r>
+            <a:endParaRPr lang="en-US" dirty="0" smtClean="0"/>
           </a:p>
           <a:p>
             <a:r>
               <a:rPr lang="en-US" dirty="0" smtClean="0"/>
               <a:t>Postmortem</a:t>
             </a:r>
+            <a:endParaRPr lang="en-US" dirty="0" smtClean="0"/>
           </a:p>
           <a:p>
             <a:r>
               <a:rPr lang="en-US" dirty="0" smtClean="0"/>
               <a:t>Process Improvement Plan</a:t>
             </a:r>
+            <a:endParaRPr lang="en-US" dirty="0" smtClean="0"/>
           </a:p>
         </p:txBody>
       </p:sp>
     </p:spTree>
-    <p:extLst>
-      <p:ext uri="{BB962C8B-B14F-4D97-AF65-F5344CB8AC3E}">
-        <p14:creationId xmlns:p14="http://schemas.microsoft.com/office/powerpoint/2010/main" val="601280872"/>
-      </p:ext>
-    </p:extLst>
   </p:cSld>
   <p:clrMapOvr>
     <a:masterClrMapping/>
@@ -8842,6 +8828,7 @@
               <a:rPr lang="en-US" dirty="0" smtClean="0"/>
               <a:t>Scripts</a:t>
             </a:r>
+            <a:endParaRPr lang="en-US" dirty="0" smtClean="0"/>
           </a:p>
           <a:p>
             <a:pPr lvl="1"/>
@@ -8849,6 +8836,7 @@
               <a:rPr lang="en-US" dirty="0" smtClean="0"/>
               <a:t>Measures</a:t>
             </a:r>
+            <a:endParaRPr lang="en-US" dirty="0" smtClean="0"/>
           </a:p>
           <a:p>
             <a:pPr lvl="1"/>
@@ -8856,6 +8844,7 @@
               <a:rPr lang="en-US" dirty="0" smtClean="0"/>
               <a:t>Standards</a:t>
             </a:r>
+            <a:endParaRPr lang="en-US" dirty="0" smtClean="0"/>
           </a:p>
           <a:p>
             <a:pPr lvl="1"/>
@@ -8863,6 +8852,7 @@
               <a:rPr lang="en-US" dirty="0" smtClean="0"/>
               <a:t>Forms</a:t>
             </a:r>
+            <a:endParaRPr lang="en-US" dirty="0" smtClean="0"/>
           </a:p>
           <a:p>
             <a:endParaRPr lang="en-US" dirty="0"/>
@@ -8951,12 +8941,14 @@
               <a:rPr lang="en-US" sz="2400" dirty="0" smtClean="0"/>
               <a:t>The PSP scripts provide expert-level guidance to following the process steps and they provide a framework for applying the PSP measures. The PSP has four core measures:</a:t>
             </a:r>
+            <a:endParaRPr lang="en-US" sz="2400" dirty="0" smtClean="0"/>
           </a:p>
           <a:p>
             <a:r>
               <a:rPr lang="en-US" sz="2400" dirty="0" smtClean="0"/>
               <a:t>Size – the size measure for a product part, such as lines of code (LOC).</a:t>
             </a:r>
+            <a:endParaRPr lang="en-US" sz="2400" dirty="0" smtClean="0"/>
           </a:p>
           <a:p>
             <a:pPr lvl="1"/>
@@ -8971,6 +8963,7 @@
               <a:rPr lang="en-US" sz="2400" dirty="0" smtClean="0"/>
               <a:t>Effort – the time required to complete a task, usually recorded in minutes.</a:t>
             </a:r>
+            <a:endParaRPr lang="en-US" sz="2400" dirty="0" smtClean="0"/>
           </a:p>
           <a:p>
             <a:pPr lvl="1"/>
@@ -8985,6 +8978,7 @@
               <a:rPr lang="en-US" sz="2400" dirty="0" smtClean="0"/>
               <a:t>Quality – the number of defects in the product.</a:t>
             </a:r>
+            <a:endParaRPr lang="en-US" sz="2400" dirty="0" smtClean="0"/>
           </a:p>
           <a:p>
             <a:pPr lvl="1"/>
@@ -8999,6 +8993,7 @@
               <a:rPr lang="en-US" sz="2400" dirty="0" smtClean="0"/>
               <a:t>Schedule – a measure of project progression, tracked against planned and actual completion dates.</a:t>
             </a:r>
+            <a:endParaRPr lang="en-US" sz="2400" dirty="0" smtClean="0"/>
           </a:p>
           <a:p>
             <a:pPr lvl="1"/>
@@ -9599,6 +9594,7 @@
               <a:rPr lang="en-US" dirty="0" smtClean="0"/>
               <a:t>Based on this principle:</a:t>
             </a:r>
+            <a:endParaRPr lang="en-US" dirty="0" smtClean="0"/>
           </a:p>
           <a:p>
             <a:pPr lvl="1"/>
@@ -9606,6 +9602,7 @@
               <a:rPr lang="en-US" dirty="0" smtClean="0"/>
               <a:t>You can’t improve what you can’t measure. </a:t>
             </a:r>
+            <a:endParaRPr lang="en-US" dirty="0" smtClean="0"/>
           </a:p>
           <a:p>
             <a:pPr lvl="1"/>
@@ -9624,6 +9621,7 @@
               <a:rPr lang="en-US" dirty="0" smtClean="0"/>
               <a:t>– </a:t>
             </a:r>
+            <a:endParaRPr lang="en-US" dirty="0" smtClean="0"/>
           </a:p>
           <a:p>
             <a:pPr lvl="1"/>
@@ -9631,6 +9629,7 @@
               <a:rPr lang="en-US" dirty="0" smtClean="0"/>
               <a:t>the time spent in each phase; </a:t>
             </a:r>
+            <a:endParaRPr lang="en-US" dirty="0" smtClean="0"/>
           </a:p>
           <a:p>
             <a:pPr lvl="1"/>
@@ -9638,6 +9637,7 @@
               <a:rPr lang="en-US" dirty="0" smtClean="0"/>
               <a:t>when and where defects were injected, found, and fixed; </a:t>
             </a:r>
+            <a:endParaRPr lang="en-US" dirty="0" smtClean="0"/>
           </a:p>
           <a:p>
             <a:pPr lvl="1"/>
@@ -9645,6 +9645,7 @@
               <a:rPr lang="en-US" dirty="0" smtClean="0"/>
               <a:t>and the size of the product parts. </a:t>
             </a:r>
+            <a:endParaRPr lang="en-US" dirty="0" smtClean="0"/>
           </a:p>
           <a:p>
             <a:r>
@@ -9734,6 +9735,7 @@
               <a:rPr lang="en-US" sz="2400" dirty="0" smtClean="0"/>
               <a:t>In small, start-up team, high quality requirement is hard to find</a:t>
             </a:r>
+            <a:endParaRPr lang="en-US" sz="2400" dirty="0" smtClean="0"/>
           </a:p>
           <a:p>
             <a:pPr lvl="1"/>
@@ -9741,12 +9743,14 @@
               <a:rPr lang="en-US" sz="2000" dirty="0" smtClean="0"/>
               <a:t>If the input is in low quality,  how can the quality of PSP be ensured?</a:t>
             </a:r>
+            <a:endParaRPr lang="en-US" sz="2000" dirty="0" smtClean="0"/>
           </a:p>
           <a:p>
             <a:r>
               <a:rPr lang="en-US" sz="2400" dirty="0" smtClean="0"/>
               <a:t>Depends on data</a:t>
             </a:r>
+            <a:endParaRPr lang="en-US" sz="2400" dirty="0" smtClean="0"/>
           </a:p>
           <a:p>
             <a:pPr lvl="1"/>
@@ -9754,6 +9758,7 @@
               <a:rPr lang="en-US" sz="2000" dirty="0" smtClean="0"/>
               <a:t>Requires developers to enter data to log various activities</a:t>
             </a:r>
+            <a:endParaRPr lang="en-US" sz="2000" dirty="0" smtClean="0"/>
           </a:p>
           <a:p>
             <a:pPr lvl="1"/>
@@ -9761,6 +9766,7 @@
               <a:rPr lang="en-US" sz="2000" dirty="0" smtClean="0"/>
               <a:t>What if data is missing, or inaccurate?</a:t>
             </a:r>
+            <a:endParaRPr lang="en-US" sz="2000" dirty="0" smtClean="0"/>
           </a:p>
           <a:p>
             <a:pPr lvl="1"/>
@@ -9772,12 +9778,14 @@
               <a:rPr lang="en-US" altLang="zh-CN" sz="2000" dirty="0" smtClean="0"/>
               <a:t>Should I honestly record how bad I am?</a:t>
             </a:r>
+            <a:endParaRPr lang="en-US" altLang="zh-CN" sz="2000" dirty="0" smtClean="0"/>
           </a:p>
           <a:p>
             <a:r>
               <a:rPr lang="en-US" sz="2400" dirty="0" smtClean="0"/>
               <a:t>Micro-measurement</a:t>
             </a:r>
+            <a:endParaRPr lang="en-US" sz="2400" dirty="0" smtClean="0"/>
           </a:p>
           <a:p>
             <a:pPr lvl="1"/>
@@ -9785,6 +9793,7 @@
               <a:rPr lang="en-US" sz="2000" dirty="0" smtClean="0"/>
               <a:t>Do we need to measure code size everyday? </a:t>
             </a:r>
+            <a:endParaRPr lang="en-US" sz="2000" dirty="0" smtClean="0"/>
           </a:p>
           <a:p>
             <a:pPr lvl="1"/>
@@ -9815,6 +9824,7 @@
               <a:rPr lang="en-US" sz="2400" dirty="0" smtClean="0"/>
               <a:t>What’s the end goal?</a:t>
             </a:r>
+            <a:endParaRPr lang="en-US" sz="2400" dirty="0" smtClean="0"/>
           </a:p>
           <a:p>
             <a:pPr lvl="1"/>
@@ -9822,6 +9832,7 @@
               <a:rPr lang="en-US" sz="2000" dirty="0" smtClean="0"/>
               <a:t>Measuring how to effectively execute on a requirement</a:t>
             </a:r>
+            <a:endParaRPr lang="en-US" sz="2000" dirty="0" smtClean="0"/>
           </a:p>
           <a:p>
             <a:pPr lvl="1"/>
@@ -9829,6 +9840,7 @@
               <a:rPr lang="en-US" sz="2000" dirty="0" smtClean="0"/>
               <a:t>NOT measuring how customers are satisfied by the product. </a:t>
             </a:r>
+            <a:endParaRPr lang="en-US" sz="2000" dirty="0" smtClean="0"/>
           </a:p>
         </p:txBody>
       </p:sp>
@@ -10572,7 +10584,7 @@
           </p:nvPr>
         </p:nvPicPr>
         <p:blipFill>
-          <a:blip r:embed="rId2"/>
+          <a:blip r:embed="rId1"/>
           <a:stretch>
             <a:fillRect/>
           </a:stretch>
@@ -10588,11 +10600,6 @@
         </p:spPr>
       </p:pic>
     </p:spTree>
-    <p:extLst>
-      <p:ext uri="{BB962C8B-B14F-4D97-AF65-F5344CB8AC3E}">
-        <p14:creationId xmlns:p14="http://schemas.microsoft.com/office/powerpoint/2010/main" val="2230343479"/>
-      </p:ext>
-    </p:extLst>
   </p:cSld>
   <p:clrMapOvr>
     <a:masterClrMapping/>
@@ -10668,7 +10675,7 @@
           <p:nvPr/>
         </p:nvPicPr>
         <p:blipFill>
-          <a:blip r:embed="rId2"/>
+          <a:blip r:embed="rId1"/>
           <a:stretch>
             <a:fillRect/>
           </a:stretch>
@@ -10684,11 +10691,6 @@
         </p:spPr>
       </p:pic>
     </p:spTree>
-    <p:extLst>
-      <p:ext uri="{BB962C8B-B14F-4D97-AF65-F5344CB8AC3E}">
-        <p14:creationId xmlns:p14="http://schemas.microsoft.com/office/powerpoint/2010/main" val="1640774756"/>
-      </p:ext>
-    </p:extLst>
   </p:cSld>
   <p:clrMapOvr>
     <a:masterClrMapping/>
@@ -10772,6 +10774,7 @@
               <a:rPr lang="en-US" altLang="zh-CN" dirty="0" smtClean="0"/>
               <a:t>Team Project</a:t>
             </a:r>
+            <a:endParaRPr lang="en-US" altLang="zh-CN" dirty="0" smtClean="0"/>
           </a:p>
           <a:p>
             <a:pPr lvl="2"/>
@@ -10779,6 +10782,7 @@
               <a:rPr lang="en-US" altLang="zh-CN" dirty="0" smtClean="0"/>
               <a:t>It’s ok to do “small” projects</a:t>
             </a:r>
+            <a:endParaRPr lang="en-US" altLang="zh-CN" dirty="0" smtClean="0"/>
           </a:p>
           <a:p>
             <a:pPr eaLnBrk="1" hangingPunct="1"/>
@@ -10786,6 +10790,7 @@
               <a:rPr lang="en-US" dirty="0" smtClean="0"/>
               <a:t>Software Engineering (again)</a:t>
             </a:r>
+            <a:endParaRPr lang="en-US" dirty="0" smtClean="0"/>
           </a:p>
           <a:p>
             <a:pPr eaLnBrk="1" hangingPunct="1"/>
@@ -10793,6 +10798,7 @@
               <a:rPr lang="en-US" dirty="0" smtClean="0"/>
               <a:t>How to grow skills</a:t>
             </a:r>
+            <a:endParaRPr lang="en-US" dirty="0" smtClean="0"/>
           </a:p>
           <a:p>
             <a:pPr lvl="1" eaLnBrk="1" hangingPunct="1"/>
@@ -10824,6 +10830,7 @@
               <a:rPr lang="en-US" dirty="0" smtClean="0"/>
               <a:t>rocess</a:t>
             </a:r>
+            <a:endParaRPr lang="en-US" dirty="0" smtClean="0"/>
           </a:p>
           <a:p>
             <a:pPr eaLnBrk="1" hangingPunct="1"/>
@@ -10831,6 +10838,7 @@
               <a:rPr lang="en-US" dirty="0" smtClean="0"/>
               <a:t>How to show you have obtained such skills</a:t>
             </a:r>
+            <a:endParaRPr lang="en-US" dirty="0" smtClean="0"/>
           </a:p>
           <a:p>
             <a:pPr eaLnBrk="1" hangingPunct="1"/>
@@ -11401,7 +11409,7 @@
           </a:bodyPr>
           <a:lstStyle/>
           <a:p>
-            <a:pPr marL="118872" indent="0">
+            <a:pPr marL="118745" indent="0">
               <a:buNone/>
             </a:pPr>
             <a:r>
@@ -11576,7 +11584,7 @@
             <a:endParaRPr lang="en-US" sz="2000" dirty="0"/>
           </a:p>
           <a:p>
-            <a:pPr marL="118872" indent="0">
+            <a:pPr marL="118745" indent="0">
               <a:buNone/>
             </a:pPr>
             <a:r>
@@ -11592,11 +11600,6 @@
         </p:txBody>
       </p:sp>
     </p:spTree>
-    <p:extLst>
-      <p:ext uri="{BB962C8B-B14F-4D97-AF65-F5344CB8AC3E}">
-        <p14:creationId xmlns:p14="http://schemas.microsoft.com/office/powerpoint/2010/main" val="303877150"/>
-      </p:ext>
-    </p:extLst>
   </p:cSld>
   <p:clrMapOvr>
     <a:masterClrMapping/>
@@ -11669,6 +11672,7 @@
               <a:rPr lang="en-US" altLang="zh-CN" sz="2200" dirty="0" smtClean="0"/>
               <a:t>How do you measure efficiency?</a:t>
             </a:r>
+            <a:endParaRPr lang="en-US" altLang="zh-CN" sz="2200" dirty="0" smtClean="0"/>
           </a:p>
           <a:p>
             <a:pPr lvl="1"/>
@@ -12311,6 +12315,7 @@
               <a:rPr lang="en-US" altLang="zh-CN" sz="2200" dirty="0" smtClean="0"/>
               <a:t>How do you measure creativity?</a:t>
             </a:r>
+            <a:endParaRPr lang="en-US" altLang="zh-CN" sz="2200" dirty="0" smtClean="0"/>
           </a:p>
           <a:p>
             <a:pPr lvl="1"/>
@@ -12322,6 +12327,7 @@
               <a:rPr lang="en-US" altLang="zh-CN" sz="2000" dirty="0" smtClean="0"/>
               <a:t>? </a:t>
             </a:r>
+            <a:endParaRPr lang="en-US" altLang="zh-CN" sz="2000" dirty="0" smtClean="0"/>
           </a:p>
           <a:p>
             <a:pPr lvl="1"/>
@@ -12333,36 +12339,22 @@
               <a:rPr lang="en-US" altLang="zh-CN" sz="2000" dirty="0" smtClean="0"/>
               <a:t>? </a:t>
             </a:r>
+            <a:endParaRPr lang="en-US" altLang="zh-CN" sz="2000" dirty="0" smtClean="0"/>
           </a:p>
           <a:p>
             <a:r>
               <a:rPr lang="en-US" altLang="zh-CN" sz="2200" dirty="0" smtClean="0"/>
               <a:t>Is software Art or Engineering?</a:t>
             </a:r>
+            <a:endParaRPr lang="en-US" altLang="zh-CN" sz="2200" dirty="0" smtClean="0"/>
           </a:p>
           <a:p>
             <a:pPr lvl="1"/>
             <a:r>
               <a:rPr lang="en-US" altLang="zh-CN" sz="2000" dirty="0" smtClean="0"/>
-              <a:t>How do you measure an Artist?  </a:t>
-            </a:r>
-          </a:p>
-          <a:p>
-            <a:pPr lvl="1"/>
-            <a:r>
-              <a:rPr lang="en-US" altLang="zh-CN" sz="2000" dirty="0" smtClean="0"/>
-              <a:t>“Gone with the Wind”   by </a:t>
-            </a:r>
-            <a:r>
-              <a:rPr lang="en-US" sz="2000" dirty="0" smtClean="0">
-                <a:hlinkClick r:id="rId3" action="ppaction://hlinkfile" tooltip="Margaret Mitchell"/>
-              </a:rPr>
-              <a:t>Margaret Mitchell</a:t>
-            </a:r>
-            <a:r>
-              <a:rPr lang="en-US" altLang="zh-CN" sz="2000" dirty="0" smtClean="0"/>
-              <a:t>;  </a:t>
-            </a:r>
+              <a:t>How do you measure an Artist?   </a:t>
+            </a:r>
+            <a:endParaRPr lang="en-US" altLang="zh-CN" sz="2000" dirty="0" smtClean="0"/>
           </a:p>
           <a:p>
             <a:pPr lvl="1"/>
@@ -12690,49 +12682,6 @@
                                   </p:childTnLst>
                                 </p:cTn>
                               </p:par>
-                              <p:par>
-                                <p:cTn id="25" presetID="10" presetClass="entr" presetSubtype="0" fill="hold" grpId="0" nodeType="withEffect">
-                                  <p:stCondLst>
-                                    <p:cond delay="0"/>
-                                  </p:stCondLst>
-                                  <p:childTnLst>
-                                    <p:set>
-                                      <p:cBhvr>
-                                        <p:cTn id="26" dur="1" fill="hold">
-                                          <p:stCondLst>
-                                            <p:cond delay="0"/>
-                                          </p:stCondLst>
-                                        </p:cTn>
-                                        <p:tgtEl>
-                                          <p:spTgt spid="2">
-                                            <p:txEl>
-                                              <p:pRg st="6" end="6"/>
-                                            </p:txEl>
-                                          </p:spTgt>
-                                        </p:tgtEl>
-                                        <p:attrNameLst>
-                                          <p:attrName>style.visibility</p:attrName>
-                                        </p:attrNameLst>
-                                      </p:cBhvr>
-                                      <p:to>
-                                        <p:strVal val="visible"/>
-                                      </p:to>
-                                    </p:set>
-                                    <p:animEffect transition="in" filter="fade">
-                                      <p:cBhvr>
-                                        <p:cTn id="27" dur="2000"/>
-                                        <p:tgtEl>
-                                          <p:spTgt spid="2">
-                                            <p:txEl>
-                                              <p:pRg st="6" end="6"/>
-                                            </p:txEl>
-                                          </p:spTgt>
-                                        </p:tgtEl>
-                                      </p:cBhvr>
-                                    </p:animEffect>
-                                  </p:childTnLst>
-                                </p:cTn>
-                              </p:par>
                             </p:childTnLst>
                           </p:cTn>
                         </p:par>
@@ -12829,178 +12778,157 @@
             </a:pPr>
             <a:r>
               <a:rPr lang="zh-CN" altLang="en-US" sz="2400" dirty="0" smtClean="0">
-                <a:latin typeface="Microsoft YaHei" pitchFamily="34" charset="-122"/>
-                <a:ea typeface="Microsoft YaHei" pitchFamily="34" charset="-122"/>
+                <a:latin typeface="微软雅黑" panose="020B0503020204020204" charset="-122"/>
+                <a:ea typeface="微软雅黑" panose="020B0503020204020204" charset="-122"/>
               </a:rPr>
               <a:t>念奴娇 </a:t>
             </a:r>
             <a:r>
               <a:rPr lang="en-US" altLang="zh-CN" sz="2400" dirty="0" smtClean="0">
-                <a:latin typeface="Microsoft YaHei" pitchFamily="34" charset="-122"/>
-                <a:ea typeface="Microsoft YaHei" pitchFamily="34" charset="-122"/>
+                <a:latin typeface="微软雅黑" panose="020B0503020204020204" charset="-122"/>
+                <a:ea typeface="微软雅黑" panose="020B0503020204020204" charset="-122"/>
               </a:rPr>
               <a:t>· </a:t>
             </a:r>
             <a:r>
               <a:rPr lang="zh-CN" altLang="en-US" sz="2400" dirty="0" smtClean="0">
-                <a:latin typeface="Microsoft YaHei" pitchFamily="34" charset="-122"/>
-                <a:ea typeface="Microsoft YaHei" pitchFamily="34" charset="-122"/>
+                <a:latin typeface="微软雅黑" panose="020B0503020204020204" charset="-122"/>
+                <a:ea typeface="微软雅黑" panose="020B0503020204020204" charset="-122"/>
               </a:rPr>
               <a:t>赤壁怀古 </a:t>
             </a:r>
-            <a:r>
-              <a:rPr lang="zh-CN" altLang="en-US" dirty="0" smtClean="0">
-                <a:latin typeface="Microsoft YaHei" pitchFamily="34" charset="-122"/>
-                <a:ea typeface="Microsoft YaHei" pitchFamily="34" charset="-122"/>
-              </a:rPr>
-              <a:t/>
-            </a:r>
             <a:br>
               <a:rPr lang="zh-CN" altLang="en-US" dirty="0" smtClean="0">
-                <a:latin typeface="Microsoft YaHei" pitchFamily="34" charset="-122"/>
-                <a:ea typeface="Microsoft YaHei" pitchFamily="34" charset="-122"/>
+                <a:latin typeface="微软雅黑" panose="020B0503020204020204" charset="-122"/>
+                <a:ea typeface="微软雅黑" panose="020B0503020204020204" charset="-122"/>
               </a:rPr>
             </a:br>
-            <a:r>
-              <a:rPr lang="zh-CN" altLang="en-US" dirty="0" smtClean="0">
-                <a:latin typeface="Microsoft YaHei" pitchFamily="34" charset="-122"/>
-                <a:ea typeface="Microsoft YaHei" pitchFamily="34" charset="-122"/>
-              </a:rPr>
-              <a:t/>
-            </a:r>
             <a:br>
               <a:rPr lang="zh-CN" altLang="en-US" dirty="0" smtClean="0">
-                <a:latin typeface="Microsoft YaHei" pitchFamily="34" charset="-122"/>
-                <a:ea typeface="Microsoft YaHei" pitchFamily="34" charset="-122"/>
+                <a:latin typeface="微软雅黑" panose="020B0503020204020204" charset="-122"/>
+                <a:ea typeface="微软雅黑" panose="020B0503020204020204" charset="-122"/>
               </a:rPr>
             </a:br>
             <a:r>
               <a:rPr lang="zh-CN" altLang="en-US" sz="2200" dirty="0" smtClean="0">
-                <a:latin typeface="Microsoft YaHei" pitchFamily="34" charset="-122"/>
-                <a:ea typeface="Microsoft YaHei" pitchFamily="34" charset="-122"/>
+                <a:latin typeface="微软雅黑" panose="020B0503020204020204" charset="-122"/>
+                <a:ea typeface="微软雅黑" panose="020B0503020204020204" charset="-122"/>
               </a:rPr>
               <a:t>大江东去，浪淘尽，</a:t>
             </a:r>
             <a:br>
               <a:rPr lang="zh-CN" altLang="en-US" sz="2200" dirty="0" smtClean="0">
-                <a:latin typeface="Microsoft YaHei" pitchFamily="34" charset="-122"/>
-                <a:ea typeface="Microsoft YaHei" pitchFamily="34" charset="-122"/>
+                <a:latin typeface="微软雅黑" panose="020B0503020204020204" charset="-122"/>
+                <a:ea typeface="微软雅黑" panose="020B0503020204020204" charset="-122"/>
               </a:rPr>
             </a:br>
             <a:r>
               <a:rPr lang="zh-CN" altLang="en-US" sz="2200" dirty="0" smtClean="0">
-                <a:latin typeface="Microsoft YaHei" pitchFamily="34" charset="-122"/>
-                <a:ea typeface="Microsoft YaHei" pitchFamily="34" charset="-122"/>
+                <a:latin typeface="微软雅黑" panose="020B0503020204020204" charset="-122"/>
+                <a:ea typeface="微软雅黑" panose="020B0503020204020204" charset="-122"/>
               </a:rPr>
               <a:t>千古风流人物。</a:t>
             </a:r>
             <a:br>
               <a:rPr lang="zh-CN" altLang="en-US" sz="2200" dirty="0" smtClean="0">
-                <a:latin typeface="Microsoft YaHei" pitchFamily="34" charset="-122"/>
-                <a:ea typeface="Microsoft YaHei" pitchFamily="34" charset="-122"/>
+                <a:latin typeface="微软雅黑" panose="020B0503020204020204" charset="-122"/>
+                <a:ea typeface="微软雅黑" panose="020B0503020204020204" charset="-122"/>
               </a:rPr>
             </a:br>
             <a:r>
               <a:rPr lang="zh-CN" altLang="en-US" sz="2200" dirty="0" smtClean="0">
-                <a:latin typeface="Microsoft YaHei" pitchFamily="34" charset="-122"/>
-                <a:ea typeface="Microsoft YaHei" pitchFamily="34" charset="-122"/>
+                <a:latin typeface="微软雅黑" panose="020B0503020204020204" charset="-122"/>
+                <a:ea typeface="微软雅黑" panose="020B0503020204020204" charset="-122"/>
               </a:rPr>
               <a:t>故垒西边，人道是，三国周郎赤壁。</a:t>
             </a:r>
             <a:br>
               <a:rPr lang="zh-CN" altLang="en-US" sz="2200" dirty="0" smtClean="0">
-                <a:latin typeface="Microsoft YaHei" pitchFamily="34" charset="-122"/>
-                <a:ea typeface="Microsoft YaHei" pitchFamily="34" charset="-122"/>
+                <a:latin typeface="微软雅黑" panose="020B0503020204020204" charset="-122"/>
+                <a:ea typeface="微软雅黑" panose="020B0503020204020204" charset="-122"/>
               </a:rPr>
             </a:br>
             <a:r>
               <a:rPr lang="zh-CN" altLang="en-US" sz="2200" dirty="0" smtClean="0">
-                <a:latin typeface="Microsoft YaHei" pitchFamily="34" charset="-122"/>
-                <a:ea typeface="Microsoft YaHei" pitchFamily="34" charset="-122"/>
+                <a:latin typeface="微软雅黑" panose="020B0503020204020204" charset="-122"/>
+                <a:ea typeface="微软雅黑" panose="020B0503020204020204" charset="-122"/>
               </a:rPr>
               <a:t>乱石崩云，惊涛裂岸，卷起千堆雪。</a:t>
             </a:r>
             <a:br>
               <a:rPr lang="zh-CN" altLang="en-US" sz="2200" dirty="0" smtClean="0">
-                <a:latin typeface="Microsoft YaHei" pitchFamily="34" charset="-122"/>
-                <a:ea typeface="Microsoft YaHei" pitchFamily="34" charset="-122"/>
+                <a:latin typeface="微软雅黑" panose="020B0503020204020204" charset="-122"/>
+                <a:ea typeface="微软雅黑" panose="020B0503020204020204" charset="-122"/>
               </a:rPr>
             </a:br>
             <a:r>
               <a:rPr lang="zh-CN" altLang="en-US" sz="2200" dirty="0" smtClean="0">
-                <a:latin typeface="Microsoft YaHei" pitchFamily="34" charset="-122"/>
-                <a:ea typeface="Microsoft YaHei" pitchFamily="34" charset="-122"/>
+                <a:latin typeface="微软雅黑" panose="020B0503020204020204" charset="-122"/>
+                <a:ea typeface="微软雅黑" panose="020B0503020204020204" charset="-122"/>
               </a:rPr>
               <a:t>江山如画，一时多少豪杰。</a:t>
             </a:r>
             <a:br>
               <a:rPr lang="zh-CN" altLang="en-US" sz="2200" dirty="0" smtClean="0">
-                <a:latin typeface="Microsoft YaHei" pitchFamily="34" charset="-122"/>
-                <a:ea typeface="Microsoft YaHei" pitchFamily="34" charset="-122"/>
+                <a:latin typeface="微软雅黑" panose="020B0503020204020204" charset="-122"/>
+                <a:ea typeface="微软雅黑" panose="020B0503020204020204" charset="-122"/>
               </a:rPr>
             </a:br>
-            <a:r>
-              <a:rPr lang="zh-CN" altLang="en-US" sz="2200" dirty="0" smtClean="0">
-                <a:latin typeface="Microsoft YaHei" pitchFamily="34" charset="-122"/>
-                <a:ea typeface="Microsoft YaHei" pitchFamily="34" charset="-122"/>
-              </a:rPr>
-              <a:t/>
-            </a:r>
             <a:br>
               <a:rPr lang="zh-CN" altLang="en-US" sz="2200" dirty="0" smtClean="0">
-                <a:latin typeface="Microsoft YaHei" pitchFamily="34" charset="-122"/>
-                <a:ea typeface="Microsoft YaHei" pitchFamily="34" charset="-122"/>
+                <a:latin typeface="微软雅黑" panose="020B0503020204020204" charset="-122"/>
+                <a:ea typeface="微软雅黑" panose="020B0503020204020204" charset="-122"/>
               </a:rPr>
             </a:br>
             <a:r>
               <a:rPr lang="zh-CN" altLang="en-US" sz="2200" dirty="0" smtClean="0">
-                <a:latin typeface="Microsoft YaHei" pitchFamily="34" charset="-122"/>
-                <a:ea typeface="Microsoft YaHei" pitchFamily="34" charset="-122"/>
+                <a:latin typeface="微软雅黑" panose="020B0503020204020204" charset="-122"/>
+                <a:ea typeface="微软雅黑" panose="020B0503020204020204" charset="-122"/>
               </a:rPr>
               <a:t>遥想公谨当年，小乔初嫁了。</a:t>
             </a:r>
             <a:br>
               <a:rPr lang="zh-CN" altLang="en-US" sz="2200" dirty="0" smtClean="0">
-                <a:latin typeface="Microsoft YaHei" pitchFamily="34" charset="-122"/>
-                <a:ea typeface="Microsoft YaHei" pitchFamily="34" charset="-122"/>
+                <a:latin typeface="微软雅黑" panose="020B0503020204020204" charset="-122"/>
+                <a:ea typeface="微软雅黑" panose="020B0503020204020204" charset="-122"/>
               </a:rPr>
             </a:br>
             <a:r>
               <a:rPr lang="zh-CN" altLang="en-US" sz="2200" dirty="0" smtClean="0">
-                <a:latin typeface="Microsoft YaHei" pitchFamily="34" charset="-122"/>
-                <a:ea typeface="Microsoft YaHei" pitchFamily="34" charset="-122"/>
+                <a:latin typeface="微软雅黑" panose="020B0503020204020204" charset="-122"/>
+                <a:ea typeface="微软雅黑" panose="020B0503020204020204" charset="-122"/>
               </a:rPr>
               <a:t>羽扇纶巾，谈笑间，樯橹灰飞烟灭。</a:t>
             </a:r>
             <a:br>
               <a:rPr lang="zh-CN" altLang="en-US" sz="2200" dirty="0" smtClean="0">
-                <a:latin typeface="Microsoft YaHei" pitchFamily="34" charset="-122"/>
-                <a:ea typeface="Microsoft YaHei" pitchFamily="34" charset="-122"/>
+                <a:latin typeface="微软雅黑" panose="020B0503020204020204" charset="-122"/>
+                <a:ea typeface="微软雅黑" panose="020B0503020204020204" charset="-122"/>
               </a:rPr>
             </a:br>
             <a:r>
               <a:rPr lang="zh-CN" altLang="en-US" sz="2200" dirty="0" smtClean="0">
-                <a:latin typeface="Microsoft YaHei" pitchFamily="34" charset="-122"/>
-                <a:ea typeface="Microsoft YaHei" pitchFamily="34" charset="-122"/>
+                <a:latin typeface="微软雅黑" panose="020B0503020204020204" charset="-122"/>
+                <a:ea typeface="微软雅黑" panose="020B0503020204020204" charset="-122"/>
               </a:rPr>
               <a:t>故国神游，多情应笑我，早生华发。</a:t>
             </a:r>
             <a:br>
               <a:rPr lang="zh-CN" altLang="en-US" sz="2200" dirty="0" smtClean="0">
-                <a:latin typeface="Microsoft YaHei" pitchFamily="34" charset="-122"/>
-                <a:ea typeface="Microsoft YaHei" pitchFamily="34" charset="-122"/>
+                <a:latin typeface="微软雅黑" panose="020B0503020204020204" charset="-122"/>
+                <a:ea typeface="微软雅黑" panose="020B0503020204020204" charset="-122"/>
               </a:rPr>
             </a:br>
             <a:r>
               <a:rPr lang="zh-CN" altLang="en-US" sz="2200" dirty="0" smtClean="0">
-                <a:latin typeface="Microsoft YaHei" pitchFamily="34" charset="-122"/>
-                <a:ea typeface="Microsoft YaHei" pitchFamily="34" charset="-122"/>
+                <a:latin typeface="微软雅黑" panose="020B0503020204020204" charset="-122"/>
+                <a:ea typeface="微软雅黑" panose="020B0503020204020204" charset="-122"/>
               </a:rPr>
               <a:t>人生如梦，一樽还酹江月。</a:t>
             </a:r>
             <a:endParaRPr lang="en-US" altLang="zh-CN" sz="2200" dirty="0" smtClean="0">
-              <a:latin typeface="Microsoft YaHei" pitchFamily="34" charset="-122"/>
-              <a:ea typeface="Microsoft YaHei" pitchFamily="34" charset="-122"/>
+              <a:latin typeface="微软雅黑" panose="020B0503020204020204" charset="-122"/>
+              <a:ea typeface="微软雅黑" panose="020B0503020204020204" charset="-122"/>
             </a:endParaRPr>
           </a:p>
           <a:p>
@@ -13011,6 +12939,7 @@
               <a:rPr lang="en-US" altLang="zh-CN" sz="2200" dirty="0" smtClean="0"/>
               <a:t>-----------------</a:t>
             </a:r>
+            <a:endParaRPr lang="en-US" altLang="zh-CN" sz="2200" dirty="0" smtClean="0"/>
           </a:p>
           <a:p>
             <a:pPr>
@@ -13030,6 +12959,7 @@
               <a:rPr lang="en-US" altLang="zh-CN" sz="2200" dirty="0" smtClean="0"/>
               <a:t>-----------------</a:t>
             </a:r>
+            <a:endParaRPr lang="en-US" altLang="zh-CN" sz="2200" dirty="0" smtClean="0"/>
           </a:p>
           <a:p>
             <a:pPr>
@@ -13462,187 +13392,188 @@
               <a:rPr lang="en-US" altLang="zh-CN" dirty="0" smtClean="0"/>
               <a:t>Which role is corresponding to software engineer?</a:t>
             </a:r>
+            <a:endParaRPr lang="en-US" altLang="zh-CN" dirty="0" smtClean="0"/>
           </a:p>
           <a:p>
             <a:pPr lvl="1"/>
             <a:r>
               <a:rPr lang="zh-CN" altLang="en-US" dirty="0" smtClean="0">
-                <a:latin typeface="Microsoft YaHei" pitchFamily="34" charset="-122"/>
-                <a:ea typeface="Microsoft YaHei" pitchFamily="34" charset="-122"/>
+                <a:latin typeface="微软雅黑" panose="020B0503020204020204" charset="-122"/>
+                <a:ea typeface="微软雅黑" panose="020B0503020204020204" charset="-122"/>
               </a:rPr>
               <a:t>房地产老板</a:t>
             </a:r>
             <a:endParaRPr lang="en-US" altLang="zh-CN" dirty="0" smtClean="0">
-              <a:latin typeface="Microsoft YaHei" pitchFamily="34" charset="-122"/>
-              <a:ea typeface="Microsoft YaHei" pitchFamily="34" charset="-122"/>
+              <a:latin typeface="微软雅黑" panose="020B0503020204020204" charset="-122"/>
+              <a:ea typeface="微软雅黑" panose="020B0503020204020204" charset="-122"/>
             </a:endParaRPr>
           </a:p>
           <a:p>
             <a:pPr lvl="2"/>
             <a:r>
               <a:rPr lang="zh-CN" altLang="en-US" dirty="0" smtClean="0">
-                <a:latin typeface="Microsoft YaHei" pitchFamily="34" charset="-122"/>
-                <a:ea typeface="Microsoft YaHei" pitchFamily="34" charset="-122"/>
+                <a:latin typeface="微软雅黑" panose="020B0503020204020204" charset="-122"/>
+                <a:ea typeface="微软雅黑" panose="020B0503020204020204" charset="-122"/>
               </a:rPr>
               <a:t>投标，买地</a:t>
             </a:r>
             <a:endParaRPr lang="en-US" altLang="zh-CN" dirty="0" smtClean="0">
-              <a:latin typeface="Microsoft YaHei" pitchFamily="34" charset="-122"/>
-              <a:ea typeface="Microsoft YaHei" pitchFamily="34" charset="-122"/>
+              <a:latin typeface="微软雅黑" panose="020B0503020204020204" charset="-122"/>
+              <a:ea typeface="微软雅黑" panose="020B0503020204020204" charset="-122"/>
             </a:endParaRPr>
           </a:p>
           <a:p>
             <a:pPr lvl="1"/>
             <a:r>
               <a:rPr lang="zh-CN" altLang="en-US" dirty="0" smtClean="0">
-                <a:latin typeface="Microsoft YaHei" pitchFamily="34" charset="-122"/>
-                <a:ea typeface="Microsoft YaHei" pitchFamily="34" charset="-122"/>
+                <a:latin typeface="微软雅黑" panose="020B0503020204020204" charset="-122"/>
+                <a:ea typeface="微软雅黑" panose="020B0503020204020204" charset="-122"/>
               </a:rPr>
               <a:t>建筑设计师</a:t>
             </a:r>
             <a:endParaRPr lang="en-US" altLang="zh-CN" dirty="0" smtClean="0">
-              <a:latin typeface="Microsoft YaHei" pitchFamily="34" charset="-122"/>
-              <a:ea typeface="Microsoft YaHei" pitchFamily="34" charset="-122"/>
+              <a:latin typeface="微软雅黑" panose="020B0503020204020204" charset="-122"/>
+              <a:ea typeface="微软雅黑" panose="020B0503020204020204" charset="-122"/>
             </a:endParaRPr>
           </a:p>
           <a:p>
             <a:pPr lvl="2"/>
             <a:r>
               <a:rPr lang="zh-CN" altLang="en-US" dirty="0" smtClean="0">
-                <a:latin typeface="Microsoft YaHei" pitchFamily="34" charset="-122"/>
-                <a:ea typeface="Microsoft YaHei" pitchFamily="34" charset="-122"/>
+                <a:latin typeface="微软雅黑" panose="020B0503020204020204" charset="-122"/>
+                <a:ea typeface="微软雅黑" panose="020B0503020204020204" charset="-122"/>
               </a:rPr>
               <a:t>设计建筑</a:t>
             </a:r>
             <a:endParaRPr lang="en-US" altLang="zh-CN" dirty="0" smtClean="0">
-              <a:latin typeface="Microsoft YaHei" pitchFamily="34" charset="-122"/>
-              <a:ea typeface="Microsoft YaHei" pitchFamily="34" charset="-122"/>
+              <a:latin typeface="微软雅黑" panose="020B0503020204020204" charset="-122"/>
+              <a:ea typeface="微软雅黑" panose="020B0503020204020204" charset="-122"/>
             </a:endParaRPr>
           </a:p>
           <a:p>
             <a:pPr lvl="1"/>
             <a:r>
               <a:rPr lang="zh-CN" altLang="en-US" dirty="0" smtClean="0">
-                <a:latin typeface="Microsoft YaHei" pitchFamily="34" charset="-122"/>
-                <a:ea typeface="Microsoft YaHei" pitchFamily="34" charset="-122"/>
+                <a:latin typeface="微软雅黑" panose="020B0503020204020204" charset="-122"/>
+                <a:ea typeface="微软雅黑" panose="020B0503020204020204" charset="-122"/>
               </a:rPr>
               <a:t>土木工程师</a:t>
             </a:r>
             <a:endParaRPr lang="en-US" altLang="zh-CN" dirty="0" smtClean="0">
-              <a:latin typeface="Microsoft YaHei" pitchFamily="34" charset="-122"/>
-              <a:ea typeface="Microsoft YaHei" pitchFamily="34" charset="-122"/>
+              <a:latin typeface="微软雅黑" panose="020B0503020204020204" charset="-122"/>
+              <a:ea typeface="微软雅黑" panose="020B0503020204020204" charset="-122"/>
             </a:endParaRPr>
           </a:p>
           <a:p>
             <a:pPr lvl="2"/>
             <a:r>
               <a:rPr lang="zh-CN" altLang="en-US" dirty="0" smtClean="0">
-                <a:latin typeface="Microsoft YaHei" pitchFamily="34" charset="-122"/>
-                <a:ea typeface="Microsoft YaHei" pitchFamily="34" charset="-122"/>
+                <a:latin typeface="微软雅黑" panose="020B0503020204020204" charset="-122"/>
+                <a:ea typeface="微软雅黑" panose="020B0503020204020204" charset="-122"/>
               </a:rPr>
               <a:t>设计土木结构</a:t>
             </a:r>
             <a:endParaRPr lang="en-US" altLang="zh-CN" dirty="0" smtClean="0">
-              <a:latin typeface="Microsoft YaHei" pitchFamily="34" charset="-122"/>
-              <a:ea typeface="Microsoft YaHei" pitchFamily="34" charset="-122"/>
+              <a:latin typeface="微软雅黑" panose="020B0503020204020204" charset="-122"/>
+              <a:ea typeface="微软雅黑" panose="020B0503020204020204" charset="-122"/>
             </a:endParaRPr>
           </a:p>
           <a:p>
             <a:pPr lvl="1"/>
             <a:r>
               <a:rPr lang="zh-CN" altLang="en-US" dirty="0" smtClean="0">
-                <a:latin typeface="Microsoft YaHei" pitchFamily="34" charset="-122"/>
-                <a:ea typeface="Microsoft YaHei" pitchFamily="34" charset="-122"/>
+                <a:latin typeface="微软雅黑" panose="020B0503020204020204" charset="-122"/>
+                <a:ea typeface="微软雅黑" panose="020B0503020204020204" charset="-122"/>
               </a:rPr>
               <a:t>建筑工人</a:t>
             </a:r>
             <a:endParaRPr lang="en-US" altLang="zh-CN" dirty="0" smtClean="0">
-              <a:latin typeface="Microsoft YaHei" pitchFamily="34" charset="-122"/>
-              <a:ea typeface="Microsoft YaHei" pitchFamily="34" charset="-122"/>
+              <a:latin typeface="微软雅黑" panose="020B0503020204020204" charset="-122"/>
+              <a:ea typeface="微软雅黑" panose="020B0503020204020204" charset="-122"/>
             </a:endParaRPr>
           </a:p>
           <a:p>
             <a:pPr lvl="2"/>
             <a:r>
               <a:rPr lang="zh-CN" altLang="en-US" dirty="0" smtClean="0">
-                <a:latin typeface="Microsoft YaHei" pitchFamily="34" charset="-122"/>
-                <a:ea typeface="Microsoft YaHei" pitchFamily="34" charset="-122"/>
+                <a:latin typeface="微软雅黑" panose="020B0503020204020204" charset="-122"/>
+                <a:ea typeface="微软雅黑" panose="020B0503020204020204" charset="-122"/>
               </a:rPr>
               <a:t>具体建设</a:t>
             </a:r>
             <a:endParaRPr lang="en-US" altLang="zh-CN" dirty="0" smtClean="0">
-              <a:latin typeface="Microsoft YaHei" pitchFamily="34" charset="-122"/>
-              <a:ea typeface="Microsoft YaHei" pitchFamily="34" charset="-122"/>
+              <a:latin typeface="微软雅黑" panose="020B0503020204020204" charset="-122"/>
+              <a:ea typeface="微软雅黑" panose="020B0503020204020204" charset="-122"/>
             </a:endParaRPr>
           </a:p>
           <a:p>
             <a:pPr lvl="1"/>
             <a:r>
               <a:rPr lang="zh-CN" altLang="en-US" dirty="0" smtClean="0">
-                <a:latin typeface="Microsoft YaHei" pitchFamily="34" charset="-122"/>
-                <a:ea typeface="Microsoft YaHei" pitchFamily="34" charset="-122"/>
+                <a:latin typeface="微软雅黑" panose="020B0503020204020204" charset="-122"/>
+                <a:ea typeface="微软雅黑" panose="020B0503020204020204" charset="-122"/>
               </a:rPr>
               <a:t>工程监理</a:t>
             </a:r>
             <a:endParaRPr lang="en-US" altLang="zh-CN" dirty="0" smtClean="0">
-              <a:latin typeface="Microsoft YaHei" pitchFamily="34" charset="-122"/>
-              <a:ea typeface="Microsoft YaHei" pitchFamily="34" charset="-122"/>
+              <a:latin typeface="微软雅黑" panose="020B0503020204020204" charset="-122"/>
+              <a:ea typeface="微软雅黑" panose="020B0503020204020204" charset="-122"/>
             </a:endParaRPr>
           </a:p>
           <a:p>
             <a:pPr lvl="2"/>
             <a:r>
               <a:rPr lang="zh-CN" altLang="en-US" dirty="0" smtClean="0">
-                <a:latin typeface="Microsoft YaHei" pitchFamily="34" charset="-122"/>
-                <a:ea typeface="Microsoft YaHei" pitchFamily="34" charset="-122"/>
+                <a:latin typeface="微软雅黑" panose="020B0503020204020204" charset="-122"/>
+                <a:ea typeface="微软雅黑" panose="020B0503020204020204" charset="-122"/>
               </a:rPr>
               <a:t>监管质量</a:t>
             </a:r>
             <a:endParaRPr lang="en-US" altLang="zh-CN" dirty="0" smtClean="0">
-              <a:latin typeface="Microsoft YaHei" pitchFamily="34" charset="-122"/>
-              <a:ea typeface="Microsoft YaHei" pitchFamily="34" charset="-122"/>
+              <a:latin typeface="微软雅黑" panose="020B0503020204020204" charset="-122"/>
+              <a:ea typeface="微软雅黑" panose="020B0503020204020204" charset="-122"/>
             </a:endParaRPr>
           </a:p>
           <a:p>
             <a:pPr lvl="1"/>
             <a:r>
               <a:rPr lang="zh-CN" altLang="en-US" dirty="0" smtClean="0">
-                <a:latin typeface="Microsoft YaHei" pitchFamily="34" charset="-122"/>
-                <a:ea typeface="Microsoft YaHei" pitchFamily="34" charset="-122"/>
+                <a:latin typeface="微软雅黑" panose="020B0503020204020204" charset="-122"/>
+                <a:ea typeface="微软雅黑" panose="020B0503020204020204" charset="-122"/>
               </a:rPr>
               <a:t>装修工人</a:t>
             </a:r>
             <a:endParaRPr lang="en-US" altLang="zh-CN" dirty="0" smtClean="0">
-              <a:latin typeface="Microsoft YaHei" pitchFamily="34" charset="-122"/>
-              <a:ea typeface="Microsoft YaHei" pitchFamily="34" charset="-122"/>
+              <a:latin typeface="微软雅黑" panose="020B0503020204020204" charset="-122"/>
+              <a:ea typeface="微软雅黑" panose="020B0503020204020204" charset="-122"/>
             </a:endParaRPr>
           </a:p>
           <a:p>
             <a:pPr lvl="1"/>
             <a:r>
               <a:rPr lang="zh-CN" altLang="en-US" dirty="0" smtClean="0">
-                <a:latin typeface="Microsoft YaHei" pitchFamily="34" charset="-122"/>
-                <a:ea typeface="Microsoft YaHei" pitchFamily="34" charset="-122"/>
+                <a:latin typeface="微软雅黑" panose="020B0503020204020204" charset="-122"/>
+                <a:ea typeface="微软雅黑" panose="020B0503020204020204" charset="-122"/>
               </a:rPr>
               <a:t>楼房销售</a:t>
             </a:r>
             <a:endParaRPr lang="en-US" altLang="zh-CN" dirty="0" smtClean="0">
-              <a:latin typeface="Microsoft YaHei" pitchFamily="34" charset="-122"/>
-              <a:ea typeface="Microsoft YaHei" pitchFamily="34" charset="-122"/>
+              <a:latin typeface="微软雅黑" panose="020B0503020204020204" charset="-122"/>
+              <a:ea typeface="微软雅黑" panose="020B0503020204020204" charset="-122"/>
             </a:endParaRPr>
           </a:p>
           <a:p>
             <a:pPr lvl="1"/>
             <a:r>
               <a:rPr lang="zh-CN" altLang="en-US" dirty="0" smtClean="0">
-                <a:latin typeface="Microsoft YaHei" pitchFamily="34" charset="-122"/>
-                <a:ea typeface="Microsoft YaHei" pitchFamily="34" charset="-122"/>
+                <a:latin typeface="微软雅黑" panose="020B0503020204020204" charset="-122"/>
+                <a:ea typeface="微软雅黑" panose="020B0503020204020204" charset="-122"/>
               </a:rPr>
               <a:t>楼房中介</a:t>
             </a:r>
             <a:endParaRPr lang="en-US" altLang="zh-CN" dirty="0" smtClean="0">
-              <a:latin typeface="Microsoft YaHei" pitchFamily="34" charset="-122"/>
-              <a:ea typeface="Microsoft YaHei" pitchFamily="34" charset="-122"/>
+              <a:latin typeface="微软雅黑" panose="020B0503020204020204" charset="-122"/>
+              <a:ea typeface="微软雅黑" panose="020B0503020204020204" charset="-122"/>
             </a:endParaRPr>
           </a:p>
           <a:p>
@@ -13651,8 +13582,8 @@
               <a:t>Should software engineering include elements of art?</a:t>
             </a:r>
             <a:endParaRPr lang="en-US" altLang="zh-CN" dirty="0" smtClean="0">
-              <a:latin typeface="Microsoft YaHei" pitchFamily="34" charset="-122"/>
-              <a:ea typeface="Microsoft YaHei" pitchFamily="34" charset="-122"/>
+              <a:latin typeface="微软雅黑" panose="020B0503020204020204" charset="-122"/>
+              <a:ea typeface="微软雅黑" panose="020B0503020204020204" charset="-122"/>
             </a:endParaRPr>
           </a:p>
         </p:txBody>
@@ -13734,6 +13665,7 @@
               <a:rPr lang="en-US" altLang="zh-CN" dirty="0"/>
               <a:t> </a:t>
             </a:r>
+            <a:endParaRPr lang="en-US" altLang="zh-CN" dirty="0"/>
           </a:p>
           <a:p>
             <a:r>
@@ -14909,18 +14841,21 @@
               <a:rPr lang="en-US" sz="1800" dirty="0" smtClean="0"/>
               <a:t> </a:t>
             </a:r>
+            <a:endParaRPr lang="en-US" sz="1800" dirty="0" smtClean="0"/>
           </a:p>
           <a:p>
             <a:r>
               <a:rPr lang="en-US" sz="2000" dirty="0" smtClean="0"/>
               <a:t>How does TPP guide engineer in:</a:t>
             </a:r>
+            <a:endParaRPr lang="en-US" sz="2000" dirty="0" smtClean="0"/>
           </a:p>
           <a:p>
             <a:r>
               <a:rPr lang="en-US" sz="2000" dirty="0" smtClean="0"/>
               <a:t>Planning</a:t>
             </a:r>
+            <a:endParaRPr lang="en-US" sz="2000" dirty="0" smtClean="0"/>
           </a:p>
           <a:p>
             <a:r>
@@ -14931,6 +14866,7 @@
               <a:rPr lang="en-US" sz="2000" dirty="0" smtClean="0"/>
               <a:t>evelopment </a:t>
             </a:r>
+            <a:endParaRPr lang="en-US" sz="2000" dirty="0" smtClean="0"/>
           </a:p>
           <a:p>
             <a:pPr lvl="1"/>
@@ -14942,34 +14878,37 @@
               <a:rPr lang="en-US" sz="1800" dirty="0" smtClean="0"/>
               <a:t>esign, </a:t>
             </a:r>
-          </a:p>
-          <a:p>
-            <a:pPr marL="887412" lvl="3" indent="-255588">
+            <a:endParaRPr lang="en-US" sz="1800" dirty="0" smtClean="0"/>
+          </a:p>
+          <a:p>
+            <a:pPr marL="887095" lvl="3" indent="-255905">
               <a:spcBef>
                 <a:spcPts val="400"/>
               </a:spcBef>
               <a:buSzPct val="68000"/>
-              <a:buFont typeface="Wingdings 3" pitchFamily="18" charset="2"/>
+              <a:buFont typeface="Wingdings 3" panose="05040102010807070707" pitchFamily="18" charset="2"/>
               <a:buChar char=""/>
             </a:pPr>
             <a:r>
               <a:rPr lang="en-US" dirty="0" smtClean="0"/>
               <a:t>design review and code review</a:t>
             </a:r>
-          </a:p>
-          <a:p>
-            <a:pPr marL="887412" lvl="3" indent="-255588">
+            <a:endParaRPr lang="en-US" dirty="0" smtClean="0"/>
+          </a:p>
+          <a:p>
+            <a:pPr marL="887095" lvl="3" indent="-255905">
               <a:spcBef>
                 <a:spcPts val="400"/>
               </a:spcBef>
               <a:buSzPct val="68000"/>
-              <a:buFont typeface="Wingdings 3" pitchFamily="18" charset="2"/>
+              <a:buFont typeface="Wingdings 3" panose="05040102010807070707" pitchFamily="18" charset="2"/>
               <a:buChar char=""/>
             </a:pPr>
             <a:r>
               <a:rPr lang="en-US" dirty="0" smtClean="0"/>
               <a:t>coding standard</a:t>
             </a:r>
+            <a:endParaRPr lang="en-US" dirty="0" smtClean="0"/>
           </a:p>
           <a:p>
             <a:pPr lvl="1"/>
@@ -14977,6 +14916,7 @@
               <a:rPr lang="en-US" sz="1800" dirty="0" smtClean="0"/>
               <a:t>Coding</a:t>
             </a:r>
+            <a:endParaRPr lang="en-US" sz="1800" dirty="0" smtClean="0"/>
           </a:p>
           <a:p>
             <a:pPr lvl="2"/>
@@ -14996,6 +14936,7 @@
               <a:rPr lang="en-US" sz="1800" dirty="0" smtClean="0"/>
               <a:t>est </a:t>
             </a:r>
+            <a:endParaRPr lang="en-US" sz="1800" dirty="0" smtClean="0"/>
           </a:p>
           <a:p>
             <a:r>
@@ -15006,6 +14947,7 @@
               <a:rPr lang="en-US" sz="2000" dirty="0" smtClean="0"/>
               <a:t>ostmortem</a:t>
             </a:r>
+            <a:endParaRPr lang="en-US" sz="2000" dirty="0" smtClean="0"/>
           </a:p>
         </p:txBody>
       </p:sp>
@@ -15018,7 +14960,7 @@
           <p:nvPr/>
         </p:nvPicPr>
         <p:blipFill>
-          <a:blip r:embed="rId2">
+          <a:blip r:embed="rId1">
             <a:extLst>
               <a:ext uri="{28A0092B-C50C-407E-A947-70E740481C1C}">
                 <a14:useLocalDpi xmlns:a14="http://schemas.microsoft.com/office/drawing/2010/main" val="0"/>
@@ -15149,12 +15091,14 @@
               <a:rPr lang="en-US" dirty="0" smtClean="0"/>
               <a:t>Estimation – consider 2 developers</a:t>
             </a:r>
+            <a:endParaRPr lang="en-US" dirty="0" smtClean="0"/>
           </a:p>
           <a:p>
             <a:r>
               <a:rPr lang="en-US" dirty="0" smtClean="0"/>
               <a:t>Al improves his task finish time from 10 days to 7 days; Bob improves it from 10 days to 8 days.  Is Al better?</a:t>
             </a:r>
+            <a:endParaRPr lang="en-US" dirty="0" smtClean="0"/>
           </a:p>
           <a:p>
             <a:pPr>
@@ -15176,13 +15120,7 @@
           <p:cNvGraphicFramePr>
             <a:graphicFrameLocks noGrp="1"/>
           </p:cNvGraphicFramePr>
-          <p:nvPr>
-            <p:extLst>
-              <p:ext uri="{D42A27DB-BD31-4B8C-83A1-F6EECF244321}">
-                <p14:modId xmlns:p14="http://schemas.microsoft.com/office/powerpoint/2010/main" val="746464362"/>
-              </p:ext>
-            </p:extLst>
-          </p:nvPr>
+          <p:nvPr/>
         </p:nvGraphicFramePr>
         <p:xfrm>
           <a:off x="990600" y="3997180"/>
@@ -15195,41 +15133,11 @@
                 <a:tableStyleId>{5C22544A-7EE6-4342-B048-85BDC9FD1C3A}</a:tableStyleId>
               </a:tblPr>
               <a:tblGrid>
-                <a:gridCol w="1417320">
-                  <a:extLst>
-                    <a:ext uri="{9D8B030D-6E8A-4147-A177-3AD203B41FA5}">
-                      <a16:colId xmlns:a16="http://schemas.microsoft.com/office/drawing/2014/main" val="20000"/>
-                    </a:ext>
-                  </a:extLst>
-                </a:gridCol>
-                <a:gridCol w="1417320">
-                  <a:extLst>
-                    <a:ext uri="{9D8B030D-6E8A-4147-A177-3AD203B41FA5}">
-                      <a16:colId xmlns:a16="http://schemas.microsoft.com/office/drawing/2014/main" val="20001"/>
-                    </a:ext>
-                  </a:extLst>
-                </a:gridCol>
-                <a:gridCol w="1417320">
-                  <a:extLst>
-                    <a:ext uri="{9D8B030D-6E8A-4147-A177-3AD203B41FA5}">
-                      <a16:colId xmlns:a16="http://schemas.microsoft.com/office/drawing/2014/main" val="20002"/>
-                    </a:ext>
-                  </a:extLst>
-                </a:gridCol>
-                <a:gridCol w="1417320">
-                  <a:extLst>
-                    <a:ext uri="{9D8B030D-6E8A-4147-A177-3AD203B41FA5}">
-                      <a16:colId xmlns:a16="http://schemas.microsoft.com/office/drawing/2014/main" val="20003"/>
-                    </a:ext>
-                  </a:extLst>
-                </a:gridCol>
-                <a:gridCol w="1417320">
-                  <a:extLst>
-                    <a:ext uri="{9D8B030D-6E8A-4147-A177-3AD203B41FA5}">
-                      <a16:colId xmlns:a16="http://schemas.microsoft.com/office/drawing/2014/main" val="20004"/>
-                    </a:ext>
-                  </a:extLst>
-                </a:gridCol>
+                <a:gridCol w="1417320"/>
+                <a:gridCol w="1417320"/>
+                <a:gridCol w="1417320"/>
+                <a:gridCol w="1417320"/>
+                <a:gridCol w="1417320"/>
               </a:tblGrid>
               <a:tr h="517381">
                 <a:tc>
@@ -15302,11 +15210,6 @@
                   </a:txBody>
                   <a:tcPr/>
                 </a:tc>
-                <a:extLst>
-                  <a:ext uri="{0D108BD9-81ED-4DB2-BD59-A6C34878D82A}">
-                    <a16:rowId xmlns:a16="http://schemas.microsoft.com/office/drawing/2014/main" val="10000"/>
-                  </a:ext>
-                </a:extLst>
               </a:tr>
               <a:tr h="513275">
                 <a:tc>
@@ -15395,11 +15298,6 @@
                   </a:txBody>
                   <a:tcPr/>
                 </a:tc>
-                <a:extLst>
-                  <a:ext uri="{0D108BD9-81ED-4DB2-BD59-A6C34878D82A}">
-                    <a16:rowId xmlns:a16="http://schemas.microsoft.com/office/drawing/2014/main" val="10001"/>
-                  </a:ext>
-                </a:extLst>
               </a:tr>
               <a:tr h="513275">
                 <a:tc>
@@ -15480,11 +15378,6 @@
                   </a:txBody>
                   <a:tcPr/>
                 </a:tc>
-                <a:extLst>
-                  <a:ext uri="{0D108BD9-81ED-4DB2-BD59-A6C34878D82A}">
-                    <a16:rowId xmlns:a16="http://schemas.microsoft.com/office/drawing/2014/main" val="10002"/>
-                  </a:ext>
-                </a:extLst>
               </a:tr>
               <a:tr h="513275">
                 <a:tc>
@@ -15545,11 +15438,6 @@
                   </a:txBody>
                   <a:tcPr/>
                 </a:tc>
-                <a:extLst>
-                  <a:ext uri="{0D108BD9-81ED-4DB2-BD59-A6C34878D82A}">
-                    <a16:rowId xmlns:a16="http://schemas.microsoft.com/office/drawing/2014/main" val="10003"/>
-                  </a:ext>
-                </a:extLst>
               </a:tr>
               <a:tr h="513275">
                 <a:tc>
@@ -15618,11 +15506,6 @@
                   </a:txBody>
                   <a:tcPr/>
                 </a:tc>
-                <a:extLst>
-                  <a:ext uri="{0D108BD9-81ED-4DB2-BD59-A6C34878D82A}">
-                    <a16:rowId xmlns:a16="http://schemas.microsoft.com/office/drawing/2014/main" val="10004"/>
-                  </a:ext>
-                </a:extLst>
               </a:tr>
             </a:tbl>
           </a:graphicData>
@@ -15902,13 +15785,14 @@
           <a:bodyPr/>
           <a:lstStyle/>
           <a:p>
-            <a:pPr marL="118872" indent="0">
+            <a:pPr marL="118745" indent="0">
               <a:buNone/>
             </a:pPr>
             <a:r>
               <a:rPr lang="en-US" i="1" dirty="0" smtClean="0"/>
               <a:t>Standard deviation is key to the quality of service, and key to build trust.   </a:t>
             </a:r>
+            <a:endParaRPr lang="en-US" i="1" dirty="0" smtClean="0"/>
           </a:p>
           <a:p>
             <a:pPr marL="274320" lvl="1" indent="0">
@@ -15918,12 +15802,14 @@
               <a:rPr lang="en-US" altLang="zh-CN" dirty="0" smtClean="0"/>
               <a:t>		- Jack Welch</a:t>
             </a:r>
+            <a:endParaRPr lang="en-US" altLang="zh-CN" dirty="0" smtClean="0"/>
           </a:p>
           <a:p>
             <a:r>
               <a:rPr lang="en-US" altLang="zh-CN" dirty="0" smtClean="0"/>
               <a:t>Estimation/Promise  vs.  Delivery</a:t>
             </a:r>
+            <a:endParaRPr lang="en-US" altLang="zh-CN" dirty="0" smtClean="0"/>
           </a:p>
           <a:p>
             <a:r>
@@ -16016,12 +15902,14 @@
               <a:rPr lang="en-US" dirty="0" smtClean="0"/>
               <a:t>When can you claim you have the skill?</a:t>
             </a:r>
+            <a:endParaRPr lang="en-US" dirty="0" smtClean="0"/>
           </a:p>
           <a:p>
             <a:r>
               <a:rPr lang="en-US" dirty="0" smtClean="0"/>
               <a:t>What’s the opposite of skill?</a:t>
             </a:r>
+            <a:endParaRPr lang="en-US" dirty="0" smtClean="0"/>
           </a:p>
           <a:p>
             <a:pPr lvl="1"/>
@@ -16029,6 +15917,7 @@
               <a:rPr lang="en-US" dirty="0" smtClean="0"/>
               <a:t>Unskilled?</a:t>
             </a:r>
+            <a:endParaRPr lang="en-US" dirty="0" smtClean="0"/>
           </a:p>
           <a:p>
             <a:pPr lvl="1"/>
@@ -16036,6 +15925,7 @@
               <a:rPr lang="en-US" dirty="0" smtClean="0"/>
               <a:t>“problem solving”</a:t>
             </a:r>
+            <a:endParaRPr lang="en-US" dirty="0" smtClean="0"/>
           </a:p>
           <a:p>
             <a:endParaRPr lang="en-US" dirty="0"/>
@@ -16043,13 +15933,13 @@
           <a:p>
             <a:r>
               <a:rPr lang="en-US" dirty="0">
-                <a:hlinkClick r:id="rId2"/>
+                <a:hlinkClick r:id="rId1"/>
               </a:rPr>
               <a:t>http://</a:t>
             </a:r>
             <a:r>
               <a:rPr lang="en-US" dirty="0" smtClean="0">
-                <a:hlinkClick r:id="rId2"/>
+                <a:hlinkClick r:id="rId1"/>
               </a:rPr>
               <a:t>www.billbuxton.com/xc.html</a:t>
             </a:r>
@@ -16063,6 +15953,7 @@
               <a:rPr lang="en-US" dirty="0" smtClean="0"/>
               <a:t>Quality vs. Quantity</a:t>
             </a:r>
+            <a:endParaRPr lang="en-US" dirty="0" smtClean="0"/>
           </a:p>
           <a:p>
             <a:pPr lvl="1"/>
@@ -16070,6 +15961,7 @@
               <a:rPr lang="en-US" dirty="0" smtClean="0"/>
               <a:t>Story of making pottery,  the “quantity group” vs. “quality group”</a:t>
             </a:r>
+            <a:endParaRPr lang="en-US" dirty="0" smtClean="0"/>
           </a:p>
           <a:p>
             <a:endParaRPr lang="en-US" dirty="0"/>
@@ -16077,11 +15969,6 @@
         </p:txBody>
       </p:sp>
     </p:spTree>
-    <p:extLst>
-      <p:ext uri="{BB962C8B-B14F-4D97-AF65-F5344CB8AC3E}">
-        <p14:creationId xmlns:p14="http://schemas.microsoft.com/office/powerpoint/2010/main" val="3589889823"/>
-      </p:ext>
-    </p:extLst>
   </p:cSld>
   <p:clrMapOvr>
     <a:masterClrMapping/>
@@ -16147,7 +16034,7 @@
           </p:nvPr>
         </p:nvPicPr>
         <p:blipFill>
-          <a:blip r:embed="rId2"/>
+          <a:blip r:embed="rId1"/>
           <a:stretch>
             <a:fillRect/>
           </a:stretch>
@@ -16163,11 +16050,6 @@
         </p:spPr>
       </p:pic>
     </p:spTree>
-    <p:extLst>
-      <p:ext uri="{BB962C8B-B14F-4D97-AF65-F5344CB8AC3E}">
-        <p14:creationId xmlns:p14="http://schemas.microsoft.com/office/powerpoint/2010/main" val="795476574"/>
-      </p:ext>
-    </p:extLst>
   </p:cSld>
   <p:clrMapOvr>
     <a:masterClrMapping/>
@@ -16233,14 +16115,14 @@
           </a:bodyPr>
           <a:lstStyle/>
           <a:p>
-            <a:pPr marL="4763" indent="-4763" eaLnBrk="1" fontAlgn="auto" hangingPunct="1">
+            <a:pPr marL="5080" indent="-5080" eaLnBrk="1" fontAlgn="auto" hangingPunct="1">
               <a:spcAft>
                 <a:spcPts val="0"/>
               </a:spcAft>
               <a:buClr>
                 <a:schemeClr val="accent3"/>
               </a:buClr>
-              <a:buFont typeface="Wingdings 2"/>
+              <a:buFont typeface="Wingdings 2" panose="05020102010507070707"/>
               <a:buNone/>
               <a:defRPr/>
             </a:pPr>
@@ -16266,7 +16148,7 @@
               <a:buClr>
                 <a:schemeClr val="accent3"/>
               </a:buClr>
-              <a:buFont typeface="Wingdings 2"/>
+              <a:buFont typeface="Wingdings 2" panose="05020102010507070707"/>
               <a:buNone/>
               <a:defRPr/>
             </a:pPr>
@@ -16274,6 +16156,7 @@
               <a:rPr lang="en-US" dirty="0" smtClean="0"/>
               <a:t>We have:</a:t>
             </a:r>
+            <a:endParaRPr lang="en-US" dirty="0" smtClean="0"/>
           </a:p>
           <a:p>
             <a:pPr>
@@ -16286,6 +16169,7 @@
               <a:rPr lang="en-US" dirty="0" smtClean="0"/>
               <a:t>Personal Software Process</a:t>
             </a:r>
+            <a:endParaRPr lang="en-US" dirty="0" smtClean="0"/>
           </a:p>
           <a:p>
             <a:pPr>
@@ -16329,7 +16213,7 @@
           <p:nvPr/>
         </p:nvPicPr>
         <p:blipFill>
-          <a:blip r:embed="rId2" cstate="print"/>
+          <a:blip r:embed="rId1" cstate="print"/>
           <a:srcRect/>
           <a:stretch>
             <a:fillRect/>
@@ -16355,7 +16239,7 @@
           <p:nvPr/>
         </p:nvPicPr>
         <p:blipFill>
-          <a:blip r:embed="rId3" cstate="print"/>
+          <a:blip r:embed="rId2" cstate="print"/>
           <a:srcRect/>
           <a:stretch>
             <a:fillRect/>
@@ -16857,6 +16741,7 @@
               <a:rPr lang="zh-CN" altLang="en-US" dirty="0"/>
               <a:t>给面试者一个各面打乱颜色的魔方； </a:t>
             </a:r>
+            <a:endParaRPr lang="zh-CN" altLang="en-US" dirty="0"/>
           </a:p>
           <a:p>
             <a:pPr lvl="1"/>
@@ -16868,6 +16753,7 @@
               <a:rPr lang="zh-CN" altLang="en-US" dirty="0"/>
               <a:t>要求他把六面还原； </a:t>
             </a:r>
+            <a:endParaRPr lang="zh-CN" altLang="en-US" dirty="0"/>
           </a:p>
           <a:p>
             <a:pPr lvl="1"/>
@@ -16925,11 +16811,6 @@
         </p:txBody>
       </p:sp>
     </p:spTree>
-    <p:extLst>
-      <p:ext uri="{BB962C8B-B14F-4D97-AF65-F5344CB8AC3E}">
-        <p14:creationId xmlns:p14="http://schemas.microsoft.com/office/powerpoint/2010/main" val="2293132687"/>
-      </p:ext>
-    </p:extLst>
   </p:cSld>
   <p:clrMapOvr>
     <a:masterClrMapping/>
@@ -17008,11 +16889,6 @@
         </p:txBody>
       </p:sp>
     </p:spTree>
-    <p:extLst>
-      <p:ext uri="{BB962C8B-B14F-4D97-AF65-F5344CB8AC3E}">
-        <p14:creationId xmlns:p14="http://schemas.microsoft.com/office/powerpoint/2010/main" val="3541253995"/>
-      </p:ext>
-    </p:extLst>
   </p:cSld>
   <p:clrMapOvr>
     <a:masterClrMapping/>
@@ -17102,6 +16978,7 @@
               <a:rPr lang="zh-CN" altLang="en-US" dirty="0"/>
               <a:t>软件工程课上的编程作业通常有三类： </a:t>
             </a:r>
+            <a:endParaRPr lang="zh-CN" altLang="en-US" dirty="0"/>
           </a:p>
           <a:p>
             <a:pPr lvl="1">
@@ -17121,6 +16998,7 @@
               <a:rPr lang="zh-CN" altLang="en-US" dirty="0"/>
               <a:t>语言的类的各种知识。这是学习编程语言的基础，不是软件工程作业。</a:t>
             </a:r>
+            <a:endParaRPr lang="zh-CN" altLang="en-US" dirty="0"/>
           </a:p>
           <a:p>
             <a:pPr lvl="1">
@@ -17132,6 +17010,7 @@
               <a:rPr lang="zh-CN" altLang="en-US" dirty="0"/>
               <a:t>练习某些算法或按某种模式处理数据， 例如：对输入数据进行排序处理，并输出。这是算法和数据结构的练习，不是软件工程作业。</a:t>
             </a:r>
+            <a:endParaRPr lang="zh-CN" altLang="en-US" dirty="0"/>
           </a:p>
           <a:p>
             <a:pPr lvl="1">
@@ -17143,6 +17022,7 @@
               <a:rPr lang="zh-CN" altLang="en-US" dirty="0"/>
               <a:t>按照给定的需求实现一个较复杂的软件系统，但没有要求系统进行大规模的测试、模拟、实际运行，或后续演化。全国大学生交上来的成千上万的“图书馆信息系统” 就是其中翘楚。这个作业有一定的复杂性，但是离实际的软件还差很远。</a:t>
             </a:r>
+            <a:endParaRPr lang="zh-CN" altLang="en-US" dirty="0"/>
           </a:p>
           <a:p>
             <a:pPr>
@@ -17157,7 +17037,7 @@
             <a:endParaRPr lang="en-US" altLang="zh-CN" dirty="0"/>
           </a:p>
           <a:p>
-            <a:pPr marL="118872" indent="0">
+            <a:pPr marL="118745" indent="0">
               <a:lnSpc>
                 <a:spcPct val="120000"/>
               </a:lnSpc>
@@ -17168,11 +17048,6 @@
         </p:txBody>
       </p:sp>
     </p:spTree>
-    <p:extLst>
-      <p:ext uri="{BB962C8B-B14F-4D97-AF65-F5344CB8AC3E}">
-        <p14:creationId xmlns:p14="http://schemas.microsoft.com/office/powerpoint/2010/main" val="860550191"/>
-      </p:ext>
-    </p:extLst>
   </p:cSld>
   <p:clrMapOvr>
     <a:masterClrMapping/>
@@ -17321,11 +17196,6 @@
         </p:txBody>
       </p:sp>
     </p:spTree>
-    <p:extLst>
-      <p:ext uri="{BB962C8B-B14F-4D97-AF65-F5344CB8AC3E}">
-        <p14:creationId xmlns:p14="http://schemas.microsoft.com/office/powerpoint/2010/main" val="560694357"/>
-      </p:ext>
-    </p:extLst>
   </p:cSld>
   <p:clrMapOvr>
     <a:masterClrMapping/>
@@ -17418,6 +17288,7 @@
               <a:rPr lang="zh-CN" altLang="en-US" dirty="0"/>
               <a:t>指出</a:t>
             </a:r>
+            <a:endParaRPr lang="zh-CN" altLang="en-US" dirty="0"/>
           </a:p>
           <a:p>
             <a:pPr lvl="1"/>
@@ -17448,6 +17319,7 @@
               <a:rPr lang="en-US" dirty="0"/>
               <a:t>Open-Close Principle， OCP）: </a:t>
             </a:r>
+            <a:endParaRPr lang="en-US" dirty="0"/>
           </a:p>
           <a:p>
             <a:pPr lvl="1"/>
@@ -17455,6 +17327,7 @@
               <a:rPr lang="zh-CN" altLang="en-US" dirty="0"/>
               <a:t>软件实体应该是可以扩展的，同时是不可修改的。</a:t>
             </a:r>
+            <a:endParaRPr lang="zh-CN" altLang="en-US" dirty="0"/>
           </a:p>
           <a:p>
             <a:pPr lvl="2"/>
@@ -17474,6 +17347,7 @@
               <a:rPr lang="zh-CN" altLang="en-US" dirty="0"/>
               <a:t>）。当应用的需求发生改变时，我们可以对模块进行扩 展，从而改变模块的功能。</a:t>
             </a:r>
+            <a:endParaRPr lang="zh-CN" altLang="en-US" dirty="0"/>
           </a:p>
           <a:p>
             <a:pPr lvl="2"/>
@@ -17493,6 +17367,7 @@
               <a:rPr lang="zh-CN" altLang="en-US" dirty="0"/>
               <a:t>对模块行为进行扩展时，不必改变模块的本身。 </a:t>
             </a:r>
+            <a:endParaRPr lang="zh-CN" altLang="en-US" dirty="0"/>
           </a:p>
           <a:p>
             <a:endParaRPr lang="en-US" dirty="0"/>
@@ -17500,11 +17375,6 @@
         </p:txBody>
       </p:sp>
     </p:spTree>
-    <p:extLst>
-      <p:ext uri="{BB962C8B-B14F-4D97-AF65-F5344CB8AC3E}">
-        <p14:creationId xmlns:p14="http://schemas.microsoft.com/office/powerpoint/2010/main" val="4243110794"/>
-      </p:ext>
-    </p:extLst>
   </p:cSld>
   <p:clrMapOvr>
     <a:masterClrMapping/>
@@ -17668,11 +17538,6 @@
         </p:txBody>
       </p:sp>
     </p:spTree>
-    <p:extLst>
-      <p:ext uri="{BB962C8B-B14F-4D97-AF65-F5344CB8AC3E}">
-        <p14:creationId xmlns:p14="http://schemas.microsoft.com/office/powerpoint/2010/main" val="544504135"/>
-      </p:ext>
-    </p:extLst>
   </p:cSld>
   <p:clrMapOvr>
     <a:masterClrMapping/>
@@ -17754,6 +17619,7 @@
               <a:rPr lang="zh-CN" altLang="en-US" dirty="0"/>
               <a:t>从数据方面扩展： </a:t>
             </a:r>
+            <a:endParaRPr lang="zh-CN" altLang="en-US" dirty="0"/>
           </a:p>
           <a:p>
             <a:pPr lvl="1">
@@ -17777,6 +17643,7 @@
               <a:rPr lang="zh-CN" altLang="en-US" dirty="0"/>
               <a:t>位的数字），这样引入大数的处理。</a:t>
             </a:r>
+            <a:endParaRPr lang="zh-CN" altLang="en-US" dirty="0"/>
           </a:p>
           <a:p>
             <a:pPr lvl="1">
@@ -17792,6 +17659,7 @@
               <a:rPr lang="zh-CN" altLang="en-US" dirty="0"/>
               <a:t>数据的数量扩展，很多老师出题就假设数组只有六七个元素，直接写死在程序中。 如果这个数组有一万个、十万个元素呢？如果元素保存在文件里呢？ </a:t>
             </a:r>
+            <a:endParaRPr lang="zh-CN" altLang="en-US" dirty="0"/>
           </a:p>
           <a:p>
             <a:pPr lvl="1">
@@ -17807,6 +17675,7 @@
               <a:rPr lang="zh-CN" altLang="en-US" dirty="0"/>
               <a:t>数据的维度扩展，如果数据是在多维数组中呢？ </a:t>
             </a:r>
+            <a:endParaRPr lang="zh-CN" altLang="en-US" dirty="0"/>
           </a:p>
           <a:p>
             <a:pPr lvl="1">
@@ -17822,15 +17691,11 @@
               <a:rPr lang="zh-CN" altLang="en-US" dirty="0"/>
               <a:t>数据的其他属性扩展，例如，如果你的程序能处理北京的地铁数据，如何改进你的 程序，让它能动态处理上海或其他城市的数据呢？这样程序就要引入某种抽象来表示“地点”，而不是僵化地假设数据就是北京的。</a:t>
             </a:r>
+            <a:endParaRPr lang="zh-CN" altLang="en-US" dirty="0"/>
           </a:p>
         </p:txBody>
       </p:sp>
     </p:spTree>
-    <p:extLst>
-      <p:ext uri="{BB962C8B-B14F-4D97-AF65-F5344CB8AC3E}">
-        <p14:creationId xmlns:p14="http://schemas.microsoft.com/office/powerpoint/2010/main" val="2158645595"/>
-      </p:ext>
-    </p:extLst>
   </p:cSld>
   <p:clrMapOvr>
     <a:masterClrMapping/>
@@ -17924,6 +17789,7 @@
               <a:rPr lang="zh-CN" altLang="en-US" dirty="0"/>
               <a:t>多程序的需求都是非常抽象，可以用数学公式描述和验证的，例如：“找出数组中的最大值”，然而实际需求的复杂度往往超过了数学公式的表达能力。请考虑下面几种扩展的方式： </a:t>
             </a:r>
+            <a:endParaRPr lang="zh-CN" altLang="en-US" dirty="0"/>
           </a:p>
           <a:p>
             <a:pPr lvl="1">
@@ -17939,6 +17805,7 @@
               <a:rPr lang="zh-CN" altLang="en-US" dirty="0"/>
               <a:t>是仅仅要求结果，而是要让程序把计算的过程显示出来。请搜索各种“动画显示排 序过程”的资料，然后自己实现一下。</a:t>
             </a:r>
+            <a:endParaRPr lang="zh-CN" altLang="en-US" dirty="0"/>
           </a:p>
           <a:p>
             <a:pPr lvl="1">
@@ -17954,6 +17821,7 @@
               <a:rPr lang="zh-CN" altLang="en-US" dirty="0"/>
               <a:t>需求的维度方面扩展，例如学生写了一个“统计程序有多少行” 的程序，我们可以 进一步要求，能把注释行、空行、只有一个字符的行去掉么？能处理目录里面的多个文件么？ </a:t>
             </a:r>
+            <a:endParaRPr lang="zh-CN" altLang="en-US" dirty="0"/>
           </a:p>
           <a:p>
             <a:pPr lvl="1">
@@ -18017,6 +17885,7 @@
               <a:rPr lang="zh-CN" altLang="en-US" dirty="0"/>
               <a:t>本书的记录，这是图书馆么？ </a:t>
             </a:r>
+            <a:endParaRPr lang="zh-CN" altLang="en-US" dirty="0"/>
           </a:p>
           <a:p>
             <a:pPr lvl="1">
@@ -18040,6 +17909,7 @@
               <a:rPr lang="zh-CN" altLang="en-US" dirty="0"/>
               <a:t>语法，支持无限的 “后悔”操作；让图书馆信息系统支持手机客户端。如果图形编辑器支持三种图形模板，现在引入五种新的模板，在这种情况下，程序员就会审视自己的设计是否能遵循一些设计原则，来高效率地满足需求。</a:t>
             </a:r>
+            <a:endParaRPr lang="zh-CN" altLang="en-US" dirty="0"/>
           </a:p>
           <a:p>
             <a:pPr lvl="1">
@@ -18055,15 +17925,11 @@
               <a:rPr lang="zh-CN" altLang="en-US" dirty="0"/>
               <a:t>索创新的方式来满足已有的需求，或即将出现的需求。 </a:t>
             </a:r>
+            <a:endParaRPr lang="zh-CN" altLang="en-US" dirty="0"/>
           </a:p>
         </p:txBody>
       </p:sp>
     </p:spTree>
-    <p:extLst>
-      <p:ext uri="{BB962C8B-B14F-4D97-AF65-F5344CB8AC3E}">
-        <p14:creationId xmlns:p14="http://schemas.microsoft.com/office/powerpoint/2010/main" val="3599711863"/>
-      </p:ext>
-    </p:extLst>
   </p:cSld>
   <p:clrMapOvr>
     <a:masterClrMapping/>
@@ -18141,6 +18007,7 @@
               <a:rPr lang="zh-CN" altLang="en-US" dirty="0"/>
               <a:t>从用户方面扩展：绝大部分大作业都是单机运行，给一个用户（老师）看一次，看完就万事大吉。我们可以考虑下面的扩展方式： </a:t>
             </a:r>
+            <a:endParaRPr lang="zh-CN" altLang="en-US" dirty="0"/>
           </a:p>
           <a:p>
             <a:pPr lvl="1">
@@ -18156,6 +18023,7 @@
               <a:rPr lang="zh-CN" altLang="en-US" dirty="0"/>
               <a:t>用户第二次使用这个软件的时候，能有什么功能，让单用户更喜欢这个软件？（例 如：记住上次的状态，自动展现上次文档最后编辑的地方，等等。） </a:t>
             </a:r>
+            <a:endParaRPr lang="zh-CN" altLang="en-US" dirty="0"/>
           </a:p>
           <a:p>
             <a:pPr lvl="1">
@@ -18187,6 +18055,7 @@
               <a:rPr lang="zh-CN" altLang="en-US" dirty="0"/>
               <a:t>？如何设计游戏的服务？ </a:t>
             </a:r>
+            <a:endParaRPr lang="zh-CN" altLang="en-US" dirty="0"/>
           </a:p>
           <a:p>
             <a:pPr lvl="1">
@@ -18202,6 +18071,7 @@
               <a:rPr lang="zh-CN" altLang="en-US" dirty="0"/>
               <a:t>户从世界各地来，怎么办？你的“程序”能提供多种语言的界面么？ </a:t>
             </a:r>
+            <a:endParaRPr lang="zh-CN" altLang="en-US" dirty="0"/>
           </a:p>
           <a:p>
             <a:pPr lvl="1">
@@ -18217,15 +18087,11 @@
               <a:rPr lang="zh-CN" altLang="en-US" dirty="0"/>
               <a:t>户有善意的和恶意的，如何让你的程序更安全？如何测试安全性？ </a:t>
             </a:r>
+            <a:endParaRPr lang="zh-CN" altLang="en-US" dirty="0"/>
           </a:p>
         </p:txBody>
       </p:sp>
     </p:spTree>
-    <p:extLst>
-      <p:ext uri="{BB962C8B-B14F-4D97-AF65-F5344CB8AC3E}">
-        <p14:creationId xmlns:p14="http://schemas.microsoft.com/office/powerpoint/2010/main" val="2204531274"/>
-      </p:ext>
-    </p:extLst>
   </p:cSld>
   <p:clrMapOvr>
     <a:masterClrMapping/>
@@ -18296,6 +18162,7 @@
               <a:rPr lang="zh-CN" altLang="en-US" dirty="0"/>
               <a:t>从软件构建方面扩展： </a:t>
             </a:r>
+            <a:endParaRPr lang="zh-CN" altLang="en-US" dirty="0"/>
           </a:p>
           <a:p>
             <a:pPr lvl="1"/>
@@ -18307,6 +18174,7 @@
               <a:rPr lang="zh-CN" altLang="en-US" dirty="0"/>
               <a:t>果是把一个已有的软件从一个平台迁移到另一个平台，怎么办？ </a:t>
             </a:r>
+            <a:endParaRPr lang="zh-CN" altLang="en-US" dirty="0"/>
           </a:p>
           <a:p>
             <a:pPr lvl="1"/>
@@ -18326,6 +18194,7 @@
               <a:rPr lang="zh-CN" altLang="en-US" dirty="0"/>
               <a:t>） ？ </a:t>
             </a:r>
+            <a:endParaRPr lang="zh-CN" altLang="en-US" dirty="0"/>
           </a:p>
           <a:p>
             <a:pPr lvl="1"/>
@@ -18337,15 +18206,11 @@
               <a:rPr lang="zh-CN" altLang="en-US" dirty="0"/>
               <a:t>果软件已经在服务中（例如图书馆信息系统），如何升级部分模块，同时尽量减少 系统下线的时间？ </a:t>
             </a:r>
+            <a:endParaRPr lang="zh-CN" altLang="en-US" dirty="0"/>
           </a:p>
         </p:txBody>
       </p:sp>
     </p:spTree>
-    <p:extLst>
-      <p:ext uri="{BB962C8B-B14F-4D97-AF65-F5344CB8AC3E}">
-        <p14:creationId xmlns:p14="http://schemas.microsoft.com/office/powerpoint/2010/main" val="2629546331"/>
-      </p:ext>
-    </p:extLst>
   </p:cSld>
   <p:clrMapOvr>
     <a:masterClrMapping/>
@@ -18419,6 +18284,7 @@
               <a:rPr lang="en-US" dirty="0" smtClean="0"/>
               <a:t>Personal Soccer Process</a:t>
             </a:r>
+            <a:endParaRPr lang="en-US" dirty="0" smtClean="0"/>
           </a:p>
           <a:p>
             <a:pPr lvl="1"/>
@@ -18450,6 +18316,7 @@
               <a:rPr lang="en-US" altLang="zh-CN" dirty="0" smtClean="0"/>
               <a:t>Ph.D. degree? </a:t>
             </a:r>
+            <a:endParaRPr lang="en-US" altLang="zh-CN" dirty="0" smtClean="0"/>
           </a:p>
           <a:p>
             <a:pPr lvl="1"/>
@@ -18467,6 +18334,7 @@
               <a:rPr lang="en-US" dirty="0" smtClean="0"/>
               <a:t>Team Soccer Process</a:t>
             </a:r>
+            <a:endParaRPr lang="en-US" dirty="0" smtClean="0"/>
           </a:p>
           <a:p>
             <a:pPr lvl="1"/>
@@ -18497,6 +18365,7 @@
               <a:rPr lang="en-US" altLang="zh-CN" dirty="0" smtClean="0"/>
               <a:t>Process is not the goal. </a:t>
             </a:r>
+            <a:endParaRPr lang="en-US" altLang="zh-CN" dirty="0" smtClean="0"/>
           </a:p>
           <a:p>
             <a:r>
@@ -18516,7 +18385,7 @@
       <p:pic>
         <p:nvPicPr>
           <p:cNvPr id="1031" name="Picture 7" descr="http://t1.gstatic.com/images?q=tbn:Ervd0cBao52trM:http://s3.amazonaws.com/pixmac-preview/soccer-player-silhouettes-1.jpg">
-            <a:hlinkClick r:id="rId3"/>
+            <a:hlinkClick r:id="rId1"/>
           </p:cNvPr>
           <p:cNvPicPr>
             <a:picLocks noChangeAspect="1" noChangeArrowheads="1"/>
@@ -18524,7 +18393,7 @@
           <p:nvPr/>
         </p:nvPicPr>
         <p:blipFill>
-          <a:blip r:embed="rId4" cstate="print"/>
+          <a:blip r:embed="rId2" cstate="print"/>
           <a:srcRect/>
           <a:stretch>
             <a:fillRect/>
@@ -18550,7 +18419,7 @@
           <p:nvPr/>
         </p:nvPicPr>
         <p:blipFill>
-          <a:blip r:embed="rId5" cstate="print"/>
+          <a:blip r:embed="rId3" cstate="print"/>
           <a:srcRect/>
           <a:stretch>
             <a:fillRect/>
@@ -19429,18 +19298,18 @@
             <a:endParaRPr lang="en-US" altLang="zh-CN" dirty="0" smtClean="0"/>
           </a:p>
           <a:p>
-            <a:pPr marL="118872" indent="0">
+            <a:pPr marL="118745" indent="0">
               <a:buNone/>
             </a:pPr>
             <a:r>
               <a:rPr lang="en-US" altLang="zh-CN" dirty="0">
-                <a:hlinkClick r:id="rId2"/>
+                <a:hlinkClick r:id="rId1"/>
               </a:rPr>
               <a:t>http://</a:t>
             </a:r>
             <a:r>
               <a:rPr lang="en-US" altLang="zh-CN" dirty="0" smtClean="0">
-                <a:hlinkClick r:id="rId2"/>
+                <a:hlinkClick r:id="rId1"/>
               </a:rPr>
               <a:t>www.cnblogs.com/xinz/p/3852177.html</a:t>
             </a:r>
@@ -19453,11 +19322,6 @@
         </p:txBody>
       </p:sp>
     </p:spTree>
-    <p:extLst>
-      <p:ext uri="{BB962C8B-B14F-4D97-AF65-F5344CB8AC3E}">
-        <p14:creationId xmlns:p14="http://schemas.microsoft.com/office/powerpoint/2010/main" val="40520653"/>
-      </p:ext>
-    </p:extLst>
   </p:cSld>
   <p:clrMapOvr>
     <a:masterClrMapping/>
@@ -19524,13 +19388,13 @@
           <a:p>
             <a:r>
               <a:rPr lang="en-US" altLang="zh-CN">
-                <a:hlinkClick r:id="rId2"/>
+                <a:hlinkClick r:id="rId1"/>
               </a:rPr>
               <a:t>http://</a:t>
             </a:r>
             <a:r>
               <a:rPr lang="en-US" altLang="zh-CN" smtClean="0">
-                <a:hlinkClick r:id="rId2"/>
+                <a:hlinkClick r:id="rId1"/>
               </a:rPr>
               <a:t>www.cnblogs.com/xinz/p/3803109.html</a:t>
             </a:r>
@@ -19544,6 +19408,7 @@
               <a:rPr lang="en-US" altLang="zh-CN" dirty="0" smtClean="0"/>
               <a:t>how do you measure the performance of each team member?</a:t>
             </a:r>
+            <a:endParaRPr lang="en-US" altLang="zh-CN" dirty="0" smtClean="0"/>
           </a:p>
           <a:p>
             <a:pPr lvl="1"/>
@@ -19699,6 +19564,7 @@
               <a:rPr lang="en-US" altLang="zh-CN" sz="2200" b="1" dirty="0" smtClean="0"/>
               <a:t>(this is your focus)</a:t>
             </a:r>
+            <a:endParaRPr lang="en-US" altLang="zh-CN" sz="2200" b="1" dirty="0" smtClean="0"/>
           </a:p>
           <a:p>
             <a:pPr>
@@ -19744,6 +19610,7 @@
               <a:rPr lang="en-US" altLang="zh-CN" sz="2400" dirty="0" smtClean="0"/>
               <a:t>?</a:t>
             </a:r>
+            <a:endParaRPr lang="en-US" altLang="zh-CN" sz="2400" dirty="0" smtClean="0"/>
           </a:p>
           <a:p>
             <a:pPr>
@@ -19755,7 +19622,7 @@
             </a:r>
             <a:r>
               <a:rPr lang="en-US" altLang="zh-CN" sz="2400" dirty="0" smtClean="0">
-                <a:sym typeface="Wingdings" pitchFamily="2" charset="2"/>
+                <a:sym typeface="Wingdings" panose="05000000000000000000" pitchFamily="2" charset="2"/>
               </a:rPr>
               <a:t></a:t>
             </a:r>
@@ -19841,11 +19708,6 @@
         </p:txBody>
       </p:sp>
     </p:spTree>
-    <p:extLst>
-      <p:ext uri="{BB962C8B-B14F-4D97-AF65-F5344CB8AC3E}">
-        <p14:creationId xmlns:p14="http://schemas.microsoft.com/office/powerpoint/2010/main" val="1088086049"/>
-      </p:ext>
-    </p:extLst>
   </p:cSld>
   <p:clrMapOvr>
     <a:masterClrMapping/>
@@ -19944,6 +19806,7 @@
               <a:rPr lang="en-US" altLang="zh-CN" dirty="0" smtClean="0"/>
               <a:t>: </a:t>
             </a:r>
+            <a:endParaRPr lang="en-US" altLang="zh-CN" dirty="0" smtClean="0"/>
           </a:p>
           <a:p>
             <a:pPr marL="0" indent="0">
@@ -20022,11 +19885,6 @@
         </p:txBody>
       </p:sp>
     </p:spTree>
-    <p:extLst>
-      <p:ext uri="{BB962C8B-B14F-4D97-AF65-F5344CB8AC3E}">
-        <p14:creationId xmlns:p14="http://schemas.microsoft.com/office/powerpoint/2010/main" val="3276572003"/>
-      </p:ext>
-    </p:extLst>
   </p:cSld>
   <p:clrMapOvr>
     <a:masterClrMapping/>
@@ -20105,12 +19963,14 @@
               <a:rPr lang="en-US" sz="2800" dirty="0" smtClean="0"/>
               <a:t>Most components in a software system is developed and maintained by Individual Contributor (IC)</a:t>
             </a:r>
+            <a:endParaRPr lang="en-US" sz="2800" dirty="0" smtClean="0"/>
           </a:p>
           <a:p>
             <a:r>
               <a:rPr lang="en-US" sz="2800" dirty="0" smtClean="0"/>
               <a:t>IC needs to – </a:t>
             </a:r>
+            <a:endParaRPr lang="en-US" sz="2800" dirty="0" smtClean="0"/>
           </a:p>
           <a:p>
             <a:pPr lvl="1"/>
@@ -20118,6 +19978,7 @@
               <a:rPr lang="en-US" sz="2000" dirty="0" smtClean="0"/>
               <a:t>Understand the current situation</a:t>
             </a:r>
+            <a:endParaRPr lang="en-US" sz="2000" dirty="0" smtClean="0"/>
           </a:p>
           <a:p>
             <a:pPr lvl="1"/>
@@ -20125,6 +19986,7 @@
               <a:rPr lang="en-US" sz="2000" dirty="0" smtClean="0"/>
               <a:t>Find the solution</a:t>
             </a:r>
+            <a:endParaRPr lang="en-US" sz="2000" dirty="0" smtClean="0"/>
           </a:p>
           <a:p>
             <a:pPr lvl="1"/>
@@ -20132,6 +19994,7 @@
               <a:rPr lang="en-US" sz="2000" dirty="0" smtClean="0"/>
               <a:t>Estimate the work</a:t>
             </a:r>
+            <a:endParaRPr lang="en-US" sz="2000" dirty="0" smtClean="0"/>
           </a:p>
           <a:p>
             <a:pPr lvl="1"/>
@@ -20139,6 +20002,7 @@
               <a:rPr lang="en-US" sz="2000" dirty="0" smtClean="0"/>
               <a:t>Communicate the proposal to stake holders and customers</a:t>
             </a:r>
+            <a:endParaRPr lang="en-US" sz="2000" dirty="0" smtClean="0"/>
           </a:p>
           <a:p>
             <a:pPr lvl="1"/>
@@ -20146,6 +20010,7 @@
               <a:rPr lang="en-US" sz="2000" dirty="0" smtClean="0"/>
               <a:t>Carry out the work</a:t>
             </a:r>
+            <a:endParaRPr lang="en-US" sz="2000" dirty="0" smtClean="0"/>
           </a:p>
           <a:p>
             <a:pPr lvl="1"/>
@@ -20153,12 +20018,14 @@
               <a:rPr lang="en-US" sz="2000" dirty="0" smtClean="0"/>
               <a:t>Be accountable for the outcome</a:t>
             </a:r>
+            <a:endParaRPr lang="en-US" sz="2000" dirty="0" smtClean="0"/>
           </a:p>
           <a:p>
             <a:r>
               <a:rPr lang="en-US" sz="2800" dirty="0" smtClean="0"/>
               <a:t>The quality of each individual can directly affect the quality of shipped product. </a:t>
             </a:r>
+            <a:endParaRPr lang="en-US" sz="2800" dirty="0" smtClean="0"/>
           </a:p>
         </p:txBody>
       </p:sp>
@@ -20262,6 +20129,7 @@
               <a:rPr lang="en-US" altLang="zh-CN" dirty="0" smtClean="0"/>
               <a:t>?</a:t>
             </a:r>
+            <a:endParaRPr lang="en-US" altLang="zh-CN" dirty="0" smtClean="0"/>
           </a:p>
           <a:p>
             <a:pPr>
@@ -20281,6 +20149,7 @@
               <a:rPr lang="en-US" altLang="zh-CN" dirty="0" smtClean="0"/>
               <a:t>:</a:t>
             </a:r>
+            <a:endParaRPr lang="en-US" altLang="zh-CN" dirty="0" smtClean="0"/>
           </a:p>
           <a:p>
             <a:pPr lvl="1">
@@ -20392,6 +20261,7 @@
               <a:rPr lang="en-US" altLang="zh-CN" dirty="0" smtClean="0"/>
               <a:t>:</a:t>
             </a:r>
+            <a:endParaRPr lang="en-US" altLang="zh-CN" dirty="0" smtClean="0"/>
           </a:p>
           <a:p>
             <a:pPr lvl="1">
@@ -20415,6 +20285,7 @@
               <a:rPr lang="en-US" altLang="zh-CN" dirty="0" smtClean="0"/>
               <a:t>…</a:t>
             </a:r>
+            <a:endParaRPr lang="en-US" altLang="zh-CN" dirty="0" smtClean="0"/>
           </a:p>
           <a:p>
             <a:pPr lvl="1">
@@ -20442,6 +20313,7 @@
               <a:rPr lang="en-US" altLang="zh-CN" dirty="0" smtClean="0"/>
               <a:t>…</a:t>
             </a:r>
+            <a:endParaRPr lang="en-US" altLang="zh-CN" dirty="0" smtClean="0"/>
           </a:p>
           <a:p>
             <a:pPr lvl="1">
@@ -20501,6 +20373,7 @@
               <a:rPr lang="en-US" altLang="zh-CN" dirty="0" smtClean="0"/>
               <a:t>? </a:t>
             </a:r>
+            <a:endParaRPr lang="en-US" altLang="zh-CN" dirty="0" smtClean="0"/>
           </a:p>
           <a:p>
             <a:pPr>
@@ -20516,6 +20389,7 @@
               <a:rPr lang="en-US" altLang="zh-CN" dirty="0" smtClean="0"/>
               <a:t>?</a:t>
             </a:r>
+            <a:endParaRPr lang="en-US" altLang="zh-CN" dirty="0" smtClean="0"/>
           </a:p>
           <a:p>
             <a:pPr lvl="1">
@@ -20536,11 +20410,6 @@
         </p:txBody>
       </p:sp>
     </p:spTree>
-    <p:extLst>
-      <p:ext uri="{BB962C8B-B14F-4D97-AF65-F5344CB8AC3E}">
-        <p14:creationId xmlns:p14="http://schemas.microsoft.com/office/powerpoint/2010/main" val="2010243271"/>
-      </p:ext>
-    </p:extLst>
   </p:cSld>
   <p:clrMapOvr>
     <a:masterClrMapping/>
@@ -21163,6 +21032,7 @@
               <a:rPr lang="zh-CN" altLang="en-US" dirty="0"/>
               <a:t>让学生自己构建</a:t>
             </a:r>
+            <a:endParaRPr lang="zh-CN" altLang="en-US" dirty="0"/>
           </a:p>
           <a:p>
             <a:r>
@@ -21201,6 +21071,7 @@
               <a:rPr lang="zh-CN" altLang="en-US" dirty="0"/>
               <a:t>喊口号的培训未必改变了人的认知模型</a:t>
             </a:r>
+            <a:endParaRPr lang="zh-CN" altLang="en-US" dirty="0"/>
           </a:p>
           <a:p>
             <a:r>
@@ -21235,6 +21106,7 @@
               <a:rPr lang="en-US" altLang="zh-CN" dirty="0"/>
               <a:t>,</a:t>
             </a:r>
+            <a:endParaRPr lang="en-US" altLang="zh-CN" dirty="0"/>
           </a:p>
           <a:p>
             <a:r>
@@ -21253,15 +21125,11 @@
               <a:rPr lang="zh-CN" altLang="en-US" dirty="0"/>
               <a:t>关键   </a:t>
             </a:r>
+            <a:endParaRPr lang="zh-CN" altLang="en-US" dirty="0"/>
           </a:p>
         </p:txBody>
       </p:sp>
     </p:spTree>
-    <p:extLst>
-      <p:ext uri="{BB962C8B-B14F-4D97-AF65-F5344CB8AC3E}">
-        <p14:creationId xmlns:p14="http://schemas.microsoft.com/office/powerpoint/2010/main" val="45561062"/>
-      </p:ext>
-    </p:extLst>
   </p:cSld>
   <p:clrMapOvr>
     <a:masterClrMapping/>
@@ -21348,15 +21216,12 @@
               <a:rPr lang="en-US" sz="2000" dirty="0" smtClean="0"/>
               <a:t>Body of knowledge (PSP)</a:t>
             </a:r>
+            <a:endParaRPr lang="en-US" sz="2000" dirty="0" smtClean="0"/>
           </a:p>
           <a:p>
             <a:r>
               <a:rPr lang="en-US" sz="2400" b="1" dirty="0" smtClean="0"/>
               <a:t>Process</a:t>
-            </a:r>
-            <a:r>
-              <a:rPr lang="en-US" sz="2400" dirty="0" smtClean="0"/>
-              <a:t/>
             </a:r>
             <a:br>
               <a:rPr lang="en-US" sz="2400" dirty="0" smtClean="0"/>
@@ -21373,6 +21238,7 @@
               <a:rPr lang="en-US" sz="2400" dirty="0" smtClean="0"/>
               <a:t> to PSP is the requirements; </a:t>
             </a:r>
+            <a:endParaRPr lang="en-US" sz="2400" dirty="0" smtClean="0"/>
           </a:p>
           <a:p>
             <a:pPr lvl="1"/>
@@ -21380,6 +21246,7 @@
               <a:rPr lang="en-US" sz="2000" dirty="0" smtClean="0"/>
               <a:t>requirement document is completed and delivered to the engineer.   </a:t>
             </a:r>
+            <a:endParaRPr lang="en-US" sz="2000" dirty="0" smtClean="0"/>
           </a:p>
           <a:p>
             <a:r>
@@ -21390,6 +21257,7 @@
               <a:rPr lang="en-US" sz="2400" dirty="0" smtClean="0"/>
               <a:t>: metrics telling how good an engineer is. </a:t>
             </a:r>
+            <a:endParaRPr lang="en-US" sz="2400" dirty="0" smtClean="0"/>
           </a:p>
           <a:p>
             <a:r>
@@ -21400,6 +21268,7 @@
               <a:rPr lang="en-US" sz="2400" dirty="0" smtClean="0"/>
               <a:t>has 3 phases:</a:t>
             </a:r>
+            <a:endParaRPr lang="en-US" sz="2400" dirty="0" smtClean="0"/>
           </a:p>
           <a:p>
             <a:pPr lvl="1"/>
@@ -21407,6 +21276,7 @@
               <a:rPr lang="en-US" sz="2000" dirty="0" smtClean="0"/>
               <a:t>planning, </a:t>
             </a:r>
+            <a:endParaRPr lang="en-US" sz="2000" dirty="0" smtClean="0"/>
           </a:p>
           <a:p>
             <a:pPr lvl="1"/>
@@ -21414,6 +21284,7 @@
               <a:rPr lang="en-US" sz="2000" dirty="0" smtClean="0"/>
               <a:t>development (design, coding, test) </a:t>
             </a:r>
+            <a:endParaRPr lang="en-US" sz="2000" dirty="0" smtClean="0"/>
           </a:p>
           <a:p>
             <a:pPr lvl="1"/>
@@ -21421,6 +21292,7 @@
               <a:rPr lang="en-US" sz="2000" dirty="0" smtClean="0"/>
               <a:t>postmortem. </a:t>
             </a:r>
+            <a:endParaRPr lang="en-US" sz="2000" dirty="0" smtClean="0"/>
           </a:p>
           <a:p>
             <a:r>
@@ -21528,6 +21400,7 @@
               <a:rPr lang="en-US" sz="2800" dirty="0" smtClean="0"/>
               <a:t>Adding </a:t>
             </a:r>
+            <a:endParaRPr lang="en-US" sz="2800" dirty="0" smtClean="0"/>
           </a:p>
           <a:p>
             <a:pPr lvl="1"/>
@@ -21547,6 +21420,7 @@
               <a:rPr lang="en-US" sz="2800" dirty="0" smtClean="0"/>
               <a:t>tandard</a:t>
             </a:r>
+            <a:endParaRPr lang="en-US" sz="2800" dirty="0" smtClean="0"/>
           </a:p>
           <a:p>
             <a:pPr lvl="1"/>
@@ -21554,6 +21428,7 @@
               <a:rPr lang="en-US" sz="2800" dirty="0" smtClean="0"/>
               <a:t>Size Measurement</a:t>
             </a:r>
+            <a:endParaRPr lang="en-US" sz="2800" dirty="0" smtClean="0"/>
           </a:p>
           <a:p>
             <a:pPr lvl="1"/>
@@ -21569,6 +21444,7 @@
               <a:rPr lang="en-US" sz="2800" dirty="0" smtClean="0"/>
               <a:t>lan (PIP) – engineer records ideas for improving his own process</a:t>
             </a:r>
+            <a:endParaRPr lang="en-US" sz="2800" dirty="0" smtClean="0"/>
           </a:p>
           <a:p>
             <a:r>
@@ -21579,6 +21455,11 @@
               </a:rPr>
               <a:t>Do you have these in your I-Project?</a:t>
             </a:r>
+            <a:endParaRPr lang="en-US" sz="3200" dirty="0" smtClean="0">
+              <a:solidFill>
+                <a:srgbClr val="FF0000"/>
+              </a:solidFill>
+            </a:endParaRPr>
           </a:p>
           <a:p>
             <a:endParaRPr lang="en-US" sz="4000" dirty="0"/>
@@ -21883,8 +21764,11 @@
       </a:bgFillStyleLst>
     </a:fmtScheme>
   </a:themeElements>
-  <a:objectDefaults/>
-  <a:extraClrSchemeLst/>
+  <a:extLst>
+    <a:ext uri="{05A4C25C-085E-4340-85A3-A5531E510DB2}">
+      <thm15:themeFamily xmlns:thm15="http://schemas.microsoft.com/office/thememl/2012/main" name="Office Theme" id="{62F939B6-93AF-4DB8-9C6B-D6C7DFDC589F}" vid="{4A3C46E8-61CC-4603-A589-7422A47A8E4A}"/>
+    </a:ext>
+  </a:extLst>
 </a:theme>
 </file>
 
@@ -22166,8 +22050,11 @@
       </a:bgFillStyleLst>
     </a:fmtScheme>
   </a:themeElements>
-  <a:objectDefaults/>
-  <a:extraClrSchemeLst/>
+  <a:extLst>
+    <a:ext uri="{05A4C25C-085E-4340-85A3-A5531E510DB2}">
+      <thm15:themeFamily xmlns:thm15="http://schemas.microsoft.com/office/thememl/2012/main" name="Office Theme" id="{62F939B6-93AF-4DB8-9C6B-D6C7DFDC589F}" vid="{4A3C46E8-61CC-4603-A589-7422A47A8E4A}"/>
+    </a:ext>
+  </a:extLst>
 </a:theme>
 </file>
 
@@ -22302,33 +22189,18 @@
 
 <file path=customXml/itemProps1.xml><?xml version="1.0" encoding="utf-8"?>
 <ds:datastoreItem xmlns:ds="http://schemas.openxmlformats.org/officeDocument/2006/customXml" ds:itemID="{8768B0E8-F7C4-4929-B0A1-8ECCA4ABBF95}">
-  <ds:schemaRefs>
-    <ds:schemaRef ds:uri="http://schemas.microsoft.com/sharepoint/v3/contenttype/forms"/>
-  </ds:schemaRefs>
+  <ds:schemaRefs/>
 </ds:datastoreItem>
 </file>
 
 <file path=customXml/itemProps2.xml><?xml version="1.0" encoding="utf-8"?>
 <ds:datastoreItem xmlns:ds="http://schemas.openxmlformats.org/officeDocument/2006/customXml" ds:itemID="{AC38B70B-68EE-413F-8243-C962F94ACA64}">
-  <ds:schemaRefs>
-    <ds:schemaRef ds:uri="http://schemas.microsoft.com/office/2006/metadata/properties"/>
-    <ds:schemaRef ds:uri="http://schemas.microsoft.com/office/infopath/2007/PartnerControls"/>
-  </ds:schemaRefs>
+  <ds:schemaRefs/>
 </ds:datastoreItem>
 </file>
 
 <file path=customXml/itemProps3.xml><?xml version="1.0" encoding="utf-8"?>
 <ds:datastoreItem xmlns:ds="http://schemas.openxmlformats.org/officeDocument/2006/customXml" ds:itemID="{B3B0C391-DDE3-4D99-8DB2-DCB9F2C70771}">
-  <ds:schemaRefs>
-    <ds:schemaRef ds:uri="http://schemas.microsoft.com/office/2006/metadata/contentType"/>
-    <ds:schemaRef ds:uri="http://schemas.microsoft.com/office/2006/metadata/properties/metaAttributes"/>
-    <ds:schemaRef ds:uri="http://www.w3.org/2001/XMLSchema"/>
-    <ds:schemaRef ds:uri="http://schemas.microsoft.com/office/2006/metadata/properties"/>
-    <ds:schemaRef ds:uri="http://schemas.openxmlformats.org/package/2006/metadata/core-properties"/>
-    <ds:schemaRef ds:uri="http://purl.org/dc/elements/1.1/"/>
-    <ds:schemaRef ds:uri="http://purl.org/dc/terms/"/>
-    <ds:schemaRef ds:uri="http://schemas.microsoft.com/internal/obd"/>
-    <ds:schemaRef ds:uri="http://schemas.microsoft.com/office/infopath/2007/PartnerControls"/>
-  </ds:schemaRefs>
+  <ds:schemaRefs/>
 </ds:datastoreItem>
 </file>